--- a/presentation/CSE360-experiments-overview.pptx
+++ b/presentation/CSE360-experiments-overview.pptx
@@ -1,21 +1,24 @@
 
 <file path=ppt/presentation.xml><?xml version="1.0" encoding="utf-8"?>
-<p:presentation xmlns:a="http://schemas.openxmlformats.org/drawingml/2006/main" xmlns:r="http://schemas.openxmlformats.org/officeDocument/2006/relationships" xmlns:p="http://schemas.openxmlformats.org/presentationml/2006/main" saveSubsetFonts="1" autoCompressPictures="0">
+<p:presentation xmlns:a="http://schemas.openxmlformats.org/drawingml/2006/main" xmlns:r="http://schemas.openxmlformats.org/officeDocument/2006/relationships" xmlns:p="http://schemas.openxmlformats.org/presentationml/2006/main" xmlns:m="http://schemas.openxmlformats.org/officeDocument/2006/math" xmlns:w="http://schemas.openxmlformats.org/wordprocessingml/2006/main" autoCompressPictures="0" saveSubsetFonts="1">
   <p:sldMasterIdLst>
     <p:sldMasterId id="2147483648" r:id="rId1"/>
   </p:sldMasterIdLst>
+  <p:notesMasterIdLst>
+    <p:notesMasterId r:id="rId15"/>
+  </p:notesMasterIdLst>
   <p:sldIdLst>
-    <p:sldId id="256" r:id="rId7"/>
-    <p:sldId id="257" r:id="rId8"/>
-    <p:sldId id="258" r:id="rId10"/>
-    <p:sldId id="259" r:id="rId11"/>
-    <p:sldId id="260" r:id="rId12"/>
-    <p:sldId id="261" r:id="rId13"/>
-    <p:sldId id="262" r:id="rId14"/>
-    <p:sldId id="263" r:id="rId15"/>
-    <p:sldId id="264" r:id="rId16"/>
-    <p:sldId id="265" r:id="rId17"/>
-    <p:sldId id="266" r:id="rId18"/>
+    <p:sldId id="256" r:id="rId4"/>
+    <p:sldId id="257" r:id="rId5"/>
+    <p:sldId id="258" r:id="rId6"/>
+    <p:sldId id="259" r:id="rId7"/>
+    <p:sldId id="260" r:id="rId8"/>
+    <p:sldId id="261" r:id="rId9"/>
+    <p:sldId id="262" r:id="rId10"/>
+    <p:sldId id="263" r:id="rId11"/>
+    <p:sldId id="264" r:id="rId12"/>
+    <p:sldId id="265" r:id="rId13"/>
+    <p:sldId id="266" r:id="rId14"/>
   </p:sldIdLst>
   <p:sldSz cx="12191695" cy="6858000" type="screen4x3"/>
   <p:notesSz cx="6858000" cy="9144000"/>
@@ -23,8 +26,8 @@
     <a:defPPr>
       <a:defRPr lang="en-US"/>
     </a:defPPr>
-    <a:lvl1pPr marL="0" algn="l" defTabSz="457200" rtl="0" eaLnBrk="1" latinLnBrk="0" hangingPunct="1">
-      <a:defRPr sz="1800" kern="1200">
+    <a:lvl1pPr marL="0" algn="l" defTabSz="457200" rtl="0">
+      <a:defRPr sz="1800">
         <a:solidFill>
           <a:schemeClr val="tx1"/>
         </a:solidFill>
@@ -33,8 +36,8 @@
         <a:cs typeface="+mn-cs"/>
       </a:defRPr>
     </a:lvl1pPr>
-    <a:lvl2pPr marL="457200" algn="l" defTabSz="457200" rtl="0" eaLnBrk="1" latinLnBrk="0" hangingPunct="1">
-      <a:defRPr sz="1800" kern="1200">
+    <a:lvl2pPr marL="457200" algn="l" defTabSz="457200" rtl="0">
+      <a:defRPr sz="1800">
         <a:solidFill>
           <a:schemeClr val="tx1"/>
         </a:solidFill>
@@ -43,8 +46,8 @@
         <a:cs typeface="+mn-cs"/>
       </a:defRPr>
     </a:lvl2pPr>
-    <a:lvl3pPr marL="914400" algn="l" defTabSz="457200" rtl="0" eaLnBrk="1" latinLnBrk="0" hangingPunct="1">
-      <a:defRPr sz="1800" kern="1200">
+    <a:lvl3pPr marL="914400" algn="l" defTabSz="457200" rtl="0">
+      <a:defRPr sz="1800">
         <a:solidFill>
           <a:schemeClr val="tx1"/>
         </a:solidFill>
@@ -53,8 +56,8 @@
         <a:cs typeface="+mn-cs"/>
       </a:defRPr>
     </a:lvl3pPr>
-    <a:lvl4pPr marL="1371600" algn="l" defTabSz="457200" rtl="0" eaLnBrk="1" latinLnBrk="0" hangingPunct="1">
-      <a:defRPr sz="1800" kern="1200">
+    <a:lvl4pPr marL="1371600" algn="l" defTabSz="457200" rtl="0">
+      <a:defRPr sz="1800">
         <a:solidFill>
           <a:schemeClr val="tx1"/>
         </a:solidFill>
@@ -63,8 +66,8 @@
         <a:cs typeface="+mn-cs"/>
       </a:defRPr>
     </a:lvl4pPr>
-    <a:lvl5pPr marL="1828800" algn="l" defTabSz="457200" rtl="0" eaLnBrk="1" latinLnBrk="0" hangingPunct="1">
-      <a:defRPr sz="1800" kern="1200">
+    <a:lvl5pPr marL="1828800" algn="l" defTabSz="457200" rtl="0">
+      <a:defRPr sz="1800">
         <a:solidFill>
           <a:schemeClr val="tx1"/>
         </a:solidFill>
@@ -73,8 +76,8 @@
         <a:cs typeface="+mn-cs"/>
       </a:defRPr>
     </a:lvl5pPr>
-    <a:lvl6pPr marL="2286000" algn="l" defTabSz="457200" rtl="0" eaLnBrk="1" latinLnBrk="0" hangingPunct="1">
-      <a:defRPr sz="1800" kern="1200">
+    <a:lvl6pPr marL="2286000" algn="l" defTabSz="457200" rtl="0">
+      <a:defRPr sz="1800">
         <a:solidFill>
           <a:schemeClr val="tx1"/>
         </a:solidFill>
@@ -83,8 +86,8 @@
         <a:cs typeface="+mn-cs"/>
       </a:defRPr>
     </a:lvl6pPr>
-    <a:lvl7pPr marL="2743200" algn="l" defTabSz="457200" rtl="0" eaLnBrk="1" latinLnBrk="0" hangingPunct="1">
-      <a:defRPr sz="1800" kern="1200">
+    <a:lvl7pPr marL="2743200" algn="l" defTabSz="457200" rtl="0">
+      <a:defRPr sz="1800">
         <a:solidFill>
           <a:schemeClr val="tx1"/>
         </a:solidFill>
@@ -93,8 +96,8 @@
         <a:cs typeface="+mn-cs"/>
       </a:defRPr>
     </a:lvl7pPr>
-    <a:lvl8pPr marL="3200400" algn="l" defTabSz="457200" rtl="0" eaLnBrk="1" latinLnBrk="0" hangingPunct="1">
-      <a:defRPr sz="1800" kern="1200">
+    <a:lvl8pPr marL="3200400" algn="l" defTabSz="457200" rtl="0">
+      <a:defRPr sz="1800">
         <a:solidFill>
           <a:schemeClr val="tx1"/>
         </a:solidFill>
@@ -103,8 +106,8 @@
         <a:cs typeface="+mn-cs"/>
       </a:defRPr>
     </a:lvl8pPr>
-    <a:lvl9pPr marL="3657600" algn="l" defTabSz="457200" rtl="0" eaLnBrk="1" latinLnBrk="0" hangingPunct="1">
-      <a:defRPr sz="1800" kern="1200">
+    <a:lvl9pPr marL="3657600" algn="l" defTabSz="457200" rtl="0">
+      <a:defRPr sz="1800">
         <a:solidFill>
           <a:schemeClr val="tx1"/>
         </a:solidFill>
@@ -118,8 +121,8 @@
 </file>
 
 <file path=ppt/notesMasters/notesMaster1.xml><?xml version="1.0" encoding="utf-8"?>
-<p:notesMaster xmlns:a="http://schemas.openxmlformats.org/drawingml/2006/main" xmlns:p="http://schemas.openxmlformats.org/presentationml/2006/main" xmlns:r="http://schemas.openxmlformats.org/officeDocument/2006/relationships">
-  <p:cSld>
+<p:notesMaster xmlns:a="http://schemas.openxmlformats.org/drawingml/2006/main" xmlns:r="http://schemas.openxmlformats.org/officeDocument/2006/relationships" xmlns:p="http://schemas.openxmlformats.org/presentationml/2006/main">
+  <p:cSld name="">
     <p:bg>
       <p:bgRef idx="1001">
         <a:schemeClr val="bg1"/>
@@ -131,7 +134,7 @@
         <p:cNvGrpSpPr/>
         <p:nvPr/>
       </p:nvGrpSpPr>
-      <p:grpSpPr>
+      <p:grpSpPr bwMode="auto">
         <a:xfrm>
           <a:off x="0" y="0"/>
           <a:ext cx="0" cy="0"/>
@@ -141,7 +144,7 @@
       </p:grpSpPr>
       <p:sp>
         <p:nvSpPr>
-          <p:cNvPr id="2" name="Header Placeholder 1"/>
+          <p:cNvPr id="1704410739" name="Header Placeholder 1"/>
           <p:cNvSpPr>
             <a:spLocks noGrp="1"/>
           </p:cNvSpPr>
@@ -149,158 +152,131 @@
             <p:ph type="hdr" sz="quarter"/>
           </p:nvPr>
         </p:nvSpPr>
-        <p:spPr>
+        <p:spPr bwMode="auto">
           <a:xfrm>
             <a:off x="0" y="0"/>
-            <a:ext cx="2971800" cy="457200"/>
+            <a:ext cx="2971800" cy="458788"/>
           </a:xfrm>
           <a:prstGeom prst="rect">
             <a:avLst/>
           </a:prstGeom>
         </p:spPr>
         <p:txBody>
-          <a:bodyPr vert="horz" lIns="91440" tIns="45720" rIns="91440" bIns="45720" rtlCol="0"/>
+          <a:bodyPr vert="horz" lIns="91440" tIns="45720" rIns="91440" bIns="45720" rtlCol="0" anchor="ctr"/>
           <a:lstStyle>
             <a:lvl1pPr algn="l">
               <a:defRPr sz="1200"/>
             </a:lvl1pPr>
           </a:lstStyle>
           <a:p>
-            <a:endParaRPr lang="en-US"/>
-          </a:p>
-        </p:txBody>
-      </p:sp>
-      <p:sp>
-        <p:nvSpPr>
-          <p:cNvPr id="3" name="Date Placeholder 2"/>
-          <p:cNvSpPr>
-            <a:spLocks noGrp="1"/>
-          </p:cNvSpPr>
-          <p:nvPr>
-            <p:ph type="dt" idx="1"/>
-          </p:nvPr>
-        </p:nvSpPr>
-        <p:spPr>
+            <a:pPr>
+              <a:defRPr/>
+            </a:pPr>
+            <a:endParaRPr/>
+          </a:p>
+        </p:txBody>
+      </p:sp>
+      <p:sp>
+        <p:nvSpPr>
+          <p:cNvPr id="883907047" name="Date Placeholder 2"/>
+          <p:cNvSpPr>
+            <a:spLocks noGrp="1"/>
+          </p:cNvSpPr>
+          <p:nvPr>
+            <p:ph type="dt" idx="2"/>
+          </p:nvPr>
+        </p:nvSpPr>
+        <p:spPr bwMode="auto">
           <a:xfrm>
             <a:off x="3884613" y="0"/>
-            <a:ext cx="2971800" cy="457200"/>
+            <a:ext cx="2971800" cy="458788"/>
           </a:xfrm>
           <a:prstGeom prst="rect">
             <a:avLst/>
           </a:prstGeom>
         </p:spPr>
         <p:txBody>
-          <a:bodyPr vert="horz" lIns="91440" tIns="45720" rIns="91440" bIns="45720" rtlCol="0"/>
+          <a:bodyPr vert="horz" lIns="91440" tIns="45720" rIns="91440" bIns="45720" rtlCol="0" anchor="ctr"/>
           <a:lstStyle>
             <a:lvl1pPr algn="r">
               <a:defRPr sz="1200"/>
             </a:lvl1pPr>
           </a:lstStyle>
           <a:p>
-            <a:fld id="{0F89C1C7-3DCD-1040-A9CF-14679D8B5DDD}" type="datetimeFigureOut">
-              <a:rPr lang="en-US" smtClean="0"/>
-              <a:t>10/17/16</a:t>
-            </a:fld>
-            <a:endParaRPr lang="en-US"/>
-          </a:p>
-        </p:txBody>
-      </p:sp>
-      <p:sp>
-        <p:nvSpPr>
-          <p:cNvPr id="4" name="Slide Image Placeholder 3"/>
-          <p:cNvSpPr>
-            <a:spLocks noGrp="1" noRot="1" noChangeAspect="1"/>
-          </p:cNvSpPr>
-          <p:nvPr>
-            <p:ph type="sldImg" idx="2"/>
-          </p:nvPr>
-        </p:nvSpPr>
-        <p:spPr>
+            <a:pPr>
+              <a:defRPr/>
+            </a:pPr>
+            <a:endParaRPr/>
+          </a:p>
+        </p:txBody>
+      </p:sp>
+      <p:sp>
+        <p:nvSpPr>
+          <p:cNvPr id="2118123171" name="Date Placeholder 2"/>
+          <p:cNvSpPr>
+            <a:spLocks noGrp="1"/>
+          </p:cNvSpPr>
+          <p:nvPr>
+            <p:ph type="dt" idx="3"/>
+          </p:nvPr>
+        </p:nvSpPr>
+        <p:spPr bwMode="auto">
           <a:xfrm>
-            <a:off x="1143000" y="685800"/>
-            <a:ext cx="4572000" cy="3429000"/>
-          </a:xfrm>
-          <a:prstGeom prst="rect">
-            <a:avLst/>
-          </a:prstGeom>
-          <a:noFill/>
-          <a:ln w="12700">
-            <a:solidFill>
-              <a:prstClr val="black"/>
-            </a:solidFill>
-          </a:ln>
-        </p:spPr>
-        <p:txBody>
-          <a:bodyPr vert="horz" lIns="91440" tIns="45720" rIns="91440" bIns="45720" rtlCol="0" anchor="ctr"/>
-          <a:lstStyle/>
-          <a:p>
-            <a:endParaRPr lang="en-US"/>
-          </a:p>
-        </p:txBody>
-      </p:sp>
-      <p:sp>
-        <p:nvSpPr>
-          <p:cNvPr id="5" name="Notes Placeholder 4"/>
-          <p:cNvSpPr>
-            <a:spLocks noGrp="1"/>
-          </p:cNvSpPr>
-          <p:nvPr>
-            <p:ph type="body" sz="quarter" idx="3"/>
-          </p:nvPr>
-        </p:nvSpPr>
-        <p:spPr>
-          <a:xfrm>
-            <a:off x="685800" y="4343400"/>
-            <a:ext cx="5486400" cy="4114800"/>
+            <a:off x="3884613" y="0"/>
+            <a:ext cx="2971800" cy="458788"/>
           </a:xfrm>
           <a:prstGeom prst="rect">
             <a:avLst/>
           </a:prstGeom>
         </p:spPr>
         <p:txBody>
-          <a:bodyPr vert="horz" lIns="91440" tIns="45720" rIns="91440" bIns="45720" rtlCol="0"/>
-          <a:lstStyle/>
-          <a:p>
-            <a:pPr lvl="0"/>
-            <a:r>
-              <a:rPr lang="en-US" smtClean="0"/>
-              <a:t>Click to edit Master text styles</a:t>
-            </a:r>
-          </a:p>
-          <a:p>
-            <a:pPr lvl="1"/>
-            <a:r>
-              <a:rPr lang="en-US" smtClean="0"/>
-              <a:t>Second level</a:t>
-            </a:r>
-          </a:p>
-          <a:p>
-            <a:pPr lvl="2"/>
-            <a:r>
-              <a:rPr lang="en-US" smtClean="0"/>
-              <a:t>Third level</a:t>
-            </a:r>
-          </a:p>
-          <a:p>
-            <a:pPr lvl="3"/>
-            <a:r>
-              <a:rPr lang="en-US" smtClean="0"/>
-              <a:t>Fourth level</a:t>
-            </a:r>
-          </a:p>
-          <a:p>
-            <a:pPr lvl="4"/>
-            <a:r>
-              <a:rPr lang="en-US" smtClean="0"/>
-              <a:t>Fifth level</a:t>
-            </a:r>
-            <a:endParaRPr lang="en-US"/>
-          </a:p>
-        </p:txBody>
-      </p:sp>
-      <p:sp>
-        <p:nvSpPr>
-          <p:cNvPr id="6" name="Footer Placeholder 5"/>
+          <a:bodyPr vert="horz" lIns="91440" tIns="45720" rIns="91440" bIns="45720" rtlCol="0" anchor="ctr"/>
+          <a:lstStyle>
+            <a:lvl1pPr algn="r">
+              <a:defRPr sz="1200"/>
+            </a:lvl1pPr>
+          </a:lstStyle>
+          <a:p>
+            <a:pPr>
+              <a:defRPr/>
+            </a:pPr>
+            <a:endParaRPr/>
+          </a:p>
+        </p:txBody>
+      </p:sp>
+      <p:sp>
+        <p:nvSpPr>
+          <p:cNvPr id="2076458777" name="Notes Placeholder 4"/>
+          <p:cNvSpPr>
+            <a:spLocks noGrp="1"/>
+          </p:cNvSpPr>
+          <p:nvPr>
+            <p:ph type="body" sz="quarter" idx="1"/>
+          </p:nvPr>
+        </p:nvSpPr>
+        <p:spPr bwMode="auto">
+          <a:xfrm>
+            <a:off x="685800" y="4400550"/>
+            <a:ext cx="5486400" cy="3600450"/>
+          </a:xfrm>
+          <a:prstGeom prst="rect">
+            <a:avLst/>
+          </a:prstGeom>
+        </p:spPr>
+        <p:txBody>
+          <a:bodyPr vert="horz" lIns="91440" tIns="45720" rIns="91440" bIns="45720" rtlCol="0" anchor="ctr"/>
+          <a:lstStyle/>
+          <a:p>
+            <a:pPr>
+              <a:defRPr/>
+            </a:pPr>
+            <a:endParaRPr/>
+          </a:p>
+        </p:txBody>
+      </p:sp>
+      <p:sp>
+        <p:nvSpPr>
+          <p:cNvPr id="1086641561" name="Footer Placeholder 5"/>
           <p:cNvSpPr>
             <a:spLocks noGrp="1"/>
           </p:cNvSpPr>
@@ -308,10 +284,10 @@
             <p:ph type="ftr" sz="quarter" idx="4"/>
           </p:nvPr>
         </p:nvSpPr>
-        <p:spPr>
+        <p:spPr bwMode="auto">
           <a:xfrm>
             <a:off x="0" y="8685213"/>
-            <a:ext cx="2971800" cy="457200"/>
+            <a:ext cx="2971800" cy="458787"/>
           </a:xfrm>
           <a:prstGeom prst="rect">
             <a:avLst/>
@@ -325,24 +301,27 @@
             </a:lvl1pPr>
           </a:lstStyle>
           <a:p>
-            <a:endParaRPr lang="en-US"/>
-          </a:p>
-        </p:txBody>
-      </p:sp>
-      <p:sp>
-        <p:nvSpPr>
-          <p:cNvPr id="7" name="Slide Number Placeholder 6"/>
-          <p:cNvSpPr>
-            <a:spLocks noGrp="1"/>
-          </p:cNvSpPr>
-          <p:nvPr>
-            <p:ph type="sldNum" sz="quarter" idx="5"/>
-          </p:nvPr>
-        </p:nvSpPr>
-        <p:spPr>
+            <a:pPr>
+              <a:defRPr/>
+            </a:pPr>
+            <a:endParaRPr/>
+          </a:p>
+        </p:txBody>
+      </p:sp>
+      <p:sp>
+        <p:nvSpPr>
+          <p:cNvPr id="1009296777" name="Slide Number Placeholder 6"/>
+          <p:cNvSpPr>
+            <a:spLocks noGrp="1"/>
+          </p:cNvSpPr>
+          <p:nvPr>
+            <p:ph type="sldNum" sz="quarter" idx="10"/>
+          </p:nvPr>
+        </p:nvSpPr>
+        <p:spPr bwMode="auto">
           <a:xfrm>
             <a:off x="3884613" y="8685213"/>
-            <a:ext cx="2971800" cy="457200"/>
+            <a:ext cx="2971800" cy="458787"/>
           </a:xfrm>
           <a:prstGeom prst="rect">
             <a:avLst/>
@@ -356,25 +335,19 @@
             </a:lvl1pPr>
           </a:lstStyle>
           <a:p>
-            <a:fld id="{BB5E49A5-4136-284D-997B-48E1D791AD67}" type="slidenum">
-              <a:rPr lang="en-US" smtClean="0"/>
-              <a:t>‹#›</a:t>
-            </a:fld>
-            <a:endParaRPr lang="en-US"/>
+            <a:pPr>
+              <a:defRPr/>
+            </a:pPr>
+            <a:endParaRPr/>
           </a:p>
         </p:txBody>
       </p:sp>
     </p:spTree>
-    <p:extLst>
-      <p:ext uri="{BB962C8B-B14F-4D97-AF65-F5344CB8AC3E}">
-        <p14:creationId xmlns:p14="http://schemas.microsoft.com/office/powerpoint/2010/main" val="2623252185"/>
-      </p:ext>
-    </p:extLst>
   </p:cSld>
   <p:clrMap bg1="lt1" tx1="dk1" bg2="lt2" tx2="dk2" accent1="accent1" accent2="accent2" accent3="accent3" accent4="accent4" accent5="accent5" accent6="accent6" hlink="hlink" folHlink="folHlink"/>
   <p:notesStyle>
-    <a:lvl1pPr marL="0" algn="l" defTabSz="457200" rtl="0" eaLnBrk="1" latinLnBrk="0" hangingPunct="1">
-      <a:defRPr sz="1200" kern="1200">
+    <a:lvl1pPr marL="0" algn="l" defTabSz="914400">
+      <a:defRPr sz="1200">
         <a:solidFill>
           <a:schemeClr val="tx1"/>
         </a:solidFill>
@@ -383,8 +356,8 @@
         <a:cs typeface="+mn-cs"/>
       </a:defRPr>
     </a:lvl1pPr>
-    <a:lvl2pPr marL="457200" algn="l" defTabSz="457200" rtl="0" eaLnBrk="1" latinLnBrk="0" hangingPunct="1">
-      <a:defRPr sz="1200" kern="1200">
+    <a:lvl2pPr marL="457200" algn="l" defTabSz="914400">
+      <a:defRPr sz="1200">
         <a:solidFill>
           <a:schemeClr val="tx1"/>
         </a:solidFill>
@@ -393,8 +366,8 @@
         <a:cs typeface="+mn-cs"/>
       </a:defRPr>
     </a:lvl2pPr>
-    <a:lvl3pPr marL="914400" algn="l" defTabSz="457200" rtl="0" eaLnBrk="1" latinLnBrk="0" hangingPunct="1">
-      <a:defRPr sz="1200" kern="1200">
+    <a:lvl3pPr marL="914400" algn="l" defTabSz="914400">
+      <a:defRPr sz="1200">
         <a:solidFill>
           <a:schemeClr val="tx1"/>
         </a:solidFill>
@@ -403,8 +376,8 @@
         <a:cs typeface="+mn-cs"/>
       </a:defRPr>
     </a:lvl3pPr>
-    <a:lvl4pPr marL="1371600" algn="l" defTabSz="457200" rtl="0" eaLnBrk="1" latinLnBrk="0" hangingPunct="1">
-      <a:defRPr sz="1200" kern="1200">
+    <a:lvl4pPr marL="1371600" algn="l" defTabSz="914400">
+      <a:defRPr sz="1200">
         <a:solidFill>
           <a:schemeClr val="tx1"/>
         </a:solidFill>
@@ -413,8 +386,8 @@
         <a:cs typeface="+mn-cs"/>
       </a:defRPr>
     </a:lvl4pPr>
-    <a:lvl5pPr marL="1828800" algn="l" defTabSz="457200" rtl="0" eaLnBrk="1" latinLnBrk="0" hangingPunct="1">
-      <a:defRPr sz="1200" kern="1200">
+    <a:lvl5pPr marL="1828800" algn="l" defTabSz="914400">
+      <a:defRPr sz="1200">
         <a:solidFill>
           <a:schemeClr val="tx1"/>
         </a:solidFill>
@@ -423,8 +396,8 @@
         <a:cs typeface="+mn-cs"/>
       </a:defRPr>
     </a:lvl5pPr>
-    <a:lvl6pPr marL="2286000" algn="l" defTabSz="457200" rtl="0" eaLnBrk="1" latinLnBrk="0" hangingPunct="1">
-      <a:defRPr sz="1200" kern="1200">
+    <a:lvl6pPr marL="2286000" algn="l" defTabSz="914400">
+      <a:defRPr sz="1200">
         <a:solidFill>
           <a:schemeClr val="tx1"/>
         </a:solidFill>
@@ -433,8 +406,8 @@
         <a:cs typeface="+mn-cs"/>
       </a:defRPr>
     </a:lvl6pPr>
-    <a:lvl7pPr marL="2743200" algn="l" defTabSz="457200" rtl="0" eaLnBrk="1" latinLnBrk="0" hangingPunct="1">
-      <a:defRPr sz="1200" kern="1200">
+    <a:lvl7pPr marL="2743200" algn="l" defTabSz="914400">
+      <a:defRPr sz="1200">
         <a:solidFill>
           <a:schemeClr val="tx1"/>
         </a:solidFill>
@@ -443,8 +416,8 @@
         <a:cs typeface="+mn-cs"/>
       </a:defRPr>
     </a:lvl7pPr>
-    <a:lvl8pPr marL="3200400" algn="l" defTabSz="457200" rtl="0" eaLnBrk="1" latinLnBrk="0" hangingPunct="1">
-      <a:defRPr sz="1200" kern="1200">
+    <a:lvl8pPr marL="3200400" algn="l" defTabSz="914400">
+      <a:defRPr sz="1200">
         <a:solidFill>
           <a:schemeClr val="tx1"/>
         </a:solidFill>
@@ -453,8 +426,8 @@
         <a:cs typeface="+mn-cs"/>
       </a:defRPr>
     </a:lvl8pPr>
-    <a:lvl9pPr marL="3657600" algn="l" defTabSz="457200" rtl="0" eaLnBrk="1" latinLnBrk="0" hangingPunct="1">
-      <a:defRPr sz="1200" kern="1200">
+    <a:lvl9pPr marL="3657600" algn="l" defTabSz="914400">
+      <a:defRPr sz="1200">
         <a:solidFill>
           <a:schemeClr val="tx1"/>
         </a:solidFill>
@@ -468,15 +441,15 @@
 </file>
 
 <file path=ppt/notesSlides/notesSlide1.xml><?xml version="1.0" encoding="utf-8"?>
-<p:notes xmlns:a="http://schemas.openxmlformats.org/drawingml/2006/main" xmlns:p="http://schemas.openxmlformats.org/presentationml/2006/main" xmlns:r="http://schemas.openxmlformats.org/officeDocument/2006/relationships">
-  <p:cSld>
+<p:notes xmlns:a="http://schemas.openxmlformats.org/drawingml/2006/main" xmlns:r="http://schemas.openxmlformats.org/officeDocument/2006/relationships" xmlns:p="http://schemas.openxmlformats.org/presentationml/2006/main" xmlns:m="http://schemas.openxmlformats.org/officeDocument/2006/math" xmlns:w="http://schemas.openxmlformats.org/wordprocessingml/2006/main">
+  <p:cSld name="">
     <p:spTree>
       <p:nvGrpSpPr>
         <p:cNvPr id="1" name=""/>
         <p:cNvGrpSpPr/>
         <p:nvPr/>
       </p:nvGrpSpPr>
-      <p:grpSpPr>
+      <p:grpSpPr bwMode="auto">
         <a:xfrm>
           <a:off x="0" y="0"/>
           <a:ext cx="0" cy="0"/>
@@ -486,48 +459,63 @@
       </p:grpSpPr>
       <p:sp>
         <p:nvSpPr>
-          <p:cNvPr id="2" name="Slide Image Placeholder 1"/>
-          <p:cNvSpPr>
-            <a:spLocks noGrp="1"/>
-          </p:cNvSpPr>
-          <p:nvPr>
-            <p:ph type="sldImg" idx="2"/>
-          </p:nvPr>
-        </p:nvSpPr>
-        <p:spPr/>
-      </p:sp>
-      <p:sp>
-        <p:nvSpPr>
-          <p:cNvPr id="3" name="Notes Placeholder 2"/>
-          <p:cNvSpPr>
-            <a:spLocks noGrp="1"/>
-          </p:cNvSpPr>
-          <p:nvPr>
-            <p:ph type="body" idx="3" sz="quarter"/>
-          </p:nvPr>
-        </p:nvSpPr>
-        <p:spPr/>
+          <p:cNvPr id="1721910116" name="Slide Image Placeholder 1"/>
+          <p:cNvSpPr>
+            <a:spLocks noChangeAspect="1" noGrp="1" noRot="1"/>
+          </p:cNvSpPr>
+          <p:nvPr>
+            <p:ph type="sldImg"/>
+          </p:nvPr>
+        </p:nvSpPr>
+        <p:spPr bwMode="auto"/>
+      </p:sp>
+      <p:sp>
+        <p:nvSpPr>
+          <p:cNvPr id="422162855" name="Notes Placeholder 2"/>
+          <p:cNvSpPr>
+            <a:spLocks noGrp="1"/>
+          </p:cNvSpPr>
+          <p:nvPr>
+            <p:ph type="body" idx="1"/>
+          </p:nvPr>
+        </p:nvSpPr>
+        <p:spPr bwMode="auto"/>
         <p:txBody>
           <a:bodyPr/>
           <a:lstStyle/>
           <a:p>
-            <a:r>
-              <a:t>Wireless demo folded into slide 3; small 3-router sketch folded into slides 8-9; DHCP variant folded into slide 10.</a:t>
-            </a:r>
-          </a:p>
-        </p:txBody>
-      </p:sp>
-      <p:sp>
-        <p:nvSpPr>
-          <p:cNvPr id="4" name="Slide Number Placeholder 3"/>
-          <p:cNvSpPr>
-            <a:spLocks noGrp="1"/>
-          </p:cNvSpPr>
-          <p:nvPr>
-            <p:ph type="sldNum" idx="5" sz="quarter"/>
-          </p:nvPr>
-        </p:nvSpPr>
-        <p:spPr/>
+            <a:pPr>
+              <a:defRPr/>
+            </a:pPr>
+            <a:endParaRPr/>
+          </a:p>
+        </p:txBody>
+      </p:sp>
+      <p:sp>
+        <p:nvSpPr>
+          <p:cNvPr id="1370885834" name="Slide Number Placeholder 3"/>
+          <p:cNvSpPr>
+            <a:spLocks noGrp="1"/>
+          </p:cNvSpPr>
+          <p:nvPr>
+            <p:ph type="sldNum" sz="quarter" idx="10"/>
+          </p:nvPr>
+        </p:nvSpPr>
+        <p:spPr bwMode="auto"/>
+        <p:txBody>
+          <a:bodyPr/>
+          <a:lstStyle/>
+          <a:p>
+            <a:pPr>
+              <a:defRPr/>
+            </a:pPr>
+            <a:fld id="{33621BB3-EE9C-4330-490A-51E1AF1ABFD9}" type="slidenum">
+              <a:rPr/>
+              <a:t/>
+            </a:fld>
+            <a:endParaRPr/>
+          </a:p>
+        </p:txBody>
       </p:sp>
     </p:spTree>
   </p:cSld>
@@ -538,15 +526,15 @@
 </file>
 
 <file path=ppt/notesSlides/notesSlide10.xml><?xml version="1.0" encoding="utf-8"?>
-<p:notes xmlns:a="http://schemas.openxmlformats.org/drawingml/2006/main" xmlns:p="http://schemas.openxmlformats.org/presentationml/2006/main" xmlns:r="http://schemas.openxmlformats.org/officeDocument/2006/relationships">
-  <p:cSld>
+<p:notes xmlns:a="http://schemas.openxmlformats.org/drawingml/2006/main" xmlns:r="http://schemas.openxmlformats.org/officeDocument/2006/relationships" xmlns:p="http://schemas.openxmlformats.org/presentationml/2006/main" xmlns:m="http://schemas.openxmlformats.org/officeDocument/2006/math" xmlns:w="http://schemas.openxmlformats.org/wordprocessingml/2006/main">
+  <p:cSld name="">
     <p:spTree>
       <p:nvGrpSpPr>
         <p:cNvPr id="1" name=""/>
         <p:cNvGrpSpPr/>
         <p:nvPr/>
       </p:nvGrpSpPr>
-      <p:grpSpPr>
+      <p:grpSpPr bwMode="auto">
         <a:xfrm>
           <a:off x="0" y="0"/>
           <a:ext cx="0" cy="0"/>
@@ -556,7 +544,7 @@
       </p:grpSpPr>
       <p:sp>
         <p:nvSpPr>
-          <p:cNvPr id="2" name="Slide Image Placeholder 1"/>
+          <p:cNvPr id="1925247532" name="Slide Image Placeholder 1"/>
           <p:cNvSpPr>
             <a:spLocks noGrp="1"/>
           </p:cNvSpPr>
@@ -564,40 +552,120 @@
             <p:ph type="sldImg" idx="2"/>
           </p:nvPr>
         </p:nvSpPr>
-        <p:spPr/>
-      </p:sp>
-      <p:sp>
-        <p:nvSpPr>
-          <p:cNvPr id="3" name="Notes Placeholder 2"/>
-          <p:cNvSpPr>
-            <a:spLocks noGrp="1"/>
-          </p:cNvSpPr>
-          <p:nvPr>
-            <p:ph type="body" idx="3" sz="quarter"/>
-          </p:nvPr>
-        </p:nvSpPr>
-        <p:spPr/>
+        <p:spPr bwMode="auto"/>
+      </p:sp>
+      <p:sp>
+        <p:nvSpPr>
+          <p:cNvPr id="764994419" name="Notes Placeholder 2"/>
+          <p:cNvSpPr>
+            <a:spLocks noGrp="1"/>
+          </p:cNvSpPr>
+          <p:nvPr>
+            <p:ph type="body" sz="quarter" idx="3"/>
+          </p:nvPr>
+        </p:nvSpPr>
+        <p:spPr bwMode="auto"/>
         <p:txBody>
           <a:bodyPr/>
           <a:lstStyle/>
           <a:p>
-            <a:r>
+            <a:pPr>
+              <a:defRPr/>
+            </a:pPr>
+            <a:r>
+              <a:rPr/>
+              <a:t>Expt-7 lab.</a:t>
+            </a:r>
+            <a:endParaRPr/>
+          </a:p>
+        </p:txBody>
+      </p:sp>
+      <p:sp>
+        <p:nvSpPr>
+          <p:cNvPr id="564478557" name="Slide Number Placeholder 3"/>
+          <p:cNvSpPr>
+            <a:spLocks noGrp="1"/>
+          </p:cNvSpPr>
+          <p:nvPr>
+            <p:ph type="sldNum" sz="quarter" idx="5"/>
+          </p:nvPr>
+        </p:nvSpPr>
+        <p:spPr bwMode="auto"/>
+      </p:sp>
+    </p:spTree>
+  </p:cSld>
+  <p:clrMapOvr>
+    <a:masterClrMapping/>
+  </p:clrMapOvr>
+</p:notes>
+</file>
+
+<file path=ppt/notesSlides/notesSlide11.xml><?xml version="1.0" encoding="utf-8"?>
+<p:notes xmlns:a="http://schemas.openxmlformats.org/drawingml/2006/main" xmlns:r="http://schemas.openxmlformats.org/officeDocument/2006/relationships" xmlns:p="http://schemas.openxmlformats.org/presentationml/2006/main" xmlns:m="http://schemas.openxmlformats.org/officeDocument/2006/math" xmlns:w="http://schemas.openxmlformats.org/wordprocessingml/2006/main">
+  <p:cSld name="">
+    <p:spTree>
+      <p:nvGrpSpPr>
+        <p:cNvPr id="1" name=""/>
+        <p:cNvGrpSpPr/>
+        <p:nvPr/>
+      </p:nvGrpSpPr>
+      <p:grpSpPr bwMode="auto">
+        <a:xfrm>
+          <a:off x="0" y="0"/>
+          <a:ext cx="0" cy="0"/>
+          <a:chOff x="0" y="0"/>
+          <a:chExt cx="0" cy="0"/>
+        </a:xfrm>
+      </p:grpSpPr>
+      <p:sp>
+        <p:nvSpPr>
+          <p:cNvPr id="239962939" name="Slide Image Placeholder 1"/>
+          <p:cNvSpPr>
+            <a:spLocks noGrp="1"/>
+          </p:cNvSpPr>
+          <p:nvPr>
+            <p:ph type="sldImg" idx="2"/>
+          </p:nvPr>
+        </p:nvSpPr>
+        <p:spPr bwMode="auto"/>
+      </p:sp>
+      <p:sp>
+        <p:nvSpPr>
+          <p:cNvPr id="1589694949" name="Notes Placeholder 2"/>
+          <p:cNvSpPr>
+            <a:spLocks noGrp="1"/>
+          </p:cNvSpPr>
+          <p:nvPr>
+            <p:ph type="body" sz="quarter" idx="3"/>
+          </p:nvPr>
+        </p:nvSpPr>
+        <p:spPr bwMode="auto"/>
+        <p:txBody>
+          <a:bodyPr/>
+          <a:lstStyle/>
+          <a:p>
+            <a:pPr>
+              <a:defRPr/>
+            </a:pPr>
+            <a:r>
+              <a:rPr/>
               <a:t>One Successful simulation capture from my labs.</a:t>
             </a:r>
-          </a:p>
-        </p:txBody>
-      </p:sp>
-      <p:sp>
-        <p:nvSpPr>
-          <p:cNvPr id="4" name="Slide Number Placeholder 3"/>
-          <p:cNvSpPr>
-            <a:spLocks noGrp="1"/>
-          </p:cNvSpPr>
-          <p:nvPr>
-            <p:ph type="sldNum" idx="5" sz="quarter"/>
-          </p:nvPr>
-        </p:nvSpPr>
-        <p:spPr/>
+            <a:endParaRPr/>
+          </a:p>
+        </p:txBody>
+      </p:sp>
+      <p:sp>
+        <p:nvSpPr>
+          <p:cNvPr id="1837345830" name="Slide Number Placeholder 3"/>
+          <p:cNvSpPr>
+            <a:spLocks noGrp="1"/>
+          </p:cNvSpPr>
+          <p:nvPr>
+            <p:ph type="sldNum" sz="quarter" idx="5"/>
+          </p:nvPr>
+        </p:nvSpPr>
+        <p:spPr bwMode="auto"/>
       </p:sp>
     </p:spTree>
   </p:cSld>
@@ -608,15 +676,15 @@
 </file>
 
 <file path=ppt/notesSlides/notesSlide2.xml><?xml version="1.0" encoding="utf-8"?>
-<p:notes xmlns:a="http://schemas.openxmlformats.org/drawingml/2006/main" xmlns:p="http://schemas.openxmlformats.org/presentationml/2006/main" xmlns:r="http://schemas.openxmlformats.org/officeDocument/2006/relationships">
-  <p:cSld>
+<p:notes xmlns:a="http://schemas.openxmlformats.org/drawingml/2006/main" xmlns:r="http://schemas.openxmlformats.org/officeDocument/2006/relationships" xmlns:p="http://schemas.openxmlformats.org/presentationml/2006/main" xmlns:m="http://schemas.openxmlformats.org/officeDocument/2006/math" xmlns:w="http://schemas.openxmlformats.org/wordprocessingml/2006/main">
+  <p:cSld name="">
     <p:spTree>
       <p:nvGrpSpPr>
         <p:cNvPr id="1" name=""/>
         <p:cNvGrpSpPr/>
         <p:nvPr/>
       </p:nvGrpSpPr>
-      <p:grpSpPr>
+      <p:grpSpPr bwMode="auto">
         <a:xfrm>
           <a:off x="0" y="0"/>
           <a:ext cx="0" cy="0"/>
@@ -626,7 +694,7 @@
       </p:grpSpPr>
       <p:sp>
         <p:nvSpPr>
-          <p:cNvPr id="2" name="Slide Image Placeholder 1"/>
+          <p:cNvPr id="395771957" name="Slide Image Placeholder 1"/>
           <p:cNvSpPr>
             <a:spLocks noGrp="1"/>
           </p:cNvSpPr>
@@ -634,40 +702,45 @@
             <p:ph type="sldImg" idx="2"/>
           </p:nvPr>
         </p:nvSpPr>
-        <p:spPr/>
-      </p:sp>
-      <p:sp>
-        <p:nvSpPr>
-          <p:cNvPr id="3" name="Notes Placeholder 2"/>
-          <p:cNvSpPr>
-            <a:spLocks noGrp="1"/>
-          </p:cNvSpPr>
-          <p:nvPr>
-            <p:ph type="body" idx="3" sz="quarter"/>
-          </p:nvPr>
-        </p:nvSpPr>
-        <p:spPr/>
+        <p:spPr bwMode="auto"/>
+      </p:sp>
+      <p:sp>
+        <p:nvSpPr>
+          <p:cNvPr id="1425169327" name="Notes Placeholder 2"/>
+          <p:cNvSpPr>
+            <a:spLocks noGrp="1"/>
+          </p:cNvSpPr>
+          <p:nvPr>
+            <p:ph type="body" sz="quarter" idx="3"/>
+          </p:nvPr>
+        </p:nvSpPr>
+        <p:spPr bwMode="auto"/>
         <p:txBody>
           <a:bodyPr/>
           <a:lstStyle/>
           <a:p>
-            <a:r>
-              <a:t>Topology plus ping reply from my lab.</a:t>
-            </a:r>
-          </a:p>
-        </p:txBody>
-      </p:sp>
-      <p:sp>
-        <p:nvSpPr>
-          <p:cNvPr id="4" name="Slide Number Placeholder 3"/>
-          <p:cNvSpPr>
-            <a:spLocks noGrp="1"/>
-          </p:cNvSpPr>
-          <p:nvPr>
-            <p:ph type="sldNum" idx="5" sz="quarter"/>
-          </p:nvPr>
-        </p:nvSpPr>
-        <p:spPr/>
+            <a:pPr>
+              <a:defRPr/>
+            </a:pPr>
+            <a:r>
+              <a:rPr/>
+              <a:t>Wireless demo folded into slide 3; small 3-router sketch folded into slides 8-9; DHCP variant folded into slide 10.</a:t>
+            </a:r>
+            <a:endParaRPr/>
+          </a:p>
+        </p:txBody>
+      </p:sp>
+      <p:sp>
+        <p:nvSpPr>
+          <p:cNvPr id="236292401" name="Slide Number Placeholder 3"/>
+          <p:cNvSpPr>
+            <a:spLocks noGrp="1"/>
+          </p:cNvSpPr>
+          <p:nvPr>
+            <p:ph type="sldNum" sz="quarter" idx="5"/>
+          </p:nvPr>
+        </p:nvSpPr>
+        <p:spPr bwMode="auto"/>
       </p:sp>
     </p:spTree>
   </p:cSld>
@@ -678,15 +751,15 @@
 </file>
 
 <file path=ppt/notesSlides/notesSlide3.xml><?xml version="1.0" encoding="utf-8"?>
-<p:notes xmlns:a="http://schemas.openxmlformats.org/drawingml/2006/main" xmlns:p="http://schemas.openxmlformats.org/presentationml/2006/main" xmlns:r="http://schemas.openxmlformats.org/officeDocument/2006/relationships">
-  <p:cSld>
+<p:notes xmlns:a="http://schemas.openxmlformats.org/drawingml/2006/main" xmlns:r="http://schemas.openxmlformats.org/officeDocument/2006/relationships" xmlns:p="http://schemas.openxmlformats.org/presentationml/2006/main" xmlns:m="http://schemas.openxmlformats.org/officeDocument/2006/math" xmlns:w="http://schemas.openxmlformats.org/wordprocessingml/2006/main">
+  <p:cSld name="">
     <p:spTree>
       <p:nvGrpSpPr>
         <p:cNvPr id="1" name=""/>
         <p:cNvGrpSpPr/>
         <p:nvPr/>
       </p:nvGrpSpPr>
-      <p:grpSpPr>
+      <p:grpSpPr bwMode="auto">
         <a:xfrm>
           <a:off x="0" y="0"/>
           <a:ext cx="0" cy="0"/>
@@ -696,7 +769,7 @@
       </p:grpSpPr>
       <p:sp>
         <p:nvSpPr>
-          <p:cNvPr id="2" name="Slide Image Placeholder 1"/>
+          <p:cNvPr id="2115975326" name="Slide Image Placeholder 1"/>
           <p:cNvSpPr>
             <a:spLocks noGrp="1"/>
           </p:cNvSpPr>
@@ -704,40 +777,45 @@
             <p:ph type="sldImg" idx="2"/>
           </p:nvPr>
         </p:nvSpPr>
-        <p:spPr/>
-      </p:sp>
-      <p:sp>
-        <p:nvSpPr>
-          <p:cNvPr id="3" name="Notes Placeholder 2"/>
-          <p:cNvSpPr>
-            <a:spLocks noGrp="1"/>
-          </p:cNvSpPr>
-          <p:nvPr>
-            <p:ph type="body" idx="3" sz="quarter"/>
-          </p:nvPr>
-        </p:nvSpPr>
-        <p:spPr/>
+        <p:spPr bwMode="auto"/>
+      </p:sp>
+      <p:sp>
+        <p:nvSpPr>
+          <p:cNvPr id="1835251905" name="Notes Placeholder 2"/>
+          <p:cNvSpPr>
+            <a:spLocks noGrp="1"/>
+          </p:cNvSpPr>
+          <p:nvPr>
+            <p:ph type="body" sz="quarter" idx="3"/>
+          </p:nvPr>
+        </p:nvSpPr>
+        <p:spPr bwMode="auto"/>
         <p:txBody>
           <a:bodyPr/>
           <a:lstStyle/>
           <a:p>
-            <a:r>
-              <a:t>Terminal session from my lab.</a:t>
-            </a:r>
-          </a:p>
-        </p:txBody>
-      </p:sp>
-      <p:sp>
-        <p:nvSpPr>
-          <p:cNvPr id="4" name="Slide Number Placeholder 3"/>
-          <p:cNvSpPr>
-            <a:spLocks noGrp="1"/>
-          </p:cNvSpPr>
-          <p:nvPr>
-            <p:ph type="sldNum" idx="5" sz="quarter"/>
-          </p:nvPr>
-        </p:nvSpPr>
-        <p:spPr/>
+            <a:pPr>
+              <a:defRPr/>
+            </a:pPr>
+            <a:r>
+              <a:rPr/>
+              <a:t>Topology plus ping reply from my lab.</a:t>
+            </a:r>
+            <a:endParaRPr/>
+          </a:p>
+        </p:txBody>
+      </p:sp>
+      <p:sp>
+        <p:nvSpPr>
+          <p:cNvPr id="997794447" name="Slide Number Placeholder 3"/>
+          <p:cNvSpPr>
+            <a:spLocks noGrp="1"/>
+          </p:cNvSpPr>
+          <p:nvPr>
+            <p:ph type="sldNum" sz="quarter" idx="5"/>
+          </p:nvPr>
+        </p:nvSpPr>
+        <p:spPr bwMode="auto"/>
       </p:sp>
     </p:spTree>
   </p:cSld>
@@ -748,15 +826,15 @@
 </file>
 
 <file path=ppt/notesSlides/notesSlide4.xml><?xml version="1.0" encoding="utf-8"?>
-<p:notes xmlns:a="http://schemas.openxmlformats.org/drawingml/2006/main" xmlns:p="http://schemas.openxmlformats.org/presentationml/2006/main" xmlns:r="http://schemas.openxmlformats.org/officeDocument/2006/relationships">
-  <p:cSld>
+<p:notes xmlns:a="http://schemas.openxmlformats.org/drawingml/2006/main" xmlns:r="http://schemas.openxmlformats.org/officeDocument/2006/relationships" xmlns:p="http://schemas.openxmlformats.org/presentationml/2006/main" xmlns:m="http://schemas.openxmlformats.org/officeDocument/2006/math" xmlns:w="http://schemas.openxmlformats.org/wordprocessingml/2006/main">
+  <p:cSld name="">
     <p:spTree>
       <p:nvGrpSpPr>
         <p:cNvPr id="1" name=""/>
         <p:cNvGrpSpPr/>
         <p:nvPr/>
       </p:nvGrpSpPr>
-      <p:grpSpPr>
+      <p:grpSpPr bwMode="auto">
         <a:xfrm>
           <a:off x="0" y="0"/>
           <a:ext cx="0" cy="0"/>
@@ -766,7 +844,7 @@
       </p:grpSpPr>
       <p:sp>
         <p:nvSpPr>
-          <p:cNvPr id="2" name="Slide Image Placeholder 1"/>
+          <p:cNvPr id="1927180305" name="Slide Image Placeholder 1"/>
           <p:cNvSpPr>
             <a:spLocks noGrp="1"/>
           </p:cNvSpPr>
@@ -774,40 +852,45 @@
             <p:ph type="sldImg" idx="2"/>
           </p:nvPr>
         </p:nvSpPr>
-        <p:spPr/>
-      </p:sp>
-      <p:sp>
-        <p:nvSpPr>
-          <p:cNvPr id="3" name="Notes Placeholder 2"/>
-          <p:cNvSpPr>
-            <a:spLocks noGrp="1"/>
-          </p:cNvSpPr>
-          <p:nvPr>
-            <p:ph type="body" idx="3" sz="quarter"/>
-          </p:nvPr>
-        </p:nvSpPr>
-        <p:spPr/>
+        <p:spPr bwMode="auto"/>
+      </p:sp>
+      <p:sp>
+        <p:nvSpPr>
+          <p:cNvPr id="1759154453" name="Notes Placeholder 2"/>
+          <p:cNvSpPr>
+            <a:spLocks noGrp="1"/>
+          </p:cNvSpPr>
+          <p:nvPr>
+            <p:ph type="body" sz="quarter" idx="3"/>
+          </p:nvPr>
+        </p:nvSpPr>
+        <p:spPr bwMode="auto"/>
         <p:txBody>
           <a:bodyPr/>
           <a:lstStyle/>
           <a:p>
-            <a:r>
-              <a:t>My setup: JU 192.168.1.0/24 with DNS .1.3, DU 192.168.2.0/24 with DNS .2.3; both records on both servers.</a:t>
-            </a:r>
-          </a:p>
-        </p:txBody>
-      </p:sp>
-      <p:sp>
-        <p:nvSpPr>
-          <p:cNvPr id="4" name="Slide Number Placeholder 3"/>
-          <p:cNvSpPr>
-            <a:spLocks noGrp="1"/>
-          </p:cNvSpPr>
-          <p:nvPr>
-            <p:ph type="sldNum" idx="5" sz="quarter"/>
-          </p:nvPr>
-        </p:nvSpPr>
-        <p:spPr/>
+            <a:pPr>
+              <a:defRPr/>
+            </a:pPr>
+            <a:r>
+              <a:rPr/>
+              <a:t>Terminal session from my lab.</a:t>
+            </a:r>
+            <a:endParaRPr/>
+          </a:p>
+        </p:txBody>
+      </p:sp>
+      <p:sp>
+        <p:nvSpPr>
+          <p:cNvPr id="1620616620" name="Slide Number Placeholder 3"/>
+          <p:cNvSpPr>
+            <a:spLocks noGrp="1"/>
+          </p:cNvSpPr>
+          <p:nvPr>
+            <p:ph type="sldNum" sz="quarter" idx="5"/>
+          </p:nvPr>
+        </p:nvSpPr>
+        <p:spPr bwMode="auto"/>
       </p:sp>
     </p:spTree>
   </p:cSld>
@@ -818,15 +901,15 @@
 </file>
 
 <file path=ppt/notesSlides/notesSlide5.xml><?xml version="1.0" encoding="utf-8"?>
-<p:notes xmlns:a="http://schemas.openxmlformats.org/drawingml/2006/main" xmlns:p="http://schemas.openxmlformats.org/presentationml/2006/main" xmlns:r="http://schemas.openxmlformats.org/officeDocument/2006/relationships">
-  <p:cSld>
+<p:notes xmlns:a="http://schemas.openxmlformats.org/drawingml/2006/main" xmlns:r="http://schemas.openxmlformats.org/officeDocument/2006/relationships" xmlns:p="http://schemas.openxmlformats.org/presentationml/2006/main" xmlns:m="http://schemas.openxmlformats.org/officeDocument/2006/math" xmlns:w="http://schemas.openxmlformats.org/wordprocessingml/2006/main">
+  <p:cSld name="">
     <p:spTree>
       <p:nvGrpSpPr>
         <p:cNvPr id="1" name=""/>
         <p:cNvGrpSpPr/>
         <p:nvPr/>
       </p:nvGrpSpPr>
-      <p:grpSpPr>
+      <p:grpSpPr bwMode="auto">
         <a:xfrm>
           <a:off x="0" y="0"/>
           <a:ext cx="0" cy="0"/>
@@ -836,7 +919,7 @@
       </p:grpSpPr>
       <p:sp>
         <p:nvSpPr>
-          <p:cNvPr id="2" name="Slide Image Placeholder 1"/>
+          <p:cNvPr id="1015090581" name="Slide Image Placeholder 1"/>
           <p:cNvSpPr>
             <a:spLocks noGrp="1"/>
           </p:cNvSpPr>
@@ -844,40 +927,45 @@
             <p:ph type="sldImg" idx="2"/>
           </p:nvPr>
         </p:nvSpPr>
-        <p:spPr/>
-      </p:sp>
-      <p:sp>
-        <p:nvSpPr>
-          <p:cNvPr id="3" name="Notes Placeholder 2"/>
-          <p:cNvSpPr>
-            <a:spLocks noGrp="1"/>
-          </p:cNvSpPr>
-          <p:nvPr>
-            <p:ph type="body" idx="3" sz="quarter"/>
-          </p:nvPr>
-        </p:nvSpPr>
-        <p:spPr/>
+        <p:spPr bwMode="auto"/>
+      </p:sp>
+      <p:sp>
+        <p:nvSpPr>
+          <p:cNvPr id="579120487" name="Notes Placeholder 2"/>
+          <p:cNvSpPr>
+            <a:spLocks noGrp="1"/>
+          </p:cNvSpPr>
+          <p:nvPr>
+            <p:ph type="body" sz="quarter" idx="3"/>
+          </p:nvPr>
+        </p:nvSpPr>
+        <p:spPr bwMode="auto"/>
         <p:txBody>
           <a:bodyPr/>
           <a:lstStyle/>
           <a:p>
-            <a:r>
-              <a:t>Packet walk: PC -&gt; gateway -&gt; static via middle net -&gt; far router -&gt; direct delivery; MAC rewritten each hop, IP unchanged.</a:t>
-            </a:r>
-          </a:p>
-        </p:txBody>
-      </p:sp>
-      <p:sp>
-        <p:nvSpPr>
-          <p:cNvPr id="4" name="Slide Number Placeholder 3"/>
-          <p:cNvSpPr>
-            <a:spLocks noGrp="1"/>
-          </p:cNvSpPr>
-          <p:nvPr>
-            <p:ph type="sldNum" idx="5" sz="quarter"/>
-          </p:nvPr>
-        </p:nvSpPr>
-        <p:spPr/>
+            <a:pPr>
+              <a:defRPr/>
+            </a:pPr>
+            <a:r>
+              <a:rPr/>
+              <a:t>My setup: JU 192.168.1.0/24 with DNS .1.3, DU 192.168.2.0/24 with DNS .2.3; both records on both servers.</a:t>
+            </a:r>
+            <a:endParaRPr/>
+          </a:p>
+        </p:txBody>
+      </p:sp>
+      <p:sp>
+        <p:nvSpPr>
+          <p:cNvPr id="1888886045" name="Slide Number Placeholder 3"/>
+          <p:cNvSpPr>
+            <a:spLocks noGrp="1"/>
+          </p:cNvSpPr>
+          <p:nvPr>
+            <p:ph type="sldNum" sz="quarter" idx="5"/>
+          </p:nvPr>
+        </p:nvSpPr>
+        <p:spPr bwMode="auto"/>
       </p:sp>
     </p:spTree>
   </p:cSld>
@@ -888,15 +976,15 @@
 </file>
 
 <file path=ppt/notesSlides/notesSlide6.xml><?xml version="1.0" encoding="utf-8"?>
-<p:notes xmlns:a="http://schemas.openxmlformats.org/drawingml/2006/main" xmlns:p="http://schemas.openxmlformats.org/presentationml/2006/main" xmlns:r="http://schemas.openxmlformats.org/officeDocument/2006/relationships">
-  <p:cSld>
+<p:notes xmlns:a="http://schemas.openxmlformats.org/drawingml/2006/main" xmlns:r="http://schemas.openxmlformats.org/officeDocument/2006/relationships" xmlns:p="http://schemas.openxmlformats.org/presentationml/2006/main" xmlns:m="http://schemas.openxmlformats.org/officeDocument/2006/math" xmlns:w="http://schemas.openxmlformats.org/wordprocessingml/2006/main">
+  <p:cSld name="">
     <p:spTree>
       <p:nvGrpSpPr>
         <p:cNvPr id="1" name=""/>
         <p:cNvGrpSpPr/>
         <p:nvPr/>
       </p:nvGrpSpPr>
-      <p:grpSpPr>
+      <p:grpSpPr bwMode="auto">
         <a:xfrm>
           <a:off x="0" y="0"/>
           <a:ext cx="0" cy="0"/>
@@ -906,7 +994,7 @@
       </p:grpSpPr>
       <p:sp>
         <p:nvSpPr>
-          <p:cNvPr id="2" name="Slide Image Placeholder 1"/>
+          <p:cNvPr id="935707125" name="Slide Image Placeholder 1"/>
           <p:cNvSpPr>
             <a:spLocks noGrp="1"/>
           </p:cNvSpPr>
@@ -914,40 +1002,45 @@
             <p:ph type="sldImg" idx="2"/>
           </p:nvPr>
         </p:nvSpPr>
-        <p:spPr/>
-      </p:sp>
-      <p:sp>
-        <p:nvSpPr>
-          <p:cNvPr id="3" name="Notes Placeholder 2"/>
-          <p:cNvSpPr>
-            <a:spLocks noGrp="1"/>
-          </p:cNvSpPr>
-          <p:nvPr>
-            <p:ph type="body" idx="3" sz="quarter"/>
-          </p:nvPr>
-        </p:nvSpPr>
-        <p:spPr/>
+        <p:spPr bwMode="auto"/>
+      </p:sp>
+      <p:sp>
+        <p:nvSpPr>
+          <p:cNvPr id="1801726141" name="Notes Placeholder 2"/>
+          <p:cNvSpPr>
+            <a:spLocks noGrp="1"/>
+          </p:cNvSpPr>
+          <p:nvPr>
+            <p:ph type="body" sz="quarter" idx="3"/>
+          </p:nvPr>
+        </p:nvSpPr>
+        <p:spPr bwMode="auto"/>
         <p:txBody>
           <a:bodyPr/>
           <a:lstStyle/>
           <a:p>
-            <a:r>
-              <a:t>Hub topology from my lab.</a:t>
-            </a:r>
-          </a:p>
-        </p:txBody>
-      </p:sp>
-      <p:sp>
-        <p:nvSpPr>
-          <p:cNvPr id="4" name="Slide Number Placeholder 3"/>
-          <p:cNvSpPr>
-            <a:spLocks noGrp="1"/>
-          </p:cNvSpPr>
-          <p:nvPr>
-            <p:ph type="sldNum" idx="5" sz="quarter"/>
-          </p:nvPr>
-        </p:nvSpPr>
-        <p:spPr/>
+            <a:pPr>
+              <a:defRPr/>
+            </a:pPr>
+            <a:r>
+              <a:rPr/>
+              <a:t>Packet walk: PC -&gt; gateway -&gt; static via middle net -&gt; far router -&gt; direct delivery; MAC rewritten each hop, IP unchanged.</a:t>
+            </a:r>
+            <a:endParaRPr/>
+          </a:p>
+        </p:txBody>
+      </p:sp>
+      <p:sp>
+        <p:nvSpPr>
+          <p:cNvPr id="571711489" name="Slide Number Placeholder 3"/>
+          <p:cNvSpPr>
+            <a:spLocks noGrp="1"/>
+          </p:cNvSpPr>
+          <p:nvPr>
+            <p:ph type="sldNum" sz="quarter" idx="5"/>
+          </p:nvPr>
+        </p:nvSpPr>
+        <p:spPr bwMode="auto"/>
       </p:sp>
     </p:spTree>
   </p:cSld>
@@ -958,15 +1051,15 @@
 </file>
 
 <file path=ppt/notesSlides/notesSlide7.xml><?xml version="1.0" encoding="utf-8"?>
-<p:notes xmlns:a="http://schemas.openxmlformats.org/drawingml/2006/main" xmlns:p="http://schemas.openxmlformats.org/presentationml/2006/main" xmlns:r="http://schemas.openxmlformats.org/officeDocument/2006/relationships">
-  <p:cSld>
+<p:notes xmlns:a="http://schemas.openxmlformats.org/drawingml/2006/main" xmlns:r="http://schemas.openxmlformats.org/officeDocument/2006/relationships" xmlns:p="http://schemas.openxmlformats.org/presentationml/2006/main" xmlns:m="http://schemas.openxmlformats.org/officeDocument/2006/math" xmlns:w="http://schemas.openxmlformats.org/wordprocessingml/2006/main">
+  <p:cSld name="">
     <p:spTree>
       <p:nvGrpSpPr>
         <p:cNvPr id="1" name=""/>
         <p:cNvGrpSpPr/>
         <p:nvPr/>
       </p:nvGrpSpPr>
-      <p:grpSpPr>
+      <p:grpSpPr bwMode="auto">
         <a:xfrm>
           <a:off x="0" y="0"/>
           <a:ext cx="0" cy="0"/>
@@ -976,7 +1069,7 @@
       </p:grpSpPr>
       <p:sp>
         <p:nvSpPr>
-          <p:cNvPr id="2" name="Slide Image Placeholder 1"/>
+          <p:cNvPr id="990063988" name="Slide Image Placeholder 1"/>
           <p:cNvSpPr>
             <a:spLocks noGrp="1"/>
           </p:cNvSpPr>
@@ -984,40 +1077,45 @@
             <p:ph type="sldImg" idx="2"/>
           </p:nvPr>
         </p:nvSpPr>
-        <p:spPr/>
-      </p:sp>
-      <p:sp>
-        <p:nvSpPr>
-          <p:cNvPr id="3" name="Notes Placeholder 2"/>
-          <p:cNvSpPr>
-            <a:spLocks noGrp="1"/>
-          </p:cNvSpPr>
-          <p:nvPr>
-            <p:ph type="body" idx="3" sz="quarter"/>
-          </p:nvPr>
-        </p:nvSpPr>
-        <p:spPr/>
+        <p:spPr bwMode="auto"/>
+      </p:sp>
+      <p:sp>
+        <p:nvSpPr>
+          <p:cNvPr id="1214984030" name="Notes Placeholder 2"/>
+          <p:cNvSpPr>
+            <a:spLocks noGrp="1"/>
+          </p:cNvSpPr>
+          <p:nvPr>
+            <p:ph type="body" sz="quarter" idx="3"/>
+          </p:nvPr>
+        </p:nvSpPr>
+        <p:spPr bwMode="auto"/>
         <p:txBody>
           <a:bodyPr/>
           <a:lstStyle/>
           <a:p>
-            <a:r>
-              <a:t>Expt-5 lab from my files.</a:t>
-            </a:r>
-          </a:p>
-        </p:txBody>
-      </p:sp>
-      <p:sp>
-        <p:nvSpPr>
-          <p:cNvPr id="4" name="Slide Number Placeholder 3"/>
-          <p:cNvSpPr>
-            <a:spLocks noGrp="1"/>
-          </p:cNvSpPr>
-          <p:nvPr>
-            <p:ph type="sldNum" idx="5" sz="quarter"/>
-          </p:nvPr>
-        </p:nvSpPr>
-        <p:spPr/>
+            <a:pPr>
+              <a:defRPr/>
+            </a:pPr>
+            <a:r>
+              <a:rPr/>
+              <a:t>Hub topology from my lab.</a:t>
+            </a:r>
+            <a:endParaRPr/>
+          </a:p>
+        </p:txBody>
+      </p:sp>
+      <p:sp>
+        <p:nvSpPr>
+          <p:cNvPr id="197460638" name="Slide Number Placeholder 3"/>
+          <p:cNvSpPr>
+            <a:spLocks noGrp="1"/>
+          </p:cNvSpPr>
+          <p:nvPr>
+            <p:ph type="sldNum" sz="quarter" idx="5"/>
+          </p:nvPr>
+        </p:nvSpPr>
+        <p:spPr bwMode="auto"/>
       </p:sp>
     </p:spTree>
   </p:cSld>
@@ -1028,15 +1126,15 @@
 </file>
 
 <file path=ppt/notesSlides/notesSlide8.xml><?xml version="1.0" encoding="utf-8"?>
-<p:notes xmlns:a="http://schemas.openxmlformats.org/drawingml/2006/main" xmlns:p="http://schemas.openxmlformats.org/presentationml/2006/main" xmlns:r="http://schemas.openxmlformats.org/officeDocument/2006/relationships">
-  <p:cSld>
+<p:notes xmlns:a="http://schemas.openxmlformats.org/drawingml/2006/main" xmlns:r="http://schemas.openxmlformats.org/officeDocument/2006/relationships" xmlns:p="http://schemas.openxmlformats.org/presentationml/2006/main" xmlns:m="http://schemas.openxmlformats.org/officeDocument/2006/math" xmlns:w="http://schemas.openxmlformats.org/wordprocessingml/2006/main">
+  <p:cSld name="">
     <p:spTree>
       <p:nvGrpSpPr>
         <p:cNvPr id="1" name=""/>
         <p:cNvGrpSpPr/>
         <p:nvPr/>
       </p:nvGrpSpPr>
-      <p:grpSpPr>
+      <p:grpSpPr bwMode="auto">
         <a:xfrm>
           <a:off x="0" y="0"/>
           <a:ext cx="0" cy="0"/>
@@ -1046,7 +1144,7 @@
       </p:grpSpPr>
       <p:sp>
         <p:nvSpPr>
-          <p:cNvPr id="2" name="Slide Image Placeholder 1"/>
+          <p:cNvPr id="1747505718" name="Slide Image Placeholder 1"/>
           <p:cNvSpPr>
             <a:spLocks noGrp="1"/>
           </p:cNvSpPr>
@@ -1054,40 +1152,45 @@
             <p:ph type="sldImg" idx="2"/>
           </p:nvPr>
         </p:nvSpPr>
-        <p:spPr/>
-      </p:sp>
-      <p:sp>
-        <p:nvSpPr>
-          <p:cNvPr id="3" name="Notes Placeholder 2"/>
-          <p:cNvSpPr>
-            <a:spLocks noGrp="1"/>
-          </p:cNvSpPr>
-          <p:nvPr>
-            <p:ph type="body" idx="3" sz="quarter"/>
-          </p:nvPr>
-        </p:nvSpPr>
-        <p:spPr/>
+        <p:spPr bwMode="auto"/>
+      </p:sp>
+      <p:sp>
+        <p:nvSpPr>
+          <p:cNvPr id="2042373252" name="Notes Placeholder 2"/>
+          <p:cNvSpPr>
+            <a:spLocks noGrp="1"/>
+          </p:cNvSpPr>
+          <p:nvPr>
+            <p:ph type="body" sz="quarter" idx="3"/>
+          </p:nvPr>
+        </p:nvSpPr>
+        <p:spPr bwMode="auto"/>
         <p:txBody>
           <a:bodyPr/>
           <a:lstStyle/>
           <a:p>
-            <a:r>
-              <a:t>Expt-9 lab from my files.</a:t>
-            </a:r>
-          </a:p>
-        </p:txBody>
-      </p:sp>
-      <p:sp>
-        <p:nvSpPr>
-          <p:cNvPr id="4" name="Slide Number Placeholder 3"/>
-          <p:cNvSpPr>
-            <a:spLocks noGrp="1"/>
-          </p:cNvSpPr>
-          <p:nvPr>
-            <p:ph type="sldNum" idx="5" sz="quarter"/>
-          </p:nvPr>
-        </p:nvSpPr>
-        <p:spPr/>
+            <a:pPr>
+              <a:defRPr/>
+            </a:pPr>
+            <a:r>
+              <a:rPr/>
+              <a:t>Expt-5 lab from my files.</a:t>
+            </a:r>
+            <a:endParaRPr/>
+          </a:p>
+        </p:txBody>
+      </p:sp>
+      <p:sp>
+        <p:nvSpPr>
+          <p:cNvPr id="1037466234" name="Slide Number Placeholder 3"/>
+          <p:cNvSpPr>
+            <a:spLocks noGrp="1"/>
+          </p:cNvSpPr>
+          <p:nvPr>
+            <p:ph type="sldNum" sz="quarter" idx="5"/>
+          </p:nvPr>
+        </p:nvSpPr>
+        <p:spPr bwMode="auto"/>
       </p:sp>
     </p:spTree>
   </p:cSld>
@@ -1098,15 +1201,15 @@
 </file>
 
 <file path=ppt/notesSlides/notesSlide9.xml><?xml version="1.0" encoding="utf-8"?>
-<p:notes xmlns:a="http://schemas.openxmlformats.org/drawingml/2006/main" xmlns:p="http://schemas.openxmlformats.org/presentationml/2006/main" xmlns:r="http://schemas.openxmlformats.org/officeDocument/2006/relationships">
-  <p:cSld>
+<p:notes xmlns:a="http://schemas.openxmlformats.org/drawingml/2006/main" xmlns:r="http://schemas.openxmlformats.org/officeDocument/2006/relationships" xmlns:p="http://schemas.openxmlformats.org/presentationml/2006/main" xmlns:m="http://schemas.openxmlformats.org/officeDocument/2006/math" xmlns:w="http://schemas.openxmlformats.org/wordprocessingml/2006/main">
+  <p:cSld name="">
     <p:spTree>
       <p:nvGrpSpPr>
         <p:cNvPr id="1" name=""/>
         <p:cNvGrpSpPr/>
         <p:nvPr/>
       </p:nvGrpSpPr>
-      <p:grpSpPr>
+      <p:grpSpPr bwMode="auto">
         <a:xfrm>
           <a:off x="0" y="0"/>
           <a:ext cx="0" cy="0"/>
@@ -1116,7 +1219,7 @@
       </p:grpSpPr>
       <p:sp>
         <p:nvSpPr>
-          <p:cNvPr id="2" name="Slide Image Placeholder 1"/>
+          <p:cNvPr id="1959200246" name="Slide Image Placeholder 1"/>
           <p:cNvSpPr>
             <a:spLocks noGrp="1"/>
           </p:cNvSpPr>
@@ -1124,40 +1227,45 @@
             <p:ph type="sldImg" idx="2"/>
           </p:nvPr>
         </p:nvSpPr>
-        <p:spPr/>
-      </p:sp>
-      <p:sp>
-        <p:nvSpPr>
-          <p:cNvPr id="3" name="Notes Placeholder 2"/>
-          <p:cNvSpPr>
-            <a:spLocks noGrp="1"/>
-          </p:cNvSpPr>
-          <p:nvPr>
-            <p:ph type="body" idx="3" sz="quarter"/>
-          </p:nvPr>
-        </p:nvSpPr>
-        <p:spPr/>
+        <p:spPr bwMode="auto"/>
+      </p:sp>
+      <p:sp>
+        <p:nvSpPr>
+          <p:cNvPr id="744620724" name="Notes Placeholder 2"/>
+          <p:cNvSpPr>
+            <a:spLocks noGrp="1"/>
+          </p:cNvSpPr>
+          <p:nvPr>
+            <p:ph type="body" sz="quarter" idx="3"/>
+          </p:nvPr>
+        </p:nvSpPr>
+        <p:spPr bwMode="auto"/>
         <p:txBody>
           <a:bodyPr/>
           <a:lstStyle/>
           <a:p>
-            <a:r>
-              <a:t>Expt-7 lab.</a:t>
-            </a:r>
-          </a:p>
-        </p:txBody>
-      </p:sp>
-      <p:sp>
-        <p:nvSpPr>
-          <p:cNvPr id="4" name="Slide Number Placeholder 3"/>
-          <p:cNvSpPr>
-            <a:spLocks noGrp="1"/>
-          </p:cNvSpPr>
-          <p:nvPr>
-            <p:ph type="sldNum" idx="5" sz="quarter"/>
-          </p:nvPr>
-        </p:nvSpPr>
-        <p:spPr/>
+            <a:pPr>
+              <a:defRPr/>
+            </a:pPr>
+            <a:r>
+              <a:rPr/>
+              <a:t>Expt-9 lab from my files.</a:t>
+            </a:r>
+            <a:endParaRPr/>
+          </a:p>
+        </p:txBody>
+      </p:sp>
+      <p:sp>
+        <p:nvSpPr>
+          <p:cNvPr id="673856394" name="Slide Number Placeholder 3"/>
+          <p:cNvSpPr>
+            <a:spLocks noGrp="1"/>
+          </p:cNvSpPr>
+          <p:nvPr>
+            <p:ph type="sldNum" sz="quarter" idx="5"/>
+          </p:nvPr>
+        </p:nvSpPr>
+        <p:spPr bwMode="auto"/>
       </p:sp>
     </p:spTree>
   </p:cSld>
@@ -1168,7 +1276,7 @@
 </file>
 
 <file path=ppt/slideLayouts/slideLayout1.xml><?xml version="1.0" encoding="utf-8"?>
-<p:sldLayout xmlns:a="http://schemas.openxmlformats.org/drawingml/2006/main" xmlns:r="http://schemas.openxmlformats.org/officeDocument/2006/relationships" xmlns:p="http://schemas.openxmlformats.org/presentationml/2006/main" type="title" preserve="1">
+<p:sldLayout xmlns:a="http://schemas.openxmlformats.org/drawingml/2006/main" xmlns:r="http://schemas.openxmlformats.org/officeDocument/2006/relationships" xmlns:p="http://schemas.openxmlformats.org/presentationml/2006/main" xmlns:m="http://schemas.openxmlformats.org/officeDocument/2006/math" xmlns:w="http://schemas.openxmlformats.org/wordprocessingml/2006/main" matchingName="" preserve="1" showMasterPhAnim="0" showMasterSp="1" type="title" userDrawn="1">
   <p:cSld name="Title Slide">
     <p:spTree>
       <p:nvGrpSpPr>
@@ -1176,7 +1284,7 @@
         <p:cNvGrpSpPr/>
         <p:nvPr/>
       </p:nvGrpSpPr>
-      <p:grpSpPr>
+      <p:grpSpPr bwMode="auto">
         <a:xfrm>
           <a:off x="0" y="0"/>
           <a:ext cx="0" cy="0"/>
@@ -1186,7 +1294,7 @@
       </p:grpSpPr>
       <p:sp>
         <p:nvSpPr>
-          <p:cNvPr id="2" name="Title 1"/>
+          <p:cNvPr id="619847609" name="Title 1"/>
           <p:cNvSpPr>
             <a:spLocks noGrp="1"/>
           </p:cNvSpPr>
@@ -1194,7 +1302,7 @@
             <p:ph type="ctrTitle"/>
           </p:nvPr>
         </p:nvSpPr>
-        <p:spPr>
+        <p:spPr bwMode="auto">
           <a:xfrm>
             <a:off x="685800" y="2130425"/>
             <a:ext cx="7772400" cy="1470025"/>
@@ -1204,8 +1312,11 @@
           <a:bodyPr/>
           <a:lstStyle/>
           <a:p>
-            <a:r>
-              <a:rPr lang="en-US" smtClean="0"/>
+            <a:pPr>
+              <a:defRPr/>
+            </a:pPr>
+            <a:r>
+              <a:rPr lang="en-US"/>
               <a:t>Click to edit Master title style</a:t>
             </a:r>
             <a:endParaRPr lang="en-US"/>
@@ -1214,7 +1325,7 @@
       </p:sp>
       <p:sp>
         <p:nvSpPr>
-          <p:cNvPr id="3" name="Subtitle 2"/>
+          <p:cNvPr id="1920664257" name="Subtitle 2"/>
           <p:cNvSpPr>
             <a:spLocks noGrp="1"/>
           </p:cNvSpPr>
@@ -1222,10 +1333,10 @@
             <p:ph type="subTitle" idx="1"/>
           </p:nvPr>
         </p:nvSpPr>
-        <p:spPr>
+        <p:spPr bwMode="auto">
           <a:xfrm>
             <a:off x="1371600" y="3886200"/>
-            <a:ext cx="6400800" cy="1752600"/>
+            <a:ext cx="6400800" cy="1752599"/>
           </a:xfrm>
         </p:spPr>
         <p:txBody>
@@ -1323,8 +1434,11 @@
             </a:lvl9pPr>
           </a:lstStyle>
           <a:p>
-            <a:r>
-              <a:rPr lang="en-US" smtClean="0"/>
+            <a:pPr>
+              <a:defRPr/>
+            </a:pPr>
+            <a:r>
+              <a:rPr lang="en-US"/>
               <a:t>Click to edit Master subtitle style</a:t>
             </a:r>
             <a:endParaRPr lang="en-US"/>
@@ -1333,7 +1447,7 @@
       </p:sp>
       <p:sp>
         <p:nvSpPr>
-          <p:cNvPr id="4" name="Date Placeholder 3"/>
+          <p:cNvPr id="1840297883" name="Date Placeholder 3"/>
           <p:cNvSpPr>
             <a:spLocks noGrp="1"/>
           </p:cNvSpPr>
@@ -1341,13 +1455,16 @@
             <p:ph type="dt" sz="half" idx="10"/>
           </p:nvPr>
         </p:nvSpPr>
-        <p:spPr/>
+        <p:spPr bwMode="auto"/>
         <p:txBody>
           <a:bodyPr/>
           <a:lstStyle/>
           <a:p>
+            <a:pPr>
+              <a:defRPr/>
+            </a:pPr>
             <a:fld id="{5BCAD085-E8A6-8845-BD4E-CB4CCA059FC4}" type="datetimeFigureOut">
-              <a:rPr lang="en-US" smtClean="0"/>
+              <a:rPr lang="en-US"/>
               <a:t>1/27/13</a:t>
             </a:fld>
             <a:endParaRPr lang="en-US"/>
@@ -1356,7 +1473,7 @@
       </p:sp>
       <p:sp>
         <p:nvSpPr>
-          <p:cNvPr id="5" name="Footer Placeholder 4"/>
+          <p:cNvPr id="151651892" name="Footer Placeholder 4"/>
           <p:cNvSpPr>
             <a:spLocks noGrp="1"/>
           </p:cNvSpPr>
@@ -1364,18 +1481,21 @@
             <p:ph type="ftr" sz="quarter" idx="11"/>
           </p:nvPr>
         </p:nvSpPr>
-        <p:spPr/>
+        <p:spPr bwMode="auto"/>
         <p:txBody>
           <a:bodyPr/>
           <a:lstStyle/>
           <a:p>
+            <a:pPr>
+              <a:defRPr/>
+            </a:pPr>
             <a:endParaRPr lang="en-US"/>
           </a:p>
         </p:txBody>
       </p:sp>
       <p:sp>
         <p:nvSpPr>
-          <p:cNvPr id="6" name="Slide Number Placeholder 5"/>
+          <p:cNvPr id="1687879066" name="Slide Number Placeholder 5"/>
           <p:cNvSpPr>
             <a:spLocks noGrp="1"/>
           </p:cNvSpPr>
@@ -1383,13 +1503,16 @@
             <p:ph type="sldNum" sz="quarter" idx="12"/>
           </p:nvPr>
         </p:nvSpPr>
-        <p:spPr/>
+        <p:spPr bwMode="auto"/>
         <p:txBody>
           <a:bodyPr/>
           <a:lstStyle/>
           <a:p>
+            <a:pPr>
+              <a:defRPr/>
+            </a:pPr>
             <a:fld id="{C1FF6DA9-008F-8B48-92A6-B652298478BF}" type="slidenum">
-              <a:rPr lang="en-US" smtClean="0"/>
+              <a:rPr lang="en-US"/>
               <a:t>‹#›</a:t>
             </a:fld>
             <a:endParaRPr lang="en-US"/>
@@ -1397,11 +1520,6 @@
         </p:txBody>
       </p:sp>
     </p:spTree>
-    <p:extLst>
-      <p:ext uri="{BB962C8B-B14F-4D97-AF65-F5344CB8AC3E}">
-        <p14:creationId xmlns:p14="http://schemas.microsoft.com/office/powerpoint/2010/main" val="3168075583"/>
-      </p:ext>
-    </p:extLst>
   </p:cSld>
   <p:clrMapOvr>
     <a:masterClrMapping/>
@@ -1410,7 +1528,7 @@
 </file>
 
 <file path=ppt/slideLayouts/slideLayout10.xml><?xml version="1.0" encoding="utf-8"?>
-<p:sldLayout xmlns:a="http://schemas.openxmlformats.org/drawingml/2006/main" xmlns:r="http://schemas.openxmlformats.org/officeDocument/2006/relationships" xmlns:p="http://schemas.openxmlformats.org/presentationml/2006/main" type="vertTx" preserve="1">
+<p:sldLayout xmlns:a="http://schemas.openxmlformats.org/drawingml/2006/main" xmlns:r="http://schemas.openxmlformats.org/officeDocument/2006/relationships" xmlns:p="http://schemas.openxmlformats.org/presentationml/2006/main" xmlns:m="http://schemas.openxmlformats.org/officeDocument/2006/math" xmlns:w="http://schemas.openxmlformats.org/wordprocessingml/2006/main" matchingName="" preserve="1" showMasterPhAnim="0" showMasterSp="1" type="vertTx" userDrawn="1">
   <p:cSld name="Title and Vertical Text">
     <p:spTree>
       <p:nvGrpSpPr>
@@ -1418,7 +1536,7 @@
         <p:cNvGrpSpPr/>
         <p:nvPr/>
       </p:nvGrpSpPr>
-      <p:grpSpPr>
+      <p:grpSpPr bwMode="auto">
         <a:xfrm>
           <a:off x="0" y="0"/>
           <a:ext cx="0" cy="0"/>
@@ -1428,7 +1546,7 @@
       </p:grpSpPr>
       <p:sp>
         <p:nvSpPr>
-          <p:cNvPr id="2" name="Title 1"/>
+          <p:cNvPr id="1661169732" name="Title 1"/>
           <p:cNvSpPr>
             <a:spLocks noGrp="1"/>
           </p:cNvSpPr>
@@ -1436,13 +1554,16 @@
             <p:ph type="title"/>
           </p:nvPr>
         </p:nvSpPr>
-        <p:spPr/>
+        <p:spPr bwMode="auto"/>
         <p:txBody>
           <a:bodyPr/>
           <a:lstStyle/>
           <a:p>
-            <a:r>
-              <a:rPr lang="en-US" smtClean="0"/>
+            <a:pPr>
+              <a:defRPr/>
+            </a:pPr>
+            <a:r>
+              <a:rPr lang="en-US"/>
               <a:t>Click to edit Master title style</a:t>
             </a:r>
             <a:endParaRPr lang="en-US"/>
@@ -1451,7 +1572,7 @@
       </p:sp>
       <p:sp>
         <p:nvSpPr>
-          <p:cNvPr id="3" name="Vertical Text Placeholder 2"/>
+          <p:cNvPr id="1808312703" name="Vertical Text Placeholder 2"/>
           <p:cNvSpPr>
             <a:spLocks noGrp="1"/>
           </p:cNvSpPr>
@@ -1459,42 +1580,56 @@
             <p:ph type="body" orient="vert" idx="1"/>
           </p:nvPr>
         </p:nvSpPr>
-        <p:spPr/>
+        <p:spPr bwMode="auto"/>
         <p:txBody>
           <a:bodyPr vert="eaVert"/>
           <a:lstStyle/>
           <a:p>
-            <a:pPr lvl="0"/>
-            <a:r>
-              <a:rPr lang="en-US" smtClean="0"/>
+            <a:pPr lvl="0">
+              <a:defRPr/>
+            </a:pPr>
+            <a:r>
+              <a:rPr lang="en-US"/>
               <a:t>Click to edit Master text styles</a:t>
             </a:r>
-          </a:p>
-          <a:p>
-            <a:pPr lvl="1"/>
-            <a:r>
-              <a:rPr lang="en-US" smtClean="0"/>
+            <a:endParaRPr/>
+          </a:p>
+          <a:p>
+            <a:pPr lvl="1">
+              <a:defRPr/>
+            </a:pPr>
+            <a:r>
+              <a:rPr lang="en-US"/>
               <a:t>Second level</a:t>
             </a:r>
-          </a:p>
-          <a:p>
-            <a:pPr lvl="2"/>
-            <a:r>
-              <a:rPr lang="en-US" smtClean="0"/>
+            <a:endParaRPr/>
+          </a:p>
+          <a:p>
+            <a:pPr lvl="2">
+              <a:defRPr/>
+            </a:pPr>
+            <a:r>
+              <a:rPr lang="en-US"/>
               <a:t>Third level</a:t>
             </a:r>
-          </a:p>
-          <a:p>
-            <a:pPr lvl="3"/>
-            <a:r>
-              <a:rPr lang="en-US" smtClean="0"/>
+            <a:endParaRPr/>
+          </a:p>
+          <a:p>
+            <a:pPr lvl="3">
+              <a:defRPr/>
+            </a:pPr>
+            <a:r>
+              <a:rPr lang="en-US"/>
               <a:t>Fourth level</a:t>
             </a:r>
-          </a:p>
-          <a:p>
-            <a:pPr lvl="4"/>
-            <a:r>
-              <a:rPr lang="en-US" smtClean="0"/>
+            <a:endParaRPr/>
+          </a:p>
+          <a:p>
+            <a:pPr lvl="4">
+              <a:defRPr/>
+            </a:pPr>
+            <a:r>
+              <a:rPr lang="en-US"/>
               <a:t>Fifth level</a:t>
             </a:r>
             <a:endParaRPr lang="en-US"/>
@@ -1503,7 +1638,7 @@
       </p:sp>
       <p:sp>
         <p:nvSpPr>
-          <p:cNvPr id="4" name="Date Placeholder 3"/>
+          <p:cNvPr id="869276450" name="Date Placeholder 3"/>
           <p:cNvSpPr>
             <a:spLocks noGrp="1"/>
           </p:cNvSpPr>
@@ -1511,13 +1646,16 @@
             <p:ph type="dt" sz="half" idx="10"/>
           </p:nvPr>
         </p:nvSpPr>
-        <p:spPr/>
+        <p:spPr bwMode="auto"/>
         <p:txBody>
           <a:bodyPr/>
           <a:lstStyle/>
           <a:p>
+            <a:pPr>
+              <a:defRPr/>
+            </a:pPr>
             <a:fld id="{5BCAD085-E8A6-8845-BD4E-CB4CCA059FC4}" type="datetimeFigureOut">
-              <a:rPr lang="en-US" smtClean="0"/>
+              <a:rPr lang="en-US"/>
               <a:t>1/27/13</a:t>
             </a:fld>
             <a:endParaRPr lang="en-US"/>
@@ -1526,7 +1664,7 @@
       </p:sp>
       <p:sp>
         <p:nvSpPr>
-          <p:cNvPr id="5" name="Footer Placeholder 4"/>
+          <p:cNvPr id="1757953692" name="Footer Placeholder 4"/>
           <p:cNvSpPr>
             <a:spLocks noGrp="1"/>
           </p:cNvSpPr>
@@ -1534,18 +1672,21 @@
             <p:ph type="ftr" sz="quarter" idx="11"/>
           </p:nvPr>
         </p:nvSpPr>
-        <p:spPr/>
+        <p:spPr bwMode="auto"/>
         <p:txBody>
           <a:bodyPr/>
           <a:lstStyle/>
           <a:p>
+            <a:pPr>
+              <a:defRPr/>
+            </a:pPr>
             <a:endParaRPr lang="en-US"/>
           </a:p>
         </p:txBody>
       </p:sp>
       <p:sp>
         <p:nvSpPr>
-          <p:cNvPr id="6" name="Slide Number Placeholder 5"/>
+          <p:cNvPr id="1328400470" name="Slide Number Placeholder 5"/>
           <p:cNvSpPr>
             <a:spLocks noGrp="1"/>
           </p:cNvSpPr>
@@ -1553,13 +1694,16 @@
             <p:ph type="sldNum" sz="quarter" idx="12"/>
           </p:nvPr>
         </p:nvSpPr>
-        <p:spPr/>
+        <p:spPr bwMode="auto"/>
         <p:txBody>
           <a:bodyPr/>
           <a:lstStyle/>
           <a:p>
+            <a:pPr>
+              <a:defRPr/>
+            </a:pPr>
             <a:fld id="{C1FF6DA9-008F-8B48-92A6-B652298478BF}" type="slidenum">
-              <a:rPr lang="en-US" smtClean="0"/>
+              <a:rPr lang="en-US"/>
               <a:t>‹#›</a:t>
             </a:fld>
             <a:endParaRPr lang="en-US"/>
@@ -1567,11 +1711,6 @@
         </p:txBody>
       </p:sp>
     </p:spTree>
-    <p:extLst>
-      <p:ext uri="{BB962C8B-B14F-4D97-AF65-F5344CB8AC3E}">
-        <p14:creationId xmlns:p14="http://schemas.microsoft.com/office/powerpoint/2010/main" val="2910927964"/>
-      </p:ext>
-    </p:extLst>
   </p:cSld>
   <p:clrMapOvr>
     <a:masterClrMapping/>
@@ -1580,7 +1719,7 @@
 </file>
 
 <file path=ppt/slideLayouts/slideLayout11.xml><?xml version="1.0" encoding="utf-8"?>
-<p:sldLayout xmlns:a="http://schemas.openxmlformats.org/drawingml/2006/main" xmlns:r="http://schemas.openxmlformats.org/officeDocument/2006/relationships" xmlns:p="http://schemas.openxmlformats.org/presentationml/2006/main" type="vertTitleAndTx" preserve="1">
+<p:sldLayout xmlns:a="http://schemas.openxmlformats.org/drawingml/2006/main" xmlns:r="http://schemas.openxmlformats.org/officeDocument/2006/relationships" xmlns:p="http://schemas.openxmlformats.org/presentationml/2006/main" xmlns:m="http://schemas.openxmlformats.org/officeDocument/2006/math" xmlns:w="http://schemas.openxmlformats.org/wordprocessingml/2006/main" matchingName="" preserve="1" showMasterPhAnim="0" showMasterSp="1" type="vertTitleAndTx" userDrawn="1">
   <p:cSld name="Vertical Title and Text">
     <p:spTree>
       <p:nvGrpSpPr>
@@ -1588,7 +1727,7 @@
         <p:cNvGrpSpPr/>
         <p:nvPr/>
       </p:nvGrpSpPr>
-      <p:grpSpPr>
+      <p:grpSpPr bwMode="auto">
         <a:xfrm>
           <a:off x="0" y="0"/>
           <a:ext cx="0" cy="0"/>
@@ -1598,7 +1737,7 @@
       </p:grpSpPr>
       <p:sp>
         <p:nvSpPr>
-          <p:cNvPr id="2" name="Vertical Title 1"/>
+          <p:cNvPr id="1573818493" name="Vertical Title 1"/>
           <p:cNvSpPr>
             <a:spLocks noGrp="1"/>
           </p:cNvSpPr>
@@ -1606,7 +1745,7 @@
             <p:ph type="title" orient="vert"/>
           </p:nvPr>
         </p:nvSpPr>
-        <p:spPr>
+        <p:spPr bwMode="auto">
           <a:xfrm>
             <a:off x="6629400" y="274638"/>
             <a:ext cx="2057400" cy="5851525"/>
@@ -1616,8 +1755,11 @@
           <a:bodyPr vert="eaVert"/>
           <a:lstStyle/>
           <a:p>
-            <a:r>
-              <a:rPr lang="en-US" smtClean="0"/>
+            <a:pPr>
+              <a:defRPr/>
+            </a:pPr>
+            <a:r>
+              <a:rPr lang="en-US"/>
               <a:t>Click to edit Master title style</a:t>
             </a:r>
             <a:endParaRPr lang="en-US"/>
@@ -1626,7 +1768,7 @@
       </p:sp>
       <p:sp>
         <p:nvSpPr>
-          <p:cNvPr id="3" name="Vertical Text Placeholder 2"/>
+          <p:cNvPr id="1404949572" name="Vertical Text Placeholder 2"/>
           <p:cNvSpPr>
             <a:spLocks noGrp="1"/>
           </p:cNvSpPr>
@@ -1634,7 +1776,7 @@
             <p:ph type="body" orient="vert" idx="1"/>
           </p:nvPr>
         </p:nvSpPr>
-        <p:spPr>
+        <p:spPr bwMode="auto">
           <a:xfrm>
             <a:off x="457200" y="274638"/>
             <a:ext cx="6019800" cy="5851525"/>
@@ -1644,37 +1786,51 @@
           <a:bodyPr vert="eaVert"/>
           <a:lstStyle/>
           <a:p>
-            <a:pPr lvl="0"/>
-            <a:r>
-              <a:rPr lang="en-US" smtClean="0"/>
+            <a:pPr lvl="0">
+              <a:defRPr/>
+            </a:pPr>
+            <a:r>
+              <a:rPr lang="en-US"/>
               <a:t>Click to edit Master text styles</a:t>
             </a:r>
-          </a:p>
-          <a:p>
-            <a:pPr lvl="1"/>
-            <a:r>
-              <a:rPr lang="en-US" smtClean="0"/>
+            <a:endParaRPr/>
+          </a:p>
+          <a:p>
+            <a:pPr lvl="1">
+              <a:defRPr/>
+            </a:pPr>
+            <a:r>
+              <a:rPr lang="en-US"/>
               <a:t>Second level</a:t>
             </a:r>
-          </a:p>
-          <a:p>
-            <a:pPr lvl="2"/>
-            <a:r>
-              <a:rPr lang="en-US" smtClean="0"/>
+            <a:endParaRPr/>
+          </a:p>
+          <a:p>
+            <a:pPr lvl="2">
+              <a:defRPr/>
+            </a:pPr>
+            <a:r>
+              <a:rPr lang="en-US"/>
               <a:t>Third level</a:t>
             </a:r>
-          </a:p>
-          <a:p>
-            <a:pPr lvl="3"/>
-            <a:r>
-              <a:rPr lang="en-US" smtClean="0"/>
+            <a:endParaRPr/>
+          </a:p>
+          <a:p>
+            <a:pPr lvl="3">
+              <a:defRPr/>
+            </a:pPr>
+            <a:r>
+              <a:rPr lang="en-US"/>
               <a:t>Fourth level</a:t>
             </a:r>
-          </a:p>
-          <a:p>
-            <a:pPr lvl="4"/>
-            <a:r>
-              <a:rPr lang="en-US" smtClean="0"/>
+            <a:endParaRPr/>
+          </a:p>
+          <a:p>
+            <a:pPr lvl="4">
+              <a:defRPr/>
+            </a:pPr>
+            <a:r>
+              <a:rPr lang="en-US"/>
               <a:t>Fifth level</a:t>
             </a:r>
             <a:endParaRPr lang="en-US"/>
@@ -1683,7 +1839,7 @@
       </p:sp>
       <p:sp>
         <p:nvSpPr>
-          <p:cNvPr id="4" name="Date Placeholder 3"/>
+          <p:cNvPr id="1950021484" name="Date Placeholder 3"/>
           <p:cNvSpPr>
             <a:spLocks noGrp="1"/>
           </p:cNvSpPr>
@@ -1691,13 +1847,16 @@
             <p:ph type="dt" sz="half" idx="10"/>
           </p:nvPr>
         </p:nvSpPr>
-        <p:spPr/>
+        <p:spPr bwMode="auto"/>
         <p:txBody>
           <a:bodyPr/>
           <a:lstStyle/>
           <a:p>
+            <a:pPr>
+              <a:defRPr/>
+            </a:pPr>
             <a:fld id="{5BCAD085-E8A6-8845-BD4E-CB4CCA059FC4}" type="datetimeFigureOut">
-              <a:rPr lang="en-US" smtClean="0"/>
+              <a:rPr lang="en-US"/>
               <a:t>1/27/13</a:t>
             </a:fld>
             <a:endParaRPr lang="en-US"/>
@@ -1706,7 +1865,7 @@
       </p:sp>
       <p:sp>
         <p:nvSpPr>
-          <p:cNvPr id="5" name="Footer Placeholder 4"/>
+          <p:cNvPr id="1497011028" name="Footer Placeholder 4"/>
           <p:cNvSpPr>
             <a:spLocks noGrp="1"/>
           </p:cNvSpPr>
@@ -1714,18 +1873,21 @@
             <p:ph type="ftr" sz="quarter" idx="11"/>
           </p:nvPr>
         </p:nvSpPr>
-        <p:spPr/>
+        <p:spPr bwMode="auto"/>
         <p:txBody>
           <a:bodyPr/>
           <a:lstStyle/>
           <a:p>
+            <a:pPr>
+              <a:defRPr/>
+            </a:pPr>
             <a:endParaRPr lang="en-US"/>
           </a:p>
         </p:txBody>
       </p:sp>
       <p:sp>
         <p:nvSpPr>
-          <p:cNvPr id="6" name="Slide Number Placeholder 5"/>
+          <p:cNvPr id="1694684170" name="Slide Number Placeholder 5"/>
           <p:cNvSpPr>
             <a:spLocks noGrp="1"/>
           </p:cNvSpPr>
@@ -1733,13 +1895,16 @@
             <p:ph type="sldNum" sz="quarter" idx="12"/>
           </p:nvPr>
         </p:nvSpPr>
-        <p:spPr/>
+        <p:spPr bwMode="auto"/>
         <p:txBody>
           <a:bodyPr/>
           <a:lstStyle/>
           <a:p>
+            <a:pPr>
+              <a:defRPr/>
+            </a:pPr>
             <a:fld id="{C1FF6DA9-008F-8B48-92A6-B652298478BF}" type="slidenum">
-              <a:rPr lang="en-US" smtClean="0"/>
+              <a:rPr lang="en-US"/>
               <a:t>‹#›</a:t>
             </a:fld>
             <a:endParaRPr lang="en-US"/>
@@ -1747,11 +1912,6 @@
         </p:txBody>
       </p:sp>
     </p:spTree>
-    <p:extLst>
-      <p:ext uri="{BB962C8B-B14F-4D97-AF65-F5344CB8AC3E}">
-        <p14:creationId xmlns:p14="http://schemas.microsoft.com/office/powerpoint/2010/main" val="3612223792"/>
-      </p:ext>
-    </p:extLst>
   </p:cSld>
   <p:clrMapOvr>
     <a:masterClrMapping/>
@@ -1760,7 +1920,7 @@
 </file>
 
 <file path=ppt/slideLayouts/slideLayout2.xml><?xml version="1.0" encoding="utf-8"?>
-<p:sldLayout xmlns:a="http://schemas.openxmlformats.org/drawingml/2006/main" xmlns:r="http://schemas.openxmlformats.org/officeDocument/2006/relationships" xmlns:p="http://schemas.openxmlformats.org/presentationml/2006/main" type="obj" preserve="1">
+<p:sldLayout xmlns:a="http://schemas.openxmlformats.org/drawingml/2006/main" xmlns:r="http://schemas.openxmlformats.org/officeDocument/2006/relationships" xmlns:p="http://schemas.openxmlformats.org/presentationml/2006/main" xmlns:m="http://schemas.openxmlformats.org/officeDocument/2006/math" xmlns:w="http://schemas.openxmlformats.org/wordprocessingml/2006/main" matchingName="" preserve="1" showMasterPhAnim="0" showMasterSp="1" type="obj" userDrawn="1">
   <p:cSld name="Title and Content">
     <p:spTree>
       <p:nvGrpSpPr>
@@ -1768,7 +1928,7 @@
         <p:cNvGrpSpPr/>
         <p:nvPr/>
       </p:nvGrpSpPr>
-      <p:grpSpPr>
+      <p:grpSpPr bwMode="auto">
         <a:xfrm>
           <a:off x="0" y="0"/>
           <a:ext cx="0" cy="0"/>
@@ -1778,7 +1938,7 @@
       </p:grpSpPr>
       <p:sp>
         <p:nvSpPr>
-          <p:cNvPr id="2" name="Title 1"/>
+          <p:cNvPr id="461158065" name="Title 1"/>
           <p:cNvSpPr>
             <a:spLocks noGrp="1"/>
           </p:cNvSpPr>
@@ -1786,13 +1946,16 @@
             <p:ph type="title"/>
           </p:nvPr>
         </p:nvSpPr>
-        <p:spPr/>
+        <p:spPr bwMode="auto"/>
         <p:txBody>
           <a:bodyPr/>
           <a:lstStyle/>
           <a:p>
-            <a:r>
-              <a:rPr lang="en-US" smtClean="0"/>
+            <a:pPr>
+              <a:defRPr/>
+            </a:pPr>
+            <a:r>
+              <a:rPr lang="en-US"/>
               <a:t>Click to edit Master title style</a:t>
             </a:r>
             <a:endParaRPr lang="en-US"/>
@@ -1801,7 +1964,7 @@
       </p:sp>
       <p:sp>
         <p:nvSpPr>
-          <p:cNvPr id="3" name="Content Placeholder 2"/>
+          <p:cNvPr id="967805571" name="Content Placeholder 2"/>
           <p:cNvSpPr>
             <a:spLocks noGrp="1"/>
           </p:cNvSpPr>
@@ -1809,42 +1972,56 @@
             <p:ph idx="1"/>
           </p:nvPr>
         </p:nvSpPr>
-        <p:spPr/>
+        <p:spPr bwMode="auto"/>
         <p:txBody>
           <a:bodyPr/>
           <a:lstStyle/>
           <a:p>
-            <a:pPr lvl="0"/>
-            <a:r>
-              <a:rPr lang="en-US" smtClean="0"/>
+            <a:pPr lvl="0">
+              <a:defRPr/>
+            </a:pPr>
+            <a:r>
+              <a:rPr lang="en-US"/>
               <a:t>Click to edit Master text styles</a:t>
             </a:r>
-          </a:p>
-          <a:p>
-            <a:pPr lvl="1"/>
-            <a:r>
-              <a:rPr lang="en-US" smtClean="0"/>
+            <a:endParaRPr/>
+          </a:p>
+          <a:p>
+            <a:pPr lvl="1">
+              <a:defRPr/>
+            </a:pPr>
+            <a:r>
+              <a:rPr lang="en-US"/>
               <a:t>Second level</a:t>
             </a:r>
-          </a:p>
-          <a:p>
-            <a:pPr lvl="2"/>
-            <a:r>
-              <a:rPr lang="en-US" smtClean="0"/>
+            <a:endParaRPr/>
+          </a:p>
+          <a:p>
+            <a:pPr lvl="2">
+              <a:defRPr/>
+            </a:pPr>
+            <a:r>
+              <a:rPr lang="en-US"/>
               <a:t>Third level</a:t>
             </a:r>
-          </a:p>
-          <a:p>
-            <a:pPr lvl="3"/>
-            <a:r>
-              <a:rPr lang="en-US" smtClean="0"/>
+            <a:endParaRPr/>
+          </a:p>
+          <a:p>
+            <a:pPr lvl="3">
+              <a:defRPr/>
+            </a:pPr>
+            <a:r>
+              <a:rPr lang="en-US"/>
               <a:t>Fourth level</a:t>
             </a:r>
-          </a:p>
-          <a:p>
-            <a:pPr lvl="4"/>
-            <a:r>
-              <a:rPr lang="en-US" smtClean="0"/>
+            <a:endParaRPr/>
+          </a:p>
+          <a:p>
+            <a:pPr lvl="4">
+              <a:defRPr/>
+            </a:pPr>
+            <a:r>
+              <a:rPr lang="en-US"/>
               <a:t>Fifth level</a:t>
             </a:r>
             <a:endParaRPr lang="en-US"/>
@@ -1853,7 +2030,7 @@
       </p:sp>
       <p:sp>
         <p:nvSpPr>
-          <p:cNvPr id="4" name="Date Placeholder 3"/>
+          <p:cNvPr id="841074162" name="Date Placeholder 3"/>
           <p:cNvSpPr>
             <a:spLocks noGrp="1"/>
           </p:cNvSpPr>
@@ -1861,13 +2038,16 @@
             <p:ph type="dt" sz="half" idx="10"/>
           </p:nvPr>
         </p:nvSpPr>
-        <p:spPr/>
+        <p:spPr bwMode="auto"/>
         <p:txBody>
           <a:bodyPr/>
           <a:lstStyle/>
           <a:p>
+            <a:pPr>
+              <a:defRPr/>
+            </a:pPr>
             <a:fld id="{5BCAD085-E8A6-8845-BD4E-CB4CCA059FC4}" type="datetimeFigureOut">
-              <a:rPr lang="en-US" smtClean="0"/>
+              <a:rPr lang="en-US"/>
               <a:t>1/27/13</a:t>
             </a:fld>
             <a:endParaRPr lang="en-US"/>
@@ -1876,7 +2056,7 @@
       </p:sp>
       <p:sp>
         <p:nvSpPr>
-          <p:cNvPr id="5" name="Footer Placeholder 4"/>
+          <p:cNvPr id="1144132618" name="Footer Placeholder 4"/>
           <p:cNvSpPr>
             <a:spLocks noGrp="1"/>
           </p:cNvSpPr>
@@ -1884,18 +2064,21 @@
             <p:ph type="ftr" sz="quarter" idx="11"/>
           </p:nvPr>
         </p:nvSpPr>
-        <p:spPr/>
+        <p:spPr bwMode="auto"/>
         <p:txBody>
           <a:bodyPr/>
           <a:lstStyle/>
           <a:p>
+            <a:pPr>
+              <a:defRPr/>
+            </a:pPr>
             <a:endParaRPr lang="en-US"/>
           </a:p>
         </p:txBody>
       </p:sp>
       <p:sp>
         <p:nvSpPr>
-          <p:cNvPr id="6" name="Slide Number Placeholder 5"/>
+          <p:cNvPr id="1142824166" name="Slide Number Placeholder 5"/>
           <p:cNvSpPr>
             <a:spLocks noGrp="1"/>
           </p:cNvSpPr>
@@ -1903,13 +2086,16 @@
             <p:ph type="sldNum" sz="quarter" idx="12"/>
           </p:nvPr>
         </p:nvSpPr>
-        <p:spPr/>
+        <p:spPr bwMode="auto"/>
         <p:txBody>
           <a:bodyPr/>
           <a:lstStyle/>
           <a:p>
+            <a:pPr>
+              <a:defRPr/>
+            </a:pPr>
             <a:fld id="{C1FF6DA9-008F-8B48-92A6-B652298478BF}" type="slidenum">
-              <a:rPr lang="en-US" smtClean="0"/>
+              <a:rPr lang="en-US"/>
               <a:t>‹#›</a:t>
             </a:fld>
             <a:endParaRPr lang="en-US"/>
@@ -1917,11 +2103,6 @@
         </p:txBody>
       </p:sp>
     </p:spTree>
-    <p:extLst>
-      <p:ext uri="{BB962C8B-B14F-4D97-AF65-F5344CB8AC3E}">
-        <p14:creationId xmlns:p14="http://schemas.microsoft.com/office/powerpoint/2010/main" val="2614314258"/>
-      </p:ext>
-    </p:extLst>
   </p:cSld>
   <p:clrMapOvr>
     <a:masterClrMapping/>
@@ -1930,7 +2111,7 @@
 </file>
 
 <file path=ppt/slideLayouts/slideLayout3.xml><?xml version="1.0" encoding="utf-8"?>
-<p:sldLayout xmlns:a="http://schemas.openxmlformats.org/drawingml/2006/main" xmlns:r="http://schemas.openxmlformats.org/officeDocument/2006/relationships" xmlns:p="http://schemas.openxmlformats.org/presentationml/2006/main" type="secHead" preserve="1">
+<p:sldLayout xmlns:a="http://schemas.openxmlformats.org/drawingml/2006/main" xmlns:r="http://schemas.openxmlformats.org/officeDocument/2006/relationships" xmlns:p="http://schemas.openxmlformats.org/presentationml/2006/main" xmlns:m="http://schemas.openxmlformats.org/officeDocument/2006/math" xmlns:w="http://schemas.openxmlformats.org/wordprocessingml/2006/main" matchingName="" preserve="1" showMasterPhAnim="0" showMasterSp="1" type="secHead" userDrawn="1">
   <p:cSld name="Section Header">
     <p:spTree>
       <p:nvGrpSpPr>
@@ -1938,7 +2119,7 @@
         <p:cNvGrpSpPr/>
         <p:nvPr/>
       </p:nvGrpSpPr>
-      <p:grpSpPr>
+      <p:grpSpPr bwMode="auto">
         <a:xfrm>
           <a:off x="0" y="0"/>
           <a:ext cx="0" cy="0"/>
@@ -1948,7 +2129,7 @@
       </p:grpSpPr>
       <p:sp>
         <p:nvSpPr>
-          <p:cNvPr id="2" name="Title 1"/>
+          <p:cNvPr id="388297856" name="Title 1"/>
           <p:cNvSpPr>
             <a:spLocks noGrp="1"/>
           </p:cNvSpPr>
@@ -1956,7 +2137,7 @@
             <p:ph type="title"/>
           </p:nvPr>
         </p:nvSpPr>
-        <p:spPr>
+        <p:spPr bwMode="auto">
           <a:xfrm>
             <a:off x="722313" y="4406900"/>
             <a:ext cx="7772400" cy="1362075"/>
@@ -1970,8 +2151,11 @@
             </a:lvl1pPr>
           </a:lstStyle>
           <a:p>
-            <a:r>
-              <a:rPr lang="en-US" smtClean="0"/>
+            <a:pPr>
+              <a:defRPr/>
+            </a:pPr>
+            <a:r>
+              <a:rPr lang="en-US"/>
               <a:t>Click to edit Master title style</a:t>
             </a:r>
             <a:endParaRPr lang="en-US"/>
@@ -1980,7 +2164,7 @@
       </p:sp>
       <p:sp>
         <p:nvSpPr>
-          <p:cNvPr id="3" name="Text Placeholder 2"/>
+          <p:cNvPr id="1612699540" name="Text Placeholder 2"/>
           <p:cNvSpPr>
             <a:spLocks noGrp="1"/>
           </p:cNvSpPr>
@@ -1988,7 +2172,7 @@
             <p:ph type="body" idx="1"/>
           </p:nvPr>
         </p:nvSpPr>
-        <p:spPr>
+        <p:spPr bwMode="auto">
           <a:xfrm>
             <a:off x="722313" y="2906713"/>
             <a:ext cx="7772400" cy="1500187"/>
@@ -2089,17 +2273,20 @@
             </a:lvl9pPr>
           </a:lstStyle>
           <a:p>
-            <a:pPr lvl="0"/>
-            <a:r>
-              <a:rPr lang="en-US" smtClean="0"/>
+            <a:pPr lvl="0">
+              <a:defRPr/>
+            </a:pPr>
+            <a:r>
+              <a:rPr lang="en-US"/>
               <a:t>Click to edit Master text styles</a:t>
             </a:r>
-          </a:p>
-        </p:txBody>
-      </p:sp>
-      <p:sp>
-        <p:nvSpPr>
-          <p:cNvPr id="4" name="Date Placeholder 3"/>
+            <a:endParaRPr/>
+          </a:p>
+        </p:txBody>
+      </p:sp>
+      <p:sp>
+        <p:nvSpPr>
+          <p:cNvPr id="1265544603" name="Date Placeholder 3"/>
           <p:cNvSpPr>
             <a:spLocks noGrp="1"/>
           </p:cNvSpPr>
@@ -2107,13 +2294,16 @@
             <p:ph type="dt" sz="half" idx="10"/>
           </p:nvPr>
         </p:nvSpPr>
-        <p:spPr/>
+        <p:spPr bwMode="auto"/>
         <p:txBody>
           <a:bodyPr/>
           <a:lstStyle/>
           <a:p>
+            <a:pPr>
+              <a:defRPr/>
+            </a:pPr>
             <a:fld id="{5BCAD085-E8A6-8845-BD4E-CB4CCA059FC4}" type="datetimeFigureOut">
-              <a:rPr lang="en-US" smtClean="0"/>
+              <a:rPr lang="en-US"/>
               <a:t>1/27/13</a:t>
             </a:fld>
             <a:endParaRPr lang="en-US"/>
@@ -2122,7 +2312,7 @@
       </p:sp>
       <p:sp>
         <p:nvSpPr>
-          <p:cNvPr id="5" name="Footer Placeholder 4"/>
+          <p:cNvPr id="887118175" name="Footer Placeholder 4"/>
           <p:cNvSpPr>
             <a:spLocks noGrp="1"/>
           </p:cNvSpPr>
@@ -2130,18 +2320,21 @@
             <p:ph type="ftr" sz="quarter" idx="11"/>
           </p:nvPr>
         </p:nvSpPr>
-        <p:spPr/>
+        <p:spPr bwMode="auto"/>
         <p:txBody>
           <a:bodyPr/>
           <a:lstStyle/>
           <a:p>
+            <a:pPr>
+              <a:defRPr/>
+            </a:pPr>
             <a:endParaRPr lang="en-US"/>
           </a:p>
         </p:txBody>
       </p:sp>
       <p:sp>
         <p:nvSpPr>
-          <p:cNvPr id="6" name="Slide Number Placeholder 5"/>
+          <p:cNvPr id="1385014923" name="Slide Number Placeholder 5"/>
           <p:cNvSpPr>
             <a:spLocks noGrp="1"/>
           </p:cNvSpPr>
@@ -2149,13 +2342,16 @@
             <p:ph type="sldNum" sz="quarter" idx="12"/>
           </p:nvPr>
         </p:nvSpPr>
-        <p:spPr/>
+        <p:spPr bwMode="auto"/>
         <p:txBody>
           <a:bodyPr/>
           <a:lstStyle/>
           <a:p>
+            <a:pPr>
+              <a:defRPr/>
+            </a:pPr>
             <a:fld id="{C1FF6DA9-008F-8B48-92A6-B652298478BF}" type="slidenum">
-              <a:rPr lang="en-US" smtClean="0"/>
+              <a:rPr lang="en-US"/>
               <a:t>‹#›</a:t>
             </a:fld>
             <a:endParaRPr lang="en-US"/>
@@ -2163,11 +2359,6 @@
         </p:txBody>
       </p:sp>
     </p:spTree>
-    <p:extLst>
-      <p:ext uri="{BB962C8B-B14F-4D97-AF65-F5344CB8AC3E}">
-        <p14:creationId xmlns:p14="http://schemas.microsoft.com/office/powerpoint/2010/main" val="960648375"/>
-      </p:ext>
-    </p:extLst>
   </p:cSld>
   <p:clrMapOvr>
     <a:masterClrMapping/>
@@ -2176,7 +2367,7 @@
 </file>
 
 <file path=ppt/slideLayouts/slideLayout4.xml><?xml version="1.0" encoding="utf-8"?>
-<p:sldLayout xmlns:a="http://schemas.openxmlformats.org/drawingml/2006/main" xmlns:r="http://schemas.openxmlformats.org/officeDocument/2006/relationships" xmlns:p="http://schemas.openxmlformats.org/presentationml/2006/main" type="twoObj" preserve="1">
+<p:sldLayout xmlns:a="http://schemas.openxmlformats.org/drawingml/2006/main" xmlns:r="http://schemas.openxmlformats.org/officeDocument/2006/relationships" xmlns:p="http://schemas.openxmlformats.org/presentationml/2006/main" xmlns:m="http://schemas.openxmlformats.org/officeDocument/2006/math" xmlns:w="http://schemas.openxmlformats.org/wordprocessingml/2006/main" matchingName="" preserve="1" showMasterPhAnim="0" showMasterSp="1" type="twoObj" userDrawn="1">
   <p:cSld name="Two Content">
     <p:spTree>
       <p:nvGrpSpPr>
@@ -2184,7 +2375,7 @@
         <p:cNvGrpSpPr/>
         <p:nvPr/>
       </p:nvGrpSpPr>
-      <p:grpSpPr>
+      <p:grpSpPr bwMode="auto">
         <a:xfrm>
           <a:off x="0" y="0"/>
           <a:ext cx="0" cy="0"/>
@@ -2194,7 +2385,7 @@
       </p:grpSpPr>
       <p:sp>
         <p:nvSpPr>
-          <p:cNvPr id="2" name="Title 1"/>
+          <p:cNvPr id="10289685" name="Title 1"/>
           <p:cNvSpPr>
             <a:spLocks noGrp="1"/>
           </p:cNvSpPr>
@@ -2202,13 +2393,16 @@
             <p:ph type="title"/>
           </p:nvPr>
         </p:nvSpPr>
-        <p:spPr/>
+        <p:spPr bwMode="auto"/>
         <p:txBody>
           <a:bodyPr/>
           <a:lstStyle/>
           <a:p>
-            <a:r>
-              <a:rPr lang="en-US" smtClean="0"/>
+            <a:pPr>
+              <a:defRPr/>
+            </a:pPr>
+            <a:r>
+              <a:rPr lang="en-US"/>
               <a:t>Click to edit Master title style</a:t>
             </a:r>
             <a:endParaRPr lang="en-US"/>
@@ -2217,7 +2411,7 @@
       </p:sp>
       <p:sp>
         <p:nvSpPr>
-          <p:cNvPr id="3" name="Content Placeholder 2"/>
+          <p:cNvPr id="1396741400" name="Content Placeholder 2"/>
           <p:cNvSpPr>
             <a:spLocks noGrp="1"/>
           </p:cNvSpPr>
@@ -2225,7 +2419,7 @@
             <p:ph sz="half" idx="1"/>
           </p:nvPr>
         </p:nvSpPr>
-        <p:spPr>
+        <p:spPr bwMode="auto">
           <a:xfrm>
             <a:off x="457200" y="1600200"/>
             <a:ext cx="4038600" cy="4525963"/>
@@ -2263,37 +2457,51 @@
             </a:lvl9pPr>
           </a:lstStyle>
           <a:p>
-            <a:pPr lvl="0"/>
-            <a:r>
-              <a:rPr lang="en-US" smtClean="0"/>
+            <a:pPr lvl="0">
+              <a:defRPr/>
+            </a:pPr>
+            <a:r>
+              <a:rPr lang="en-US"/>
               <a:t>Click to edit Master text styles</a:t>
             </a:r>
-          </a:p>
-          <a:p>
-            <a:pPr lvl="1"/>
-            <a:r>
-              <a:rPr lang="en-US" smtClean="0"/>
+            <a:endParaRPr/>
+          </a:p>
+          <a:p>
+            <a:pPr lvl="1">
+              <a:defRPr/>
+            </a:pPr>
+            <a:r>
+              <a:rPr lang="en-US"/>
               <a:t>Second level</a:t>
             </a:r>
-          </a:p>
-          <a:p>
-            <a:pPr lvl="2"/>
-            <a:r>
-              <a:rPr lang="en-US" smtClean="0"/>
+            <a:endParaRPr/>
+          </a:p>
+          <a:p>
+            <a:pPr lvl="2">
+              <a:defRPr/>
+            </a:pPr>
+            <a:r>
+              <a:rPr lang="en-US"/>
               <a:t>Third level</a:t>
             </a:r>
-          </a:p>
-          <a:p>
-            <a:pPr lvl="3"/>
-            <a:r>
-              <a:rPr lang="en-US" smtClean="0"/>
+            <a:endParaRPr/>
+          </a:p>
+          <a:p>
+            <a:pPr lvl="3">
+              <a:defRPr/>
+            </a:pPr>
+            <a:r>
+              <a:rPr lang="en-US"/>
               <a:t>Fourth level</a:t>
             </a:r>
-          </a:p>
-          <a:p>
-            <a:pPr lvl="4"/>
-            <a:r>
-              <a:rPr lang="en-US" smtClean="0"/>
+            <a:endParaRPr/>
+          </a:p>
+          <a:p>
+            <a:pPr lvl="4">
+              <a:defRPr/>
+            </a:pPr>
+            <a:r>
+              <a:rPr lang="en-US"/>
               <a:t>Fifth level</a:t>
             </a:r>
             <a:endParaRPr lang="en-US"/>
@@ -2302,7 +2510,7 @@
       </p:sp>
       <p:sp>
         <p:nvSpPr>
-          <p:cNvPr id="4" name="Content Placeholder 3"/>
+          <p:cNvPr id="527363300" name="Content Placeholder 3"/>
           <p:cNvSpPr>
             <a:spLocks noGrp="1"/>
           </p:cNvSpPr>
@@ -2310,7 +2518,7 @@
             <p:ph sz="half" idx="2"/>
           </p:nvPr>
         </p:nvSpPr>
-        <p:spPr>
+        <p:spPr bwMode="auto">
           <a:xfrm>
             <a:off x="4648200" y="1600200"/>
             <a:ext cx="4038600" cy="4525963"/>
@@ -2348,37 +2556,51 @@
             </a:lvl9pPr>
           </a:lstStyle>
           <a:p>
-            <a:pPr lvl="0"/>
-            <a:r>
-              <a:rPr lang="en-US" smtClean="0"/>
+            <a:pPr lvl="0">
+              <a:defRPr/>
+            </a:pPr>
+            <a:r>
+              <a:rPr lang="en-US"/>
               <a:t>Click to edit Master text styles</a:t>
             </a:r>
-          </a:p>
-          <a:p>
-            <a:pPr lvl="1"/>
-            <a:r>
-              <a:rPr lang="en-US" smtClean="0"/>
+            <a:endParaRPr/>
+          </a:p>
+          <a:p>
+            <a:pPr lvl="1">
+              <a:defRPr/>
+            </a:pPr>
+            <a:r>
+              <a:rPr lang="en-US"/>
               <a:t>Second level</a:t>
             </a:r>
-          </a:p>
-          <a:p>
-            <a:pPr lvl="2"/>
-            <a:r>
-              <a:rPr lang="en-US" smtClean="0"/>
+            <a:endParaRPr/>
+          </a:p>
+          <a:p>
+            <a:pPr lvl="2">
+              <a:defRPr/>
+            </a:pPr>
+            <a:r>
+              <a:rPr lang="en-US"/>
               <a:t>Third level</a:t>
             </a:r>
-          </a:p>
-          <a:p>
-            <a:pPr lvl="3"/>
-            <a:r>
-              <a:rPr lang="en-US" smtClean="0"/>
+            <a:endParaRPr/>
+          </a:p>
+          <a:p>
+            <a:pPr lvl="3">
+              <a:defRPr/>
+            </a:pPr>
+            <a:r>
+              <a:rPr lang="en-US"/>
               <a:t>Fourth level</a:t>
             </a:r>
-          </a:p>
-          <a:p>
-            <a:pPr lvl="4"/>
-            <a:r>
-              <a:rPr lang="en-US" smtClean="0"/>
+            <a:endParaRPr/>
+          </a:p>
+          <a:p>
+            <a:pPr lvl="4">
+              <a:defRPr/>
+            </a:pPr>
+            <a:r>
+              <a:rPr lang="en-US"/>
               <a:t>Fifth level</a:t>
             </a:r>
             <a:endParaRPr lang="en-US"/>
@@ -2387,7 +2609,7 @@
       </p:sp>
       <p:sp>
         <p:nvSpPr>
-          <p:cNvPr id="5" name="Date Placeholder 4"/>
+          <p:cNvPr id="146686463" name="Date Placeholder 4"/>
           <p:cNvSpPr>
             <a:spLocks noGrp="1"/>
           </p:cNvSpPr>
@@ -2395,13 +2617,16 @@
             <p:ph type="dt" sz="half" idx="10"/>
           </p:nvPr>
         </p:nvSpPr>
-        <p:spPr/>
+        <p:spPr bwMode="auto"/>
         <p:txBody>
           <a:bodyPr/>
           <a:lstStyle/>
           <a:p>
+            <a:pPr>
+              <a:defRPr/>
+            </a:pPr>
             <a:fld id="{5BCAD085-E8A6-8845-BD4E-CB4CCA059FC4}" type="datetimeFigureOut">
-              <a:rPr lang="en-US" smtClean="0"/>
+              <a:rPr lang="en-US"/>
               <a:t>1/27/13</a:t>
             </a:fld>
             <a:endParaRPr lang="en-US"/>
@@ -2410,7 +2635,7 @@
       </p:sp>
       <p:sp>
         <p:nvSpPr>
-          <p:cNvPr id="6" name="Footer Placeholder 5"/>
+          <p:cNvPr id="149644587" name="Footer Placeholder 5"/>
           <p:cNvSpPr>
             <a:spLocks noGrp="1"/>
           </p:cNvSpPr>
@@ -2418,18 +2643,21 @@
             <p:ph type="ftr" sz="quarter" idx="11"/>
           </p:nvPr>
         </p:nvSpPr>
-        <p:spPr/>
+        <p:spPr bwMode="auto"/>
         <p:txBody>
           <a:bodyPr/>
           <a:lstStyle/>
           <a:p>
+            <a:pPr>
+              <a:defRPr/>
+            </a:pPr>
             <a:endParaRPr lang="en-US"/>
           </a:p>
         </p:txBody>
       </p:sp>
       <p:sp>
         <p:nvSpPr>
-          <p:cNvPr id="7" name="Slide Number Placeholder 6"/>
+          <p:cNvPr id="116436062" name="Slide Number Placeholder 6"/>
           <p:cNvSpPr>
             <a:spLocks noGrp="1"/>
           </p:cNvSpPr>
@@ -2437,13 +2665,16 @@
             <p:ph type="sldNum" sz="quarter" idx="12"/>
           </p:nvPr>
         </p:nvSpPr>
-        <p:spPr/>
+        <p:spPr bwMode="auto"/>
         <p:txBody>
           <a:bodyPr/>
           <a:lstStyle/>
           <a:p>
+            <a:pPr>
+              <a:defRPr/>
+            </a:pPr>
             <a:fld id="{C1FF6DA9-008F-8B48-92A6-B652298478BF}" type="slidenum">
-              <a:rPr lang="en-US" smtClean="0"/>
+              <a:rPr lang="en-US"/>
               <a:t>‹#›</a:t>
             </a:fld>
             <a:endParaRPr lang="en-US"/>
@@ -2451,11 +2682,6 @@
         </p:txBody>
       </p:sp>
     </p:spTree>
-    <p:extLst>
-      <p:ext uri="{BB962C8B-B14F-4D97-AF65-F5344CB8AC3E}">
-        <p14:creationId xmlns:p14="http://schemas.microsoft.com/office/powerpoint/2010/main" val="2782244947"/>
-      </p:ext>
-    </p:extLst>
   </p:cSld>
   <p:clrMapOvr>
     <a:masterClrMapping/>
@@ -2464,7 +2690,7 @@
 </file>
 
 <file path=ppt/slideLayouts/slideLayout5.xml><?xml version="1.0" encoding="utf-8"?>
-<p:sldLayout xmlns:a="http://schemas.openxmlformats.org/drawingml/2006/main" xmlns:r="http://schemas.openxmlformats.org/officeDocument/2006/relationships" xmlns:p="http://schemas.openxmlformats.org/presentationml/2006/main" type="twoTxTwoObj" preserve="1">
+<p:sldLayout xmlns:a="http://schemas.openxmlformats.org/drawingml/2006/main" xmlns:r="http://schemas.openxmlformats.org/officeDocument/2006/relationships" xmlns:p="http://schemas.openxmlformats.org/presentationml/2006/main" xmlns:m="http://schemas.openxmlformats.org/officeDocument/2006/math" xmlns:w="http://schemas.openxmlformats.org/wordprocessingml/2006/main" matchingName="" preserve="1" showMasterPhAnim="0" showMasterSp="1" type="twoTxTwoObj" userDrawn="1">
   <p:cSld name="Comparison">
     <p:spTree>
       <p:nvGrpSpPr>
@@ -2472,7 +2698,7 @@
         <p:cNvGrpSpPr/>
         <p:nvPr/>
       </p:nvGrpSpPr>
-      <p:grpSpPr>
+      <p:grpSpPr bwMode="auto">
         <a:xfrm>
           <a:off x="0" y="0"/>
           <a:ext cx="0" cy="0"/>
@@ -2482,7 +2708,7 @@
       </p:grpSpPr>
       <p:sp>
         <p:nvSpPr>
-          <p:cNvPr id="2" name="Title 1"/>
+          <p:cNvPr id="647195095" name="Title 1"/>
           <p:cNvSpPr>
             <a:spLocks noGrp="1"/>
           </p:cNvSpPr>
@@ -2490,7 +2716,7 @@
             <p:ph type="title"/>
           </p:nvPr>
         </p:nvSpPr>
-        <p:spPr/>
+        <p:spPr bwMode="auto"/>
         <p:txBody>
           <a:bodyPr/>
           <a:lstStyle>
@@ -2499,8 +2725,11 @@
             </a:lvl1pPr>
           </a:lstStyle>
           <a:p>
-            <a:r>
-              <a:rPr lang="en-US" smtClean="0"/>
+            <a:pPr>
+              <a:defRPr/>
+            </a:pPr>
+            <a:r>
+              <a:rPr lang="en-US"/>
               <a:t>Click to edit Master title style</a:t>
             </a:r>
             <a:endParaRPr lang="en-US"/>
@@ -2509,7 +2738,7 @@
       </p:sp>
       <p:sp>
         <p:nvSpPr>
-          <p:cNvPr id="3" name="Text Placeholder 2"/>
+          <p:cNvPr id="2139772814" name="Text Placeholder 2"/>
           <p:cNvSpPr>
             <a:spLocks noGrp="1"/>
           </p:cNvSpPr>
@@ -2517,7 +2746,7 @@
             <p:ph type="body" idx="1"/>
           </p:nvPr>
         </p:nvSpPr>
-        <p:spPr>
+        <p:spPr bwMode="auto">
           <a:xfrm>
             <a:off x="457200" y="1535113"/>
             <a:ext cx="4040188" cy="639762"/>
@@ -2564,17 +2793,20 @@
             </a:lvl9pPr>
           </a:lstStyle>
           <a:p>
-            <a:pPr lvl="0"/>
-            <a:r>
-              <a:rPr lang="en-US" smtClean="0"/>
+            <a:pPr lvl="0">
+              <a:defRPr/>
+            </a:pPr>
+            <a:r>
+              <a:rPr lang="en-US"/>
               <a:t>Click to edit Master text styles</a:t>
             </a:r>
-          </a:p>
-        </p:txBody>
-      </p:sp>
-      <p:sp>
-        <p:nvSpPr>
-          <p:cNvPr id="4" name="Content Placeholder 3"/>
+            <a:endParaRPr/>
+          </a:p>
+        </p:txBody>
+      </p:sp>
+      <p:sp>
+        <p:nvSpPr>
+          <p:cNvPr id="1299493418" name="Content Placeholder 3"/>
           <p:cNvSpPr>
             <a:spLocks noGrp="1"/>
           </p:cNvSpPr>
@@ -2582,7 +2814,7 @@
             <p:ph sz="half" idx="2"/>
           </p:nvPr>
         </p:nvSpPr>
-        <p:spPr>
+        <p:spPr bwMode="auto">
           <a:xfrm>
             <a:off x="457200" y="2174875"/>
             <a:ext cx="4040188" cy="3951288"/>
@@ -2620,37 +2852,51 @@
             </a:lvl9pPr>
           </a:lstStyle>
           <a:p>
-            <a:pPr lvl="0"/>
-            <a:r>
-              <a:rPr lang="en-US" smtClean="0"/>
+            <a:pPr lvl="0">
+              <a:defRPr/>
+            </a:pPr>
+            <a:r>
+              <a:rPr lang="en-US"/>
               <a:t>Click to edit Master text styles</a:t>
             </a:r>
-          </a:p>
-          <a:p>
-            <a:pPr lvl="1"/>
-            <a:r>
-              <a:rPr lang="en-US" smtClean="0"/>
+            <a:endParaRPr/>
+          </a:p>
+          <a:p>
+            <a:pPr lvl="1">
+              <a:defRPr/>
+            </a:pPr>
+            <a:r>
+              <a:rPr lang="en-US"/>
               <a:t>Second level</a:t>
             </a:r>
-          </a:p>
-          <a:p>
-            <a:pPr lvl="2"/>
-            <a:r>
-              <a:rPr lang="en-US" smtClean="0"/>
+            <a:endParaRPr/>
+          </a:p>
+          <a:p>
+            <a:pPr lvl="2">
+              <a:defRPr/>
+            </a:pPr>
+            <a:r>
+              <a:rPr lang="en-US"/>
               <a:t>Third level</a:t>
             </a:r>
-          </a:p>
-          <a:p>
-            <a:pPr lvl="3"/>
-            <a:r>
-              <a:rPr lang="en-US" smtClean="0"/>
+            <a:endParaRPr/>
+          </a:p>
+          <a:p>
+            <a:pPr lvl="3">
+              <a:defRPr/>
+            </a:pPr>
+            <a:r>
+              <a:rPr lang="en-US"/>
               <a:t>Fourth level</a:t>
             </a:r>
-          </a:p>
-          <a:p>
-            <a:pPr lvl="4"/>
-            <a:r>
-              <a:rPr lang="en-US" smtClean="0"/>
+            <a:endParaRPr/>
+          </a:p>
+          <a:p>
+            <a:pPr lvl="4">
+              <a:defRPr/>
+            </a:pPr>
+            <a:r>
+              <a:rPr lang="en-US"/>
               <a:t>Fifth level</a:t>
             </a:r>
             <a:endParaRPr lang="en-US"/>
@@ -2659,7 +2905,7 @@
       </p:sp>
       <p:sp>
         <p:nvSpPr>
-          <p:cNvPr id="5" name="Text Placeholder 4"/>
+          <p:cNvPr id="213367606" name="Text Placeholder 4"/>
           <p:cNvSpPr>
             <a:spLocks noGrp="1"/>
           </p:cNvSpPr>
@@ -2667,7 +2913,7 @@
             <p:ph type="body" sz="quarter" idx="3"/>
           </p:nvPr>
         </p:nvSpPr>
-        <p:spPr>
+        <p:spPr bwMode="auto">
           <a:xfrm>
             <a:off x="4645025" y="1535113"/>
             <a:ext cx="4041775" cy="639762"/>
@@ -2714,17 +2960,20 @@
             </a:lvl9pPr>
           </a:lstStyle>
           <a:p>
-            <a:pPr lvl="0"/>
-            <a:r>
-              <a:rPr lang="en-US" smtClean="0"/>
+            <a:pPr lvl="0">
+              <a:defRPr/>
+            </a:pPr>
+            <a:r>
+              <a:rPr lang="en-US"/>
               <a:t>Click to edit Master text styles</a:t>
             </a:r>
-          </a:p>
-        </p:txBody>
-      </p:sp>
-      <p:sp>
-        <p:nvSpPr>
-          <p:cNvPr id="6" name="Content Placeholder 5"/>
+            <a:endParaRPr/>
+          </a:p>
+        </p:txBody>
+      </p:sp>
+      <p:sp>
+        <p:nvSpPr>
+          <p:cNvPr id="1309443030" name="Content Placeholder 5"/>
           <p:cNvSpPr>
             <a:spLocks noGrp="1"/>
           </p:cNvSpPr>
@@ -2732,7 +2981,7 @@
             <p:ph sz="quarter" idx="4"/>
           </p:nvPr>
         </p:nvSpPr>
-        <p:spPr>
+        <p:spPr bwMode="auto">
           <a:xfrm>
             <a:off x="4645025" y="2174875"/>
             <a:ext cx="4041775" cy="3951288"/>
@@ -2770,37 +3019,51 @@
             </a:lvl9pPr>
           </a:lstStyle>
           <a:p>
-            <a:pPr lvl="0"/>
-            <a:r>
-              <a:rPr lang="en-US" smtClean="0"/>
+            <a:pPr lvl="0">
+              <a:defRPr/>
+            </a:pPr>
+            <a:r>
+              <a:rPr lang="en-US"/>
               <a:t>Click to edit Master text styles</a:t>
             </a:r>
-          </a:p>
-          <a:p>
-            <a:pPr lvl="1"/>
-            <a:r>
-              <a:rPr lang="en-US" smtClean="0"/>
+            <a:endParaRPr/>
+          </a:p>
+          <a:p>
+            <a:pPr lvl="1">
+              <a:defRPr/>
+            </a:pPr>
+            <a:r>
+              <a:rPr lang="en-US"/>
               <a:t>Second level</a:t>
             </a:r>
-          </a:p>
-          <a:p>
-            <a:pPr lvl="2"/>
-            <a:r>
-              <a:rPr lang="en-US" smtClean="0"/>
+            <a:endParaRPr/>
+          </a:p>
+          <a:p>
+            <a:pPr lvl="2">
+              <a:defRPr/>
+            </a:pPr>
+            <a:r>
+              <a:rPr lang="en-US"/>
               <a:t>Third level</a:t>
             </a:r>
-          </a:p>
-          <a:p>
-            <a:pPr lvl="3"/>
-            <a:r>
-              <a:rPr lang="en-US" smtClean="0"/>
+            <a:endParaRPr/>
+          </a:p>
+          <a:p>
+            <a:pPr lvl="3">
+              <a:defRPr/>
+            </a:pPr>
+            <a:r>
+              <a:rPr lang="en-US"/>
               <a:t>Fourth level</a:t>
             </a:r>
-          </a:p>
-          <a:p>
-            <a:pPr lvl="4"/>
-            <a:r>
-              <a:rPr lang="en-US" smtClean="0"/>
+            <a:endParaRPr/>
+          </a:p>
+          <a:p>
+            <a:pPr lvl="4">
+              <a:defRPr/>
+            </a:pPr>
+            <a:r>
+              <a:rPr lang="en-US"/>
               <a:t>Fifth level</a:t>
             </a:r>
             <a:endParaRPr lang="en-US"/>
@@ -2809,7 +3072,7 @@
       </p:sp>
       <p:sp>
         <p:nvSpPr>
-          <p:cNvPr id="7" name="Date Placeholder 6"/>
+          <p:cNvPr id="2055812079" name="Date Placeholder 6"/>
           <p:cNvSpPr>
             <a:spLocks noGrp="1"/>
           </p:cNvSpPr>
@@ -2817,13 +3080,16 @@
             <p:ph type="dt" sz="half" idx="10"/>
           </p:nvPr>
         </p:nvSpPr>
-        <p:spPr/>
+        <p:spPr bwMode="auto"/>
         <p:txBody>
           <a:bodyPr/>
           <a:lstStyle/>
           <a:p>
+            <a:pPr>
+              <a:defRPr/>
+            </a:pPr>
             <a:fld id="{5BCAD085-E8A6-8845-BD4E-CB4CCA059FC4}" type="datetimeFigureOut">
-              <a:rPr lang="en-US" smtClean="0"/>
+              <a:rPr lang="en-US"/>
               <a:t>1/27/13</a:t>
             </a:fld>
             <a:endParaRPr lang="en-US"/>
@@ -2832,7 +3098,7 @@
       </p:sp>
       <p:sp>
         <p:nvSpPr>
-          <p:cNvPr id="8" name="Footer Placeholder 7"/>
+          <p:cNvPr id="1633469365" name="Footer Placeholder 7"/>
           <p:cNvSpPr>
             <a:spLocks noGrp="1"/>
           </p:cNvSpPr>
@@ -2840,18 +3106,21 @@
             <p:ph type="ftr" sz="quarter" idx="11"/>
           </p:nvPr>
         </p:nvSpPr>
-        <p:spPr/>
+        <p:spPr bwMode="auto"/>
         <p:txBody>
           <a:bodyPr/>
           <a:lstStyle/>
           <a:p>
+            <a:pPr>
+              <a:defRPr/>
+            </a:pPr>
             <a:endParaRPr lang="en-US"/>
           </a:p>
         </p:txBody>
       </p:sp>
       <p:sp>
         <p:nvSpPr>
-          <p:cNvPr id="9" name="Slide Number Placeholder 8"/>
+          <p:cNvPr id="1665541934" name="Slide Number Placeholder 8"/>
           <p:cNvSpPr>
             <a:spLocks noGrp="1"/>
           </p:cNvSpPr>
@@ -2859,13 +3128,16 @@
             <p:ph type="sldNum" sz="quarter" idx="12"/>
           </p:nvPr>
         </p:nvSpPr>
-        <p:spPr/>
+        <p:spPr bwMode="auto"/>
         <p:txBody>
           <a:bodyPr/>
           <a:lstStyle/>
           <a:p>
+            <a:pPr>
+              <a:defRPr/>
+            </a:pPr>
             <a:fld id="{C1FF6DA9-008F-8B48-92A6-B652298478BF}" type="slidenum">
-              <a:rPr lang="en-US" smtClean="0"/>
+              <a:rPr lang="en-US"/>
               <a:t>‹#›</a:t>
             </a:fld>
             <a:endParaRPr lang="en-US"/>
@@ -2873,11 +3145,6 @@
         </p:txBody>
       </p:sp>
     </p:spTree>
-    <p:extLst>
-      <p:ext uri="{BB962C8B-B14F-4D97-AF65-F5344CB8AC3E}">
-        <p14:creationId xmlns:p14="http://schemas.microsoft.com/office/powerpoint/2010/main" val="990158736"/>
-      </p:ext>
-    </p:extLst>
   </p:cSld>
   <p:clrMapOvr>
     <a:masterClrMapping/>
@@ -2886,7 +3153,7 @@
 </file>
 
 <file path=ppt/slideLayouts/slideLayout6.xml><?xml version="1.0" encoding="utf-8"?>
-<p:sldLayout xmlns:a="http://schemas.openxmlformats.org/drawingml/2006/main" xmlns:r="http://schemas.openxmlformats.org/officeDocument/2006/relationships" xmlns:p="http://schemas.openxmlformats.org/presentationml/2006/main" type="titleOnly" preserve="1">
+<p:sldLayout xmlns:a="http://schemas.openxmlformats.org/drawingml/2006/main" xmlns:r="http://schemas.openxmlformats.org/officeDocument/2006/relationships" xmlns:p="http://schemas.openxmlformats.org/presentationml/2006/main" xmlns:m="http://schemas.openxmlformats.org/officeDocument/2006/math" xmlns:w="http://schemas.openxmlformats.org/wordprocessingml/2006/main" matchingName="" preserve="1" showMasterPhAnim="0" showMasterSp="1" type="titleOnly" userDrawn="1">
   <p:cSld name="Title Only">
     <p:spTree>
       <p:nvGrpSpPr>
@@ -2894,7 +3161,7 @@
         <p:cNvGrpSpPr/>
         <p:nvPr/>
       </p:nvGrpSpPr>
-      <p:grpSpPr>
+      <p:grpSpPr bwMode="auto">
         <a:xfrm>
           <a:off x="0" y="0"/>
           <a:ext cx="0" cy="0"/>
@@ -2904,7 +3171,7 @@
       </p:grpSpPr>
       <p:sp>
         <p:nvSpPr>
-          <p:cNvPr id="2" name="Title 1"/>
+          <p:cNvPr id="1911248773" name="Title 1"/>
           <p:cNvSpPr>
             <a:spLocks noGrp="1"/>
           </p:cNvSpPr>
@@ -2912,13 +3179,16 @@
             <p:ph type="title"/>
           </p:nvPr>
         </p:nvSpPr>
-        <p:spPr/>
+        <p:spPr bwMode="auto"/>
         <p:txBody>
           <a:bodyPr/>
           <a:lstStyle/>
           <a:p>
-            <a:r>
-              <a:rPr lang="en-US" smtClean="0"/>
+            <a:pPr>
+              <a:defRPr/>
+            </a:pPr>
+            <a:r>
+              <a:rPr lang="en-US"/>
               <a:t>Click to edit Master title style</a:t>
             </a:r>
             <a:endParaRPr lang="en-US"/>
@@ -2927,7 +3197,7 @@
       </p:sp>
       <p:sp>
         <p:nvSpPr>
-          <p:cNvPr id="3" name="Date Placeholder 2"/>
+          <p:cNvPr id="1925712298" name="Date Placeholder 2"/>
           <p:cNvSpPr>
             <a:spLocks noGrp="1"/>
           </p:cNvSpPr>
@@ -2935,13 +3205,16 @@
             <p:ph type="dt" sz="half" idx="10"/>
           </p:nvPr>
         </p:nvSpPr>
-        <p:spPr/>
+        <p:spPr bwMode="auto"/>
         <p:txBody>
           <a:bodyPr/>
           <a:lstStyle/>
           <a:p>
+            <a:pPr>
+              <a:defRPr/>
+            </a:pPr>
             <a:fld id="{5BCAD085-E8A6-8845-BD4E-CB4CCA059FC4}" type="datetimeFigureOut">
-              <a:rPr lang="en-US" smtClean="0"/>
+              <a:rPr lang="en-US"/>
               <a:t>1/27/13</a:t>
             </a:fld>
             <a:endParaRPr lang="en-US"/>
@@ -2950,7 +3223,7 @@
       </p:sp>
       <p:sp>
         <p:nvSpPr>
-          <p:cNvPr id="4" name="Footer Placeholder 3"/>
+          <p:cNvPr id="880332361" name="Footer Placeholder 3"/>
           <p:cNvSpPr>
             <a:spLocks noGrp="1"/>
           </p:cNvSpPr>
@@ -2958,18 +3231,21 @@
             <p:ph type="ftr" sz="quarter" idx="11"/>
           </p:nvPr>
         </p:nvSpPr>
-        <p:spPr/>
+        <p:spPr bwMode="auto"/>
         <p:txBody>
           <a:bodyPr/>
           <a:lstStyle/>
           <a:p>
+            <a:pPr>
+              <a:defRPr/>
+            </a:pPr>
             <a:endParaRPr lang="en-US"/>
           </a:p>
         </p:txBody>
       </p:sp>
       <p:sp>
         <p:nvSpPr>
-          <p:cNvPr id="5" name="Slide Number Placeholder 4"/>
+          <p:cNvPr id="1078683764" name="Slide Number Placeholder 4"/>
           <p:cNvSpPr>
             <a:spLocks noGrp="1"/>
           </p:cNvSpPr>
@@ -2977,13 +3253,16 @@
             <p:ph type="sldNum" sz="quarter" idx="12"/>
           </p:nvPr>
         </p:nvSpPr>
-        <p:spPr/>
+        <p:spPr bwMode="auto"/>
         <p:txBody>
           <a:bodyPr/>
           <a:lstStyle/>
           <a:p>
+            <a:pPr>
+              <a:defRPr/>
+            </a:pPr>
             <a:fld id="{C1FF6DA9-008F-8B48-92A6-B652298478BF}" type="slidenum">
-              <a:rPr lang="en-US" smtClean="0"/>
+              <a:rPr lang="en-US"/>
               <a:t>‹#›</a:t>
             </a:fld>
             <a:endParaRPr lang="en-US"/>
@@ -2991,11 +3270,6 @@
         </p:txBody>
       </p:sp>
     </p:spTree>
-    <p:extLst>
-      <p:ext uri="{BB962C8B-B14F-4D97-AF65-F5344CB8AC3E}">
-        <p14:creationId xmlns:p14="http://schemas.microsoft.com/office/powerpoint/2010/main" val="727027711"/>
-      </p:ext>
-    </p:extLst>
   </p:cSld>
   <p:clrMapOvr>
     <a:masterClrMapping/>
@@ -3004,7 +3278,7 @@
 </file>
 
 <file path=ppt/slideLayouts/slideLayout7.xml><?xml version="1.0" encoding="utf-8"?>
-<p:sldLayout xmlns:a="http://schemas.openxmlformats.org/drawingml/2006/main" xmlns:r="http://schemas.openxmlformats.org/officeDocument/2006/relationships" xmlns:p="http://schemas.openxmlformats.org/presentationml/2006/main" type="blank" preserve="1">
+<p:sldLayout xmlns:a="http://schemas.openxmlformats.org/drawingml/2006/main" xmlns:r="http://schemas.openxmlformats.org/officeDocument/2006/relationships" xmlns:p="http://schemas.openxmlformats.org/presentationml/2006/main" xmlns:m="http://schemas.openxmlformats.org/officeDocument/2006/math" xmlns:w="http://schemas.openxmlformats.org/wordprocessingml/2006/main" matchingName="" preserve="1" showMasterPhAnim="0" showMasterSp="1" type="blank" userDrawn="1">
   <p:cSld name="Blank">
     <p:spTree>
       <p:nvGrpSpPr>
@@ -3012,7 +3286,7 @@
         <p:cNvGrpSpPr/>
         <p:nvPr/>
       </p:nvGrpSpPr>
-      <p:grpSpPr>
+      <p:grpSpPr bwMode="auto">
         <a:xfrm>
           <a:off x="0" y="0"/>
           <a:ext cx="0" cy="0"/>
@@ -3022,7 +3296,7 @@
       </p:grpSpPr>
       <p:sp>
         <p:nvSpPr>
-          <p:cNvPr id="2" name="Date Placeholder 1"/>
+          <p:cNvPr id="1291107699" name="Date Placeholder 1"/>
           <p:cNvSpPr>
             <a:spLocks noGrp="1"/>
           </p:cNvSpPr>
@@ -3030,13 +3304,16 @@
             <p:ph type="dt" sz="half" idx="10"/>
           </p:nvPr>
         </p:nvSpPr>
-        <p:spPr/>
+        <p:spPr bwMode="auto"/>
         <p:txBody>
           <a:bodyPr/>
           <a:lstStyle/>
           <a:p>
+            <a:pPr>
+              <a:defRPr/>
+            </a:pPr>
             <a:fld id="{5BCAD085-E8A6-8845-BD4E-CB4CCA059FC4}" type="datetimeFigureOut">
-              <a:rPr lang="en-US" smtClean="0"/>
+              <a:rPr lang="en-US"/>
               <a:t>1/27/13</a:t>
             </a:fld>
             <a:endParaRPr lang="en-US"/>
@@ -3045,7 +3322,7 @@
       </p:sp>
       <p:sp>
         <p:nvSpPr>
-          <p:cNvPr id="3" name="Footer Placeholder 2"/>
+          <p:cNvPr id="1960510957" name="Footer Placeholder 2"/>
           <p:cNvSpPr>
             <a:spLocks noGrp="1"/>
           </p:cNvSpPr>
@@ -3053,18 +3330,21 @@
             <p:ph type="ftr" sz="quarter" idx="11"/>
           </p:nvPr>
         </p:nvSpPr>
-        <p:spPr/>
+        <p:spPr bwMode="auto"/>
         <p:txBody>
           <a:bodyPr/>
           <a:lstStyle/>
           <a:p>
+            <a:pPr>
+              <a:defRPr/>
+            </a:pPr>
             <a:endParaRPr lang="en-US"/>
           </a:p>
         </p:txBody>
       </p:sp>
       <p:sp>
         <p:nvSpPr>
-          <p:cNvPr id="4" name="Slide Number Placeholder 3"/>
+          <p:cNvPr id="1024207041" name="Slide Number Placeholder 3"/>
           <p:cNvSpPr>
             <a:spLocks noGrp="1"/>
           </p:cNvSpPr>
@@ -3072,13 +3352,16 @@
             <p:ph type="sldNum" sz="quarter" idx="12"/>
           </p:nvPr>
         </p:nvSpPr>
-        <p:spPr/>
+        <p:spPr bwMode="auto"/>
         <p:txBody>
           <a:bodyPr/>
           <a:lstStyle/>
           <a:p>
+            <a:pPr>
+              <a:defRPr/>
+            </a:pPr>
             <a:fld id="{C1FF6DA9-008F-8B48-92A6-B652298478BF}" type="slidenum">
-              <a:rPr lang="en-US" smtClean="0"/>
+              <a:rPr lang="en-US"/>
               <a:t>‹#›</a:t>
             </a:fld>
             <a:endParaRPr lang="en-US"/>
@@ -3086,11 +3369,6 @@
         </p:txBody>
       </p:sp>
     </p:spTree>
-    <p:extLst>
-      <p:ext uri="{BB962C8B-B14F-4D97-AF65-F5344CB8AC3E}">
-        <p14:creationId xmlns:p14="http://schemas.microsoft.com/office/powerpoint/2010/main" val="1212999818"/>
-      </p:ext>
-    </p:extLst>
   </p:cSld>
   <p:clrMapOvr>
     <a:masterClrMapping/>
@@ -3099,7 +3377,7 @@
 </file>
 
 <file path=ppt/slideLayouts/slideLayout8.xml><?xml version="1.0" encoding="utf-8"?>
-<p:sldLayout xmlns:a="http://schemas.openxmlformats.org/drawingml/2006/main" xmlns:r="http://schemas.openxmlformats.org/officeDocument/2006/relationships" xmlns:p="http://schemas.openxmlformats.org/presentationml/2006/main" type="objTx" preserve="1">
+<p:sldLayout xmlns:a="http://schemas.openxmlformats.org/drawingml/2006/main" xmlns:r="http://schemas.openxmlformats.org/officeDocument/2006/relationships" xmlns:p="http://schemas.openxmlformats.org/presentationml/2006/main" xmlns:m="http://schemas.openxmlformats.org/officeDocument/2006/math" xmlns:w="http://schemas.openxmlformats.org/wordprocessingml/2006/main" matchingName="" preserve="1" showMasterPhAnim="0" showMasterSp="1" type="objTx" userDrawn="1">
   <p:cSld name="Content with Caption">
     <p:spTree>
       <p:nvGrpSpPr>
@@ -3107,7 +3385,7 @@
         <p:cNvGrpSpPr/>
         <p:nvPr/>
       </p:nvGrpSpPr>
-      <p:grpSpPr>
+      <p:grpSpPr bwMode="auto">
         <a:xfrm>
           <a:off x="0" y="0"/>
           <a:ext cx="0" cy="0"/>
@@ -3117,7 +3395,7 @@
       </p:grpSpPr>
       <p:sp>
         <p:nvSpPr>
-          <p:cNvPr id="2" name="Title 1"/>
+          <p:cNvPr id="39782313" name="Title 1"/>
           <p:cNvSpPr>
             <a:spLocks noGrp="1"/>
           </p:cNvSpPr>
@@ -3125,7 +3403,7 @@
             <p:ph type="title"/>
           </p:nvPr>
         </p:nvSpPr>
-        <p:spPr>
+        <p:spPr bwMode="auto">
           <a:xfrm>
             <a:off x="457200" y="273050"/>
             <a:ext cx="3008313" cy="1162050"/>
@@ -3139,8 +3417,11 @@
             </a:lvl1pPr>
           </a:lstStyle>
           <a:p>
-            <a:r>
-              <a:rPr lang="en-US" smtClean="0"/>
+            <a:pPr>
+              <a:defRPr/>
+            </a:pPr>
+            <a:r>
+              <a:rPr lang="en-US"/>
               <a:t>Click to edit Master title style</a:t>
             </a:r>
             <a:endParaRPr lang="en-US"/>
@@ -3149,7 +3430,7 @@
       </p:sp>
       <p:sp>
         <p:nvSpPr>
-          <p:cNvPr id="3" name="Content Placeholder 2"/>
+          <p:cNvPr id="208808303" name="Content Placeholder 2"/>
           <p:cNvSpPr>
             <a:spLocks noGrp="1"/>
           </p:cNvSpPr>
@@ -3157,7 +3438,7 @@
             <p:ph idx="1"/>
           </p:nvPr>
         </p:nvSpPr>
-        <p:spPr>
+        <p:spPr bwMode="auto">
           <a:xfrm>
             <a:off x="3575050" y="273050"/>
             <a:ext cx="5111750" cy="5853113"/>
@@ -3195,37 +3476,51 @@
             </a:lvl9pPr>
           </a:lstStyle>
           <a:p>
-            <a:pPr lvl="0"/>
-            <a:r>
-              <a:rPr lang="en-US" smtClean="0"/>
+            <a:pPr lvl="0">
+              <a:defRPr/>
+            </a:pPr>
+            <a:r>
+              <a:rPr lang="en-US"/>
               <a:t>Click to edit Master text styles</a:t>
             </a:r>
-          </a:p>
-          <a:p>
-            <a:pPr lvl="1"/>
-            <a:r>
-              <a:rPr lang="en-US" smtClean="0"/>
+            <a:endParaRPr/>
+          </a:p>
+          <a:p>
+            <a:pPr lvl="1">
+              <a:defRPr/>
+            </a:pPr>
+            <a:r>
+              <a:rPr lang="en-US"/>
               <a:t>Second level</a:t>
             </a:r>
-          </a:p>
-          <a:p>
-            <a:pPr lvl="2"/>
-            <a:r>
-              <a:rPr lang="en-US" smtClean="0"/>
+            <a:endParaRPr/>
+          </a:p>
+          <a:p>
+            <a:pPr lvl="2">
+              <a:defRPr/>
+            </a:pPr>
+            <a:r>
+              <a:rPr lang="en-US"/>
               <a:t>Third level</a:t>
             </a:r>
-          </a:p>
-          <a:p>
-            <a:pPr lvl="3"/>
-            <a:r>
-              <a:rPr lang="en-US" smtClean="0"/>
+            <a:endParaRPr/>
+          </a:p>
+          <a:p>
+            <a:pPr lvl="3">
+              <a:defRPr/>
+            </a:pPr>
+            <a:r>
+              <a:rPr lang="en-US"/>
               <a:t>Fourth level</a:t>
             </a:r>
-          </a:p>
-          <a:p>
-            <a:pPr lvl="4"/>
-            <a:r>
-              <a:rPr lang="en-US" smtClean="0"/>
+            <a:endParaRPr/>
+          </a:p>
+          <a:p>
+            <a:pPr lvl="4">
+              <a:defRPr/>
+            </a:pPr>
+            <a:r>
+              <a:rPr lang="en-US"/>
               <a:t>Fifth level</a:t>
             </a:r>
             <a:endParaRPr lang="en-US"/>
@@ -3234,7 +3529,7 @@
       </p:sp>
       <p:sp>
         <p:nvSpPr>
-          <p:cNvPr id="4" name="Text Placeholder 3"/>
+          <p:cNvPr id="785885578" name="Text Placeholder 3"/>
           <p:cNvSpPr>
             <a:spLocks noGrp="1"/>
           </p:cNvSpPr>
@@ -3242,7 +3537,7 @@
             <p:ph type="body" sz="half" idx="2"/>
           </p:nvPr>
         </p:nvSpPr>
-        <p:spPr>
+        <p:spPr bwMode="auto">
           <a:xfrm>
             <a:off x="457200" y="1435100"/>
             <a:ext cx="3008313" cy="4691063"/>
@@ -3289,17 +3584,20 @@
             </a:lvl9pPr>
           </a:lstStyle>
           <a:p>
-            <a:pPr lvl="0"/>
-            <a:r>
-              <a:rPr lang="en-US" smtClean="0"/>
+            <a:pPr lvl="0">
+              <a:defRPr/>
+            </a:pPr>
+            <a:r>
+              <a:rPr lang="en-US"/>
               <a:t>Click to edit Master text styles</a:t>
             </a:r>
-          </a:p>
-        </p:txBody>
-      </p:sp>
-      <p:sp>
-        <p:nvSpPr>
-          <p:cNvPr id="5" name="Date Placeholder 4"/>
+            <a:endParaRPr/>
+          </a:p>
+        </p:txBody>
+      </p:sp>
+      <p:sp>
+        <p:nvSpPr>
+          <p:cNvPr id="318354821" name="Date Placeholder 4"/>
           <p:cNvSpPr>
             <a:spLocks noGrp="1"/>
           </p:cNvSpPr>
@@ -3307,13 +3605,16 @@
             <p:ph type="dt" sz="half" idx="10"/>
           </p:nvPr>
         </p:nvSpPr>
-        <p:spPr/>
+        <p:spPr bwMode="auto"/>
         <p:txBody>
           <a:bodyPr/>
           <a:lstStyle/>
           <a:p>
+            <a:pPr>
+              <a:defRPr/>
+            </a:pPr>
             <a:fld id="{5BCAD085-E8A6-8845-BD4E-CB4CCA059FC4}" type="datetimeFigureOut">
-              <a:rPr lang="en-US" smtClean="0"/>
+              <a:rPr lang="en-US"/>
               <a:t>1/27/13</a:t>
             </a:fld>
             <a:endParaRPr lang="en-US"/>
@@ -3322,7 +3623,7 @@
       </p:sp>
       <p:sp>
         <p:nvSpPr>
-          <p:cNvPr id="6" name="Footer Placeholder 5"/>
+          <p:cNvPr id="1773837701" name="Footer Placeholder 5"/>
           <p:cNvSpPr>
             <a:spLocks noGrp="1"/>
           </p:cNvSpPr>
@@ -3330,18 +3631,21 @@
             <p:ph type="ftr" sz="quarter" idx="11"/>
           </p:nvPr>
         </p:nvSpPr>
-        <p:spPr/>
+        <p:spPr bwMode="auto"/>
         <p:txBody>
           <a:bodyPr/>
           <a:lstStyle/>
           <a:p>
+            <a:pPr>
+              <a:defRPr/>
+            </a:pPr>
             <a:endParaRPr lang="en-US"/>
           </a:p>
         </p:txBody>
       </p:sp>
       <p:sp>
         <p:nvSpPr>
-          <p:cNvPr id="7" name="Slide Number Placeholder 6"/>
+          <p:cNvPr id="629621718" name="Slide Number Placeholder 6"/>
           <p:cNvSpPr>
             <a:spLocks noGrp="1"/>
           </p:cNvSpPr>
@@ -3349,13 +3653,16 @@
             <p:ph type="sldNum" sz="quarter" idx="12"/>
           </p:nvPr>
         </p:nvSpPr>
-        <p:spPr/>
+        <p:spPr bwMode="auto"/>
         <p:txBody>
           <a:bodyPr/>
           <a:lstStyle/>
           <a:p>
+            <a:pPr>
+              <a:defRPr/>
+            </a:pPr>
             <a:fld id="{C1FF6DA9-008F-8B48-92A6-B652298478BF}" type="slidenum">
-              <a:rPr lang="en-US" smtClean="0"/>
+              <a:rPr lang="en-US"/>
               <a:t>‹#›</a:t>
             </a:fld>
             <a:endParaRPr lang="en-US"/>
@@ -3363,11 +3670,6 @@
         </p:txBody>
       </p:sp>
     </p:spTree>
-    <p:extLst>
-      <p:ext uri="{BB962C8B-B14F-4D97-AF65-F5344CB8AC3E}">
-        <p14:creationId xmlns:p14="http://schemas.microsoft.com/office/powerpoint/2010/main" val="1840726560"/>
-      </p:ext>
-    </p:extLst>
   </p:cSld>
   <p:clrMapOvr>
     <a:masterClrMapping/>
@@ -3376,7 +3678,7 @@
 </file>
 
 <file path=ppt/slideLayouts/slideLayout9.xml><?xml version="1.0" encoding="utf-8"?>
-<p:sldLayout xmlns:a="http://schemas.openxmlformats.org/drawingml/2006/main" xmlns:r="http://schemas.openxmlformats.org/officeDocument/2006/relationships" xmlns:p="http://schemas.openxmlformats.org/presentationml/2006/main" type="picTx" preserve="1">
+<p:sldLayout xmlns:a="http://schemas.openxmlformats.org/drawingml/2006/main" xmlns:r="http://schemas.openxmlformats.org/officeDocument/2006/relationships" xmlns:p="http://schemas.openxmlformats.org/presentationml/2006/main" xmlns:m="http://schemas.openxmlformats.org/officeDocument/2006/math" xmlns:w="http://schemas.openxmlformats.org/wordprocessingml/2006/main" matchingName="" preserve="1" showMasterPhAnim="0" showMasterSp="1" type="picTx" userDrawn="1">
   <p:cSld name="Picture with Caption">
     <p:spTree>
       <p:nvGrpSpPr>
@@ -3384,7 +3686,7 @@
         <p:cNvGrpSpPr/>
         <p:nvPr/>
       </p:nvGrpSpPr>
-      <p:grpSpPr>
+      <p:grpSpPr bwMode="auto">
         <a:xfrm>
           <a:off x="0" y="0"/>
           <a:ext cx="0" cy="0"/>
@@ -3394,7 +3696,7 @@
       </p:grpSpPr>
       <p:sp>
         <p:nvSpPr>
-          <p:cNvPr id="2" name="Title 1"/>
+          <p:cNvPr id="1227022674" name="Title 1"/>
           <p:cNvSpPr>
             <a:spLocks noGrp="1"/>
           </p:cNvSpPr>
@@ -3402,7 +3704,7 @@
             <p:ph type="title"/>
           </p:nvPr>
         </p:nvSpPr>
-        <p:spPr>
+        <p:spPr bwMode="auto">
           <a:xfrm>
             <a:off x="1792288" y="4800600"/>
             <a:ext cx="5486400" cy="566738"/>
@@ -3416,8 +3718,11 @@
             </a:lvl1pPr>
           </a:lstStyle>
           <a:p>
-            <a:r>
-              <a:rPr lang="en-US" smtClean="0"/>
+            <a:pPr>
+              <a:defRPr/>
+            </a:pPr>
+            <a:r>
+              <a:rPr lang="en-US"/>
               <a:t>Click to edit Master title style</a:t>
             </a:r>
             <a:endParaRPr lang="en-US"/>
@@ -3426,7 +3731,7 @@
       </p:sp>
       <p:sp>
         <p:nvSpPr>
-          <p:cNvPr id="3" name="Picture Placeholder 2"/>
+          <p:cNvPr id="41641946" name="Picture Placeholder 2"/>
           <p:cNvSpPr>
             <a:spLocks noGrp="1"/>
           </p:cNvSpPr>
@@ -3434,7 +3739,7 @@
             <p:ph type="pic" idx="1"/>
           </p:nvPr>
         </p:nvSpPr>
-        <p:spPr>
+        <p:spPr bwMode="auto">
           <a:xfrm>
             <a:off x="1792288" y="612775"/>
             <a:ext cx="5486400" cy="4114800"/>
@@ -3481,13 +3786,16 @@
             </a:lvl9pPr>
           </a:lstStyle>
           <a:p>
+            <a:pPr>
+              <a:defRPr/>
+            </a:pPr>
             <a:endParaRPr lang="en-US"/>
           </a:p>
         </p:txBody>
       </p:sp>
       <p:sp>
         <p:nvSpPr>
-          <p:cNvPr id="4" name="Text Placeholder 3"/>
+          <p:cNvPr id="885838358" name="Text Placeholder 3"/>
           <p:cNvSpPr>
             <a:spLocks noGrp="1"/>
           </p:cNvSpPr>
@@ -3495,7 +3803,7 @@
             <p:ph type="body" sz="half" idx="2"/>
           </p:nvPr>
         </p:nvSpPr>
-        <p:spPr>
+        <p:spPr bwMode="auto">
           <a:xfrm>
             <a:off x="1792288" y="5367338"/>
             <a:ext cx="5486400" cy="804862"/>
@@ -3542,17 +3850,20 @@
             </a:lvl9pPr>
           </a:lstStyle>
           <a:p>
-            <a:pPr lvl="0"/>
-            <a:r>
-              <a:rPr lang="en-US" smtClean="0"/>
+            <a:pPr lvl="0">
+              <a:defRPr/>
+            </a:pPr>
+            <a:r>
+              <a:rPr lang="en-US"/>
               <a:t>Click to edit Master text styles</a:t>
             </a:r>
-          </a:p>
-        </p:txBody>
-      </p:sp>
-      <p:sp>
-        <p:nvSpPr>
-          <p:cNvPr id="5" name="Date Placeholder 4"/>
+            <a:endParaRPr/>
+          </a:p>
+        </p:txBody>
+      </p:sp>
+      <p:sp>
+        <p:nvSpPr>
+          <p:cNvPr id="1842276150" name="Date Placeholder 4"/>
           <p:cNvSpPr>
             <a:spLocks noGrp="1"/>
           </p:cNvSpPr>
@@ -3560,13 +3871,16 @@
             <p:ph type="dt" sz="half" idx="10"/>
           </p:nvPr>
         </p:nvSpPr>
-        <p:spPr/>
+        <p:spPr bwMode="auto"/>
         <p:txBody>
           <a:bodyPr/>
           <a:lstStyle/>
           <a:p>
+            <a:pPr>
+              <a:defRPr/>
+            </a:pPr>
             <a:fld id="{5BCAD085-E8A6-8845-BD4E-CB4CCA059FC4}" type="datetimeFigureOut">
-              <a:rPr lang="en-US" smtClean="0"/>
+              <a:rPr lang="en-US"/>
               <a:t>1/27/13</a:t>
             </a:fld>
             <a:endParaRPr lang="en-US"/>
@@ -3575,7 +3889,7 @@
       </p:sp>
       <p:sp>
         <p:nvSpPr>
-          <p:cNvPr id="6" name="Footer Placeholder 5"/>
+          <p:cNvPr id="1123570350" name="Footer Placeholder 5"/>
           <p:cNvSpPr>
             <a:spLocks noGrp="1"/>
           </p:cNvSpPr>
@@ -3583,18 +3897,21 @@
             <p:ph type="ftr" sz="quarter" idx="11"/>
           </p:nvPr>
         </p:nvSpPr>
-        <p:spPr/>
+        <p:spPr bwMode="auto"/>
         <p:txBody>
           <a:bodyPr/>
           <a:lstStyle/>
           <a:p>
+            <a:pPr>
+              <a:defRPr/>
+            </a:pPr>
             <a:endParaRPr lang="en-US"/>
           </a:p>
         </p:txBody>
       </p:sp>
       <p:sp>
         <p:nvSpPr>
-          <p:cNvPr id="7" name="Slide Number Placeholder 6"/>
+          <p:cNvPr id="2069102275" name="Slide Number Placeholder 6"/>
           <p:cNvSpPr>
             <a:spLocks noGrp="1"/>
           </p:cNvSpPr>
@@ -3602,13 +3919,16 @@
             <p:ph type="sldNum" sz="quarter" idx="12"/>
           </p:nvPr>
         </p:nvSpPr>
-        <p:spPr/>
+        <p:spPr bwMode="auto"/>
         <p:txBody>
           <a:bodyPr/>
           <a:lstStyle/>
           <a:p>
+            <a:pPr>
+              <a:defRPr/>
+            </a:pPr>
             <a:fld id="{C1FF6DA9-008F-8B48-92A6-B652298478BF}" type="slidenum">
-              <a:rPr lang="en-US" smtClean="0"/>
+              <a:rPr lang="en-US"/>
               <a:t>‹#›</a:t>
             </a:fld>
             <a:endParaRPr lang="en-US"/>
@@ -3616,11 +3936,6 @@
         </p:txBody>
       </p:sp>
     </p:spTree>
-    <p:extLst>
-      <p:ext uri="{BB962C8B-B14F-4D97-AF65-F5344CB8AC3E}">
-        <p14:creationId xmlns:p14="http://schemas.microsoft.com/office/powerpoint/2010/main" val="3889236939"/>
-      </p:ext>
-    </p:extLst>
   </p:cSld>
   <p:clrMapOvr>
     <a:masterClrMapping/>
@@ -3629,8 +3944,8 @@
 </file>
 
 <file path=ppt/slideMasters/slideMaster1.xml><?xml version="1.0" encoding="utf-8"?>
-<p:sldMaster xmlns:a="http://schemas.openxmlformats.org/drawingml/2006/main" xmlns:r="http://schemas.openxmlformats.org/officeDocument/2006/relationships" xmlns:p="http://schemas.openxmlformats.org/presentationml/2006/main">
-  <p:cSld>
+<p:sldMaster xmlns:a="http://schemas.openxmlformats.org/drawingml/2006/main" xmlns:r="http://schemas.openxmlformats.org/officeDocument/2006/relationships" xmlns:p="http://schemas.openxmlformats.org/presentationml/2006/main" xmlns:m="http://schemas.openxmlformats.org/officeDocument/2006/math" xmlns:w="http://schemas.openxmlformats.org/wordprocessingml/2006/main" preserve="0">
+  <p:cSld name="">
     <p:bg>
       <p:bgRef idx="1001">
         <a:schemeClr val="bg1"/>
@@ -3642,7 +3957,7 @@
         <p:cNvGrpSpPr/>
         <p:nvPr/>
       </p:nvGrpSpPr>
-      <p:grpSpPr>
+      <p:grpSpPr bwMode="auto">
         <a:xfrm>
           <a:off x="0" y="0"/>
           <a:ext cx="0" cy="0"/>
@@ -3652,7 +3967,7 @@
       </p:grpSpPr>
       <p:sp>
         <p:nvSpPr>
-          <p:cNvPr id="2" name="Title Placeholder 1"/>
+          <p:cNvPr id="592287837" name="Title Placeholder 1"/>
           <p:cNvSpPr>
             <a:spLocks noGrp="1"/>
           </p:cNvSpPr>
@@ -3660,7 +3975,7 @@
             <p:ph type="title"/>
           </p:nvPr>
         </p:nvSpPr>
-        <p:spPr>
+        <p:spPr bwMode="auto">
           <a:xfrm>
             <a:off x="457200" y="274638"/>
             <a:ext cx="8229600" cy="1143000"/>
@@ -3675,8 +3990,11 @@
           </a:bodyPr>
           <a:lstStyle/>
           <a:p>
-            <a:r>
-              <a:rPr lang="en-US" smtClean="0"/>
+            <a:pPr>
+              <a:defRPr/>
+            </a:pPr>
+            <a:r>
+              <a:rPr lang="en-US"/>
               <a:t>Click to edit Master title style</a:t>
             </a:r>
             <a:endParaRPr lang="en-US"/>
@@ -3685,7 +4003,7 @@
       </p:sp>
       <p:sp>
         <p:nvSpPr>
-          <p:cNvPr id="3" name="Text Placeholder 2"/>
+          <p:cNvPr id="1507777151" name="Text Placeholder 2"/>
           <p:cNvSpPr>
             <a:spLocks noGrp="1"/>
           </p:cNvSpPr>
@@ -3693,7 +4011,7 @@
             <p:ph type="body" idx="1"/>
           </p:nvPr>
         </p:nvSpPr>
-        <p:spPr>
+        <p:spPr bwMode="auto">
           <a:xfrm>
             <a:off x="457200" y="1600200"/>
             <a:ext cx="8229600" cy="4525963"/>
@@ -3708,37 +4026,51 @@
           </a:bodyPr>
           <a:lstStyle/>
           <a:p>
-            <a:pPr lvl="0"/>
-            <a:r>
-              <a:rPr lang="en-US" smtClean="0"/>
+            <a:pPr lvl="0">
+              <a:defRPr/>
+            </a:pPr>
+            <a:r>
+              <a:rPr lang="en-US"/>
               <a:t>Click to edit Master text styles</a:t>
             </a:r>
-          </a:p>
-          <a:p>
-            <a:pPr lvl="1"/>
-            <a:r>
-              <a:rPr lang="en-US" smtClean="0"/>
+            <a:endParaRPr/>
+          </a:p>
+          <a:p>
+            <a:pPr lvl="1">
+              <a:defRPr/>
+            </a:pPr>
+            <a:r>
+              <a:rPr lang="en-US"/>
               <a:t>Second level</a:t>
             </a:r>
-          </a:p>
-          <a:p>
-            <a:pPr lvl="2"/>
-            <a:r>
-              <a:rPr lang="en-US" smtClean="0"/>
+            <a:endParaRPr/>
+          </a:p>
+          <a:p>
+            <a:pPr lvl="2">
+              <a:defRPr/>
+            </a:pPr>
+            <a:r>
+              <a:rPr lang="en-US"/>
               <a:t>Third level</a:t>
             </a:r>
-          </a:p>
-          <a:p>
-            <a:pPr lvl="3"/>
-            <a:r>
-              <a:rPr lang="en-US" smtClean="0"/>
+            <a:endParaRPr/>
+          </a:p>
+          <a:p>
+            <a:pPr lvl="3">
+              <a:defRPr/>
+            </a:pPr>
+            <a:r>
+              <a:rPr lang="en-US"/>
               <a:t>Fourth level</a:t>
             </a:r>
-          </a:p>
-          <a:p>
-            <a:pPr lvl="4"/>
-            <a:r>
-              <a:rPr lang="en-US" smtClean="0"/>
+            <a:endParaRPr/>
+          </a:p>
+          <a:p>
+            <a:pPr lvl="4">
+              <a:defRPr/>
+            </a:pPr>
+            <a:r>
+              <a:rPr lang="en-US"/>
               <a:t>Fifth level</a:t>
             </a:r>
             <a:endParaRPr lang="en-US"/>
@@ -3747,7 +4079,7 @@
       </p:sp>
       <p:sp>
         <p:nvSpPr>
-          <p:cNvPr id="4" name="Date Placeholder 3"/>
+          <p:cNvPr id="78326534" name="Date Placeholder 3"/>
           <p:cNvSpPr>
             <a:spLocks noGrp="1"/>
           </p:cNvSpPr>
@@ -3755,7 +4087,7 @@
             <p:ph type="dt" sz="half" idx="2"/>
           </p:nvPr>
         </p:nvSpPr>
-        <p:spPr>
+        <p:spPr bwMode="auto">
           <a:xfrm>
             <a:off x="457200" y="6356350"/>
             <a:ext cx="2133600" cy="365125"/>
@@ -3778,8 +4110,11 @@
             </a:lvl1pPr>
           </a:lstStyle>
           <a:p>
+            <a:pPr>
+              <a:defRPr/>
+            </a:pPr>
             <a:fld id="{5BCAD085-E8A6-8845-BD4E-CB4CCA059FC4}" type="datetimeFigureOut">
-              <a:rPr lang="en-US" smtClean="0"/>
+              <a:rPr lang="en-US"/>
               <a:t>1/27/13</a:t>
             </a:fld>
             <a:endParaRPr lang="en-US"/>
@@ -3788,7 +4123,7 @@
       </p:sp>
       <p:sp>
         <p:nvSpPr>
-          <p:cNvPr id="5" name="Footer Placeholder 4"/>
+          <p:cNvPr id="262407929" name="Footer Placeholder 4"/>
           <p:cNvSpPr>
             <a:spLocks noGrp="1"/>
           </p:cNvSpPr>
@@ -3796,7 +4131,7 @@
             <p:ph type="ftr" sz="quarter" idx="3"/>
           </p:nvPr>
         </p:nvSpPr>
-        <p:spPr>
+        <p:spPr bwMode="auto">
           <a:xfrm>
             <a:off x="3124200" y="6356350"/>
             <a:ext cx="2895600" cy="365125"/>
@@ -3819,13 +4154,16 @@
             </a:lvl1pPr>
           </a:lstStyle>
           <a:p>
+            <a:pPr>
+              <a:defRPr/>
+            </a:pPr>
             <a:endParaRPr lang="en-US"/>
           </a:p>
         </p:txBody>
       </p:sp>
       <p:sp>
         <p:nvSpPr>
-          <p:cNvPr id="6" name="Slide Number Placeholder 5"/>
+          <p:cNvPr id="1850299726" name="Slide Number Placeholder 5"/>
           <p:cNvSpPr>
             <a:spLocks noGrp="1"/>
           </p:cNvSpPr>
@@ -3833,7 +4171,7 @@
             <p:ph type="sldNum" sz="quarter" idx="4"/>
           </p:nvPr>
         </p:nvSpPr>
-        <p:spPr>
+        <p:spPr bwMode="auto">
           <a:xfrm>
             <a:off x="6553200" y="6356350"/>
             <a:ext cx="2133600" cy="365125"/>
@@ -3856,8 +4194,11 @@
             </a:lvl1pPr>
           </a:lstStyle>
           <a:p>
+            <a:pPr>
+              <a:defRPr/>
+            </a:pPr>
             <a:fld id="{C1FF6DA9-008F-8B48-92A6-B652298478BF}" type="slidenum">
-              <a:rPr lang="en-US" smtClean="0"/>
+              <a:rPr lang="en-US"/>
               <a:t>‹#›</a:t>
             </a:fld>
             <a:endParaRPr lang="en-US"/>
@@ -3865,11 +4206,6 @@
         </p:txBody>
       </p:sp>
     </p:spTree>
-    <p:extLst>
-      <p:ext uri="{BB962C8B-B14F-4D97-AF65-F5344CB8AC3E}">
-        <p14:creationId xmlns:p14="http://schemas.microsoft.com/office/powerpoint/2010/main" val="2209977519"/>
-      </p:ext>
-    </p:extLst>
   </p:cSld>
   <p:clrMap bg1="lt1" tx1="dk1" bg2="lt2" tx2="dk2" accent1="accent1" accent2="accent2" accent3="accent3" accent4="accent4" accent5="accent5" accent6="accent6" hlink="hlink" folHlink="folHlink"/>
   <p:sldLayoutIdLst>
@@ -3887,12 +4223,12 @@
   </p:sldLayoutIdLst>
   <p:txStyles>
     <p:titleStyle>
-      <a:lvl1pPr algn="ctr" defTabSz="457200" rtl="0" eaLnBrk="1" latinLnBrk="0" hangingPunct="1">
+      <a:lvl1pPr algn="ctr" defTabSz="457200" rtl="0">
         <a:spcBef>
-          <a:spcPct val="0"/>
+          <a:spcPts val="0"/>
         </a:spcBef>
         <a:buNone/>
-        <a:defRPr sz="4400" kern="1200">
+        <a:defRPr sz="4400">
           <a:solidFill>
             <a:schemeClr val="tx1"/>
           </a:solidFill>
@@ -3903,13 +4239,13 @@
       </a:lvl1pPr>
     </p:titleStyle>
     <p:bodyStyle>
-      <a:lvl1pPr marL="342900" indent="-342900" algn="l" defTabSz="457200" rtl="0" eaLnBrk="1" latinLnBrk="0" hangingPunct="1">
+      <a:lvl1pPr marL="342900" indent="-342900" algn="l" defTabSz="457200" rtl="0">
         <a:spcBef>
-          <a:spcPct val="20000"/>
+          <a:spcPts val="0"/>
         </a:spcBef>
         <a:buFont typeface="Arial"/>
         <a:buChar char="•"/>
-        <a:defRPr sz="3200" kern="1200">
+        <a:defRPr sz="3200">
           <a:solidFill>
             <a:schemeClr val="tx1"/>
           </a:solidFill>
@@ -3918,13 +4254,13 @@
           <a:cs typeface="+mn-cs"/>
         </a:defRPr>
       </a:lvl1pPr>
-      <a:lvl2pPr marL="742950" indent="-285750" algn="l" defTabSz="457200" rtl="0" eaLnBrk="1" latinLnBrk="0" hangingPunct="1">
+      <a:lvl2pPr marL="742950" indent="-285750" algn="l" defTabSz="457200" rtl="0">
         <a:spcBef>
-          <a:spcPct val="20000"/>
+          <a:spcPts val="0"/>
         </a:spcBef>
         <a:buFont typeface="Arial"/>
         <a:buChar char="–"/>
-        <a:defRPr sz="2800" kern="1200">
+        <a:defRPr sz="2800">
           <a:solidFill>
             <a:schemeClr val="tx1"/>
           </a:solidFill>
@@ -3933,13 +4269,13 @@
           <a:cs typeface="+mn-cs"/>
         </a:defRPr>
       </a:lvl2pPr>
-      <a:lvl3pPr marL="1143000" indent="-228600" algn="l" defTabSz="457200" rtl="0" eaLnBrk="1" latinLnBrk="0" hangingPunct="1">
+      <a:lvl3pPr marL="1143000" indent="-228600" algn="l" defTabSz="457200" rtl="0">
         <a:spcBef>
-          <a:spcPct val="20000"/>
+          <a:spcPts val="0"/>
         </a:spcBef>
         <a:buFont typeface="Arial"/>
         <a:buChar char="•"/>
-        <a:defRPr sz="2400" kern="1200">
+        <a:defRPr sz="2400">
           <a:solidFill>
             <a:schemeClr val="tx1"/>
           </a:solidFill>
@@ -3948,13 +4284,13 @@
           <a:cs typeface="+mn-cs"/>
         </a:defRPr>
       </a:lvl3pPr>
-      <a:lvl4pPr marL="1600200" indent="-228600" algn="l" defTabSz="457200" rtl="0" eaLnBrk="1" latinLnBrk="0" hangingPunct="1">
+      <a:lvl4pPr marL="1600200" indent="-228600" algn="l" defTabSz="457200" rtl="0">
         <a:spcBef>
-          <a:spcPct val="20000"/>
+          <a:spcPts val="0"/>
         </a:spcBef>
         <a:buFont typeface="Arial"/>
         <a:buChar char="–"/>
-        <a:defRPr sz="2000" kern="1200">
+        <a:defRPr sz="2000">
           <a:solidFill>
             <a:schemeClr val="tx1"/>
           </a:solidFill>
@@ -3963,13 +4299,13 @@
           <a:cs typeface="+mn-cs"/>
         </a:defRPr>
       </a:lvl4pPr>
-      <a:lvl5pPr marL="2057400" indent="-228600" algn="l" defTabSz="457200" rtl="0" eaLnBrk="1" latinLnBrk="0" hangingPunct="1">
+      <a:lvl5pPr marL="2057400" indent="-228600" algn="l" defTabSz="457200" rtl="0">
         <a:spcBef>
-          <a:spcPct val="20000"/>
+          <a:spcPts val="0"/>
         </a:spcBef>
         <a:buFont typeface="Arial"/>
         <a:buChar char="»"/>
-        <a:defRPr sz="2000" kern="1200">
+        <a:defRPr sz="2000">
           <a:solidFill>
             <a:schemeClr val="tx1"/>
           </a:solidFill>
@@ -3978,13 +4314,13 @@
           <a:cs typeface="+mn-cs"/>
         </a:defRPr>
       </a:lvl5pPr>
-      <a:lvl6pPr marL="2514600" indent="-228600" algn="l" defTabSz="457200" rtl="0" eaLnBrk="1" latinLnBrk="0" hangingPunct="1">
+      <a:lvl6pPr marL="2514600" indent="-228600" algn="l" defTabSz="457200" rtl="0">
         <a:spcBef>
-          <a:spcPct val="20000"/>
+          <a:spcPts val="0"/>
         </a:spcBef>
         <a:buFont typeface="Arial"/>
         <a:buChar char="•"/>
-        <a:defRPr sz="2000" kern="1200">
+        <a:defRPr sz="2000">
           <a:solidFill>
             <a:schemeClr val="tx1"/>
           </a:solidFill>
@@ -3993,13 +4329,13 @@
           <a:cs typeface="+mn-cs"/>
         </a:defRPr>
       </a:lvl6pPr>
-      <a:lvl7pPr marL="2971800" indent="-228600" algn="l" defTabSz="457200" rtl="0" eaLnBrk="1" latinLnBrk="0" hangingPunct="1">
+      <a:lvl7pPr marL="2971800" indent="-228600" algn="l" defTabSz="457200" rtl="0">
         <a:spcBef>
-          <a:spcPct val="20000"/>
+          <a:spcPts val="0"/>
         </a:spcBef>
         <a:buFont typeface="Arial"/>
         <a:buChar char="•"/>
-        <a:defRPr sz="2000" kern="1200">
+        <a:defRPr sz="2000">
           <a:solidFill>
             <a:schemeClr val="tx1"/>
           </a:solidFill>
@@ -4008,13 +4344,13 @@
           <a:cs typeface="+mn-cs"/>
         </a:defRPr>
       </a:lvl7pPr>
-      <a:lvl8pPr marL="3429000" indent="-228600" algn="l" defTabSz="457200" rtl="0" eaLnBrk="1" latinLnBrk="0" hangingPunct="1">
+      <a:lvl8pPr marL="3429000" indent="-228600" algn="l" defTabSz="457200" rtl="0">
         <a:spcBef>
-          <a:spcPct val="20000"/>
+          <a:spcPts val="0"/>
         </a:spcBef>
         <a:buFont typeface="Arial"/>
         <a:buChar char="•"/>
-        <a:defRPr sz="2000" kern="1200">
+        <a:defRPr sz="2000">
           <a:solidFill>
             <a:schemeClr val="tx1"/>
           </a:solidFill>
@@ -4023,13 +4359,13 @@
           <a:cs typeface="+mn-cs"/>
         </a:defRPr>
       </a:lvl8pPr>
-      <a:lvl9pPr marL="3886200" indent="-228600" algn="l" defTabSz="457200" rtl="0" eaLnBrk="1" latinLnBrk="0" hangingPunct="1">
+      <a:lvl9pPr marL="3886200" indent="-228600" algn="l" defTabSz="457200" rtl="0">
         <a:spcBef>
-          <a:spcPct val="20000"/>
+          <a:spcPts val="0"/>
         </a:spcBef>
         <a:buFont typeface="Arial"/>
         <a:buChar char="•"/>
-        <a:defRPr sz="2000" kern="1200">
+        <a:defRPr sz="2000">
           <a:solidFill>
             <a:schemeClr val="tx1"/>
           </a:solidFill>
@@ -4043,8 +4379,8 @@
       <a:defPPr>
         <a:defRPr lang="en-US"/>
       </a:defPPr>
-      <a:lvl1pPr marL="0" algn="l" defTabSz="457200" rtl="0" eaLnBrk="1" latinLnBrk="0" hangingPunct="1">
-        <a:defRPr sz="1800" kern="1200">
+      <a:lvl1pPr marL="0" algn="l" defTabSz="457200" rtl="0">
+        <a:defRPr sz="1800">
           <a:solidFill>
             <a:schemeClr val="tx1"/>
           </a:solidFill>
@@ -4053,8 +4389,8 @@
           <a:cs typeface="+mn-cs"/>
         </a:defRPr>
       </a:lvl1pPr>
-      <a:lvl2pPr marL="457200" algn="l" defTabSz="457200" rtl="0" eaLnBrk="1" latinLnBrk="0" hangingPunct="1">
-        <a:defRPr sz="1800" kern="1200">
+      <a:lvl2pPr marL="457200" algn="l" defTabSz="457200" rtl="0">
+        <a:defRPr sz="1800">
           <a:solidFill>
             <a:schemeClr val="tx1"/>
           </a:solidFill>
@@ -4063,8 +4399,8 @@
           <a:cs typeface="+mn-cs"/>
         </a:defRPr>
       </a:lvl2pPr>
-      <a:lvl3pPr marL="914400" algn="l" defTabSz="457200" rtl="0" eaLnBrk="1" latinLnBrk="0" hangingPunct="1">
-        <a:defRPr sz="1800" kern="1200">
+      <a:lvl3pPr marL="914400" algn="l" defTabSz="457200" rtl="0">
+        <a:defRPr sz="1800">
           <a:solidFill>
             <a:schemeClr val="tx1"/>
           </a:solidFill>
@@ -4073,8 +4409,8 @@
           <a:cs typeface="+mn-cs"/>
         </a:defRPr>
       </a:lvl3pPr>
-      <a:lvl4pPr marL="1371600" algn="l" defTabSz="457200" rtl="0" eaLnBrk="1" latinLnBrk="0" hangingPunct="1">
-        <a:defRPr sz="1800" kern="1200">
+      <a:lvl4pPr marL="1371600" algn="l" defTabSz="457200" rtl="0">
+        <a:defRPr sz="1800">
           <a:solidFill>
             <a:schemeClr val="tx1"/>
           </a:solidFill>
@@ -4083,8 +4419,8 @@
           <a:cs typeface="+mn-cs"/>
         </a:defRPr>
       </a:lvl4pPr>
-      <a:lvl5pPr marL="1828800" algn="l" defTabSz="457200" rtl="0" eaLnBrk="1" latinLnBrk="0" hangingPunct="1">
-        <a:defRPr sz="1800" kern="1200">
+      <a:lvl5pPr marL="1828800" algn="l" defTabSz="457200" rtl="0">
+        <a:defRPr sz="1800">
           <a:solidFill>
             <a:schemeClr val="tx1"/>
           </a:solidFill>
@@ -4093,8 +4429,8 @@
           <a:cs typeface="+mn-cs"/>
         </a:defRPr>
       </a:lvl5pPr>
-      <a:lvl6pPr marL="2286000" algn="l" defTabSz="457200" rtl="0" eaLnBrk="1" latinLnBrk="0" hangingPunct="1">
-        <a:defRPr sz="1800" kern="1200">
+      <a:lvl6pPr marL="2286000" algn="l" defTabSz="457200" rtl="0">
+        <a:defRPr sz="1800">
           <a:solidFill>
             <a:schemeClr val="tx1"/>
           </a:solidFill>
@@ -4103,8 +4439,8 @@
           <a:cs typeface="+mn-cs"/>
         </a:defRPr>
       </a:lvl6pPr>
-      <a:lvl7pPr marL="2743200" algn="l" defTabSz="457200" rtl="0" eaLnBrk="1" latinLnBrk="0" hangingPunct="1">
-        <a:defRPr sz="1800" kern="1200">
+      <a:lvl7pPr marL="2743200" algn="l" defTabSz="457200" rtl="0">
+        <a:defRPr sz="1800">
           <a:solidFill>
             <a:schemeClr val="tx1"/>
           </a:solidFill>
@@ -4113,8 +4449,8 @@
           <a:cs typeface="+mn-cs"/>
         </a:defRPr>
       </a:lvl7pPr>
-      <a:lvl8pPr marL="3200400" algn="l" defTabSz="457200" rtl="0" eaLnBrk="1" latinLnBrk="0" hangingPunct="1">
-        <a:defRPr sz="1800" kern="1200">
+      <a:lvl8pPr marL="3200400" algn="l" defTabSz="457200" rtl="0">
+        <a:defRPr sz="1800">
           <a:solidFill>
             <a:schemeClr val="tx1"/>
           </a:solidFill>
@@ -4123,8 +4459,8 @@
           <a:cs typeface="+mn-cs"/>
         </a:defRPr>
       </a:lvl8pPr>
-      <a:lvl9pPr marL="3657600" algn="l" defTabSz="457200" rtl="0" eaLnBrk="1" latinLnBrk="0" hangingPunct="1">
-        <a:defRPr sz="1800" kern="1200">
+      <a:lvl9pPr marL="3657600" algn="l" defTabSz="457200" rtl="0">
+        <a:defRPr sz="1800">
           <a:solidFill>
             <a:schemeClr val="tx1"/>
           </a:solidFill>
@@ -4139,22 +4475,29 @@
 </file>
 
 <file path=ppt/slides/slide1.xml><?xml version="1.0" encoding="utf-8"?>
-<p:sld xmlns:a="http://schemas.openxmlformats.org/drawingml/2006/main" xmlns:p="http://schemas.openxmlformats.org/presentationml/2006/main" xmlns:r="http://schemas.openxmlformats.org/officeDocument/2006/relationships">
-  <p:cSld>
+<p:sld xmlns:a="http://schemas.openxmlformats.org/drawingml/2006/main" xmlns:r="http://schemas.openxmlformats.org/officeDocument/2006/relationships" xmlns:p="http://schemas.openxmlformats.org/presentationml/2006/main" xmlns:m="http://schemas.openxmlformats.org/officeDocument/2006/math" xmlns:w="http://schemas.openxmlformats.org/wordprocessingml/2006/main" xmlns:mc="http://schemas.openxmlformats.org/markup-compatibility/2006" showMasterPhAnim="0" showMasterSp="1" show="1">
+  <p:cSld name="">
     <p:spTree>
       <p:nvGrpSpPr>
         <p:cNvPr id="1" name=""/>
         <p:cNvGrpSpPr/>
         <p:nvPr/>
       </p:nvGrpSpPr>
-      <p:grpSpPr/>
-      <p:sp>
-        <p:nvSpPr>
-          <p:cNvPr id="2" name="TextBox 1"/>
+      <p:grpSpPr bwMode="auto">
+        <a:xfrm>
+          <a:off x="0" y="0"/>
+          <a:ext cx="0" cy="0"/>
+          <a:chOff x="0" y="0"/>
+          <a:chExt cx="0" cy="0"/>
+        </a:xfrm>
+      </p:grpSpPr>
+      <p:sp>
+        <p:nvSpPr>
+          <p:cNvPr id="1030041980" name="TextBox 1"/>
           <p:cNvSpPr txBox="1"/>
           <p:nvPr/>
         </p:nvSpPr>
-        <p:spPr>
+        <p:spPr bwMode="auto">
           <a:xfrm>
             <a:off x="548640" y="1463040"/>
             <a:ext cx="11064240" cy="1280160"/>
@@ -4179,18 +4522,20 @@
               </a:defRPr>
             </a:pPr>
             <a:r>
+              <a:rPr/>
               <a:t>CSE 360: Networking Experiments Overview</a:t>
             </a:r>
-          </a:p>
-        </p:txBody>
-      </p:sp>
-      <p:sp>
-        <p:nvSpPr>
-          <p:cNvPr id="3" name="TextBox 2"/>
+            <a:endParaRPr/>
+          </a:p>
+        </p:txBody>
+      </p:sp>
+      <p:sp>
+        <p:nvSpPr>
+          <p:cNvPr id="1859778029" name="TextBox 2"/>
           <p:cNvSpPr txBox="1"/>
           <p:nvPr/>
         </p:nvSpPr>
-        <p:spPr>
+        <p:spPr bwMode="auto">
           <a:xfrm>
             <a:off x="548640" y="2834640"/>
             <a:ext cx="11064240" cy="2286000"/>
@@ -4218,8 +4563,10 @@
               </a:defRPr>
             </a:pPr>
             <a:r>
+              <a:rPr/>
               <a:t>•  Short walkthrough of the labs in slides 2, 4, 5, 6 and 7.</a:t>
             </a:r>
+            <a:endParaRPr/>
           </a:p>
           <a:p>
             <a:pPr>
@@ -4234,8 +4581,10 @@
               </a:defRPr>
             </a:pPr>
             <a:r>
+              <a:rPr/>
               <a:t>•  Each section pairs the key ideas with results from my own Packet Tracer work.</a:t>
             </a:r>
+            <a:endParaRPr/>
           </a:p>
           <a:p>
             <a:pPr>
@@ -4250,18 +4599,20 @@
               </a:defRPr>
             </a:pPr>
             <a:r>
+              <a:rPr/>
               <a:t>•  Concepts: LANs, device access, DNS and web, static routing, serial links, VLANs.</a:t>
             </a:r>
-          </a:p>
-        </p:txBody>
-      </p:sp>
-      <p:sp>
-        <p:nvSpPr>
-          <p:cNvPr id="4" name="TextBox 3"/>
+            <a:endParaRPr/>
+          </a:p>
+        </p:txBody>
+      </p:sp>
+      <p:sp>
+        <p:nvSpPr>
+          <p:cNvPr id="422054292" name="TextBox 3"/>
           <p:cNvSpPr txBox="1"/>
           <p:nvPr/>
         </p:nvSpPr>
-        <p:spPr>
+        <p:spPr bwMode="auto">
           <a:xfrm>
             <a:off x="548640" y="6355080"/>
             <a:ext cx="11064240" cy="320040"/>
@@ -4286,8 +4637,10 @@
               </a:defRPr>
             </a:pPr>
             <a:r>
+              <a:rPr/>
               <a:t>CSE 360 - Networking Experiments Overview   |   1/11</a:t>
             </a:r>
+            <a:endParaRPr/>
           </a:p>
         </p:txBody>
       </p:sp>
@@ -4296,26 +4649,41 @@
   <p:clrMapOvr>
     <a:masterClrMapping/>
   </p:clrMapOvr>
+  <mc:AlternateContent xmlns:mc="http://schemas.openxmlformats.org/markup-compatibility/2006">
+    <mc:Choice xmlns:p159="http://schemas.microsoft.com/office/powerpoint/2015/09/main" xmlns:p14="http://schemas.microsoft.com/office/powerpoint/2010/main" Requires="p159">
+      <p:transition p14:dur="500" advClick="1"/>
+    </mc:Choice>
+    <mc:Fallback>
+      <p:transition advClick="1"/>
+    </mc:Fallback>
+  </mc:AlternateContent>
 </p:sld>
 </file>
 
 <file path=ppt/slides/slide10.xml><?xml version="1.0" encoding="utf-8"?>
-<p:sld xmlns:a="http://schemas.openxmlformats.org/drawingml/2006/main" xmlns:p="http://schemas.openxmlformats.org/presentationml/2006/main" xmlns:r="http://schemas.openxmlformats.org/officeDocument/2006/relationships">
-  <p:cSld>
+<p:sld xmlns:a="http://schemas.openxmlformats.org/drawingml/2006/main" xmlns:r="http://schemas.openxmlformats.org/officeDocument/2006/relationships" xmlns:p="http://schemas.openxmlformats.org/presentationml/2006/main" xmlns:m="http://schemas.openxmlformats.org/officeDocument/2006/math" xmlns:w="http://schemas.openxmlformats.org/wordprocessingml/2006/main" xmlns:mc="http://schemas.openxmlformats.org/markup-compatibility/2006" showMasterPhAnim="0" showMasterSp="1" show="1">
+  <p:cSld name="">
     <p:spTree>
       <p:nvGrpSpPr>
         <p:cNvPr id="1" name=""/>
         <p:cNvGrpSpPr/>
         <p:nvPr/>
       </p:nvGrpSpPr>
-      <p:grpSpPr/>
-      <p:sp>
-        <p:nvSpPr>
-          <p:cNvPr id="2" name="TextBox 1"/>
+      <p:grpSpPr bwMode="auto">
+        <a:xfrm>
+          <a:off x="0" y="0"/>
+          <a:ext cx="0" cy="0"/>
+          <a:chOff x="0" y="0"/>
+          <a:chExt cx="0" cy="0"/>
+        </a:xfrm>
+      </p:grpSpPr>
+      <p:sp>
+        <p:nvSpPr>
+          <p:cNvPr id="1498346531" name="TextBox 1"/>
           <p:cNvSpPr txBox="1"/>
           <p:nvPr/>
         </p:nvSpPr>
-        <p:spPr>
+        <p:spPr bwMode="auto">
           <a:xfrm>
             <a:off x="548640" y="228600"/>
             <a:ext cx="11064240" cy="777240"/>
@@ -4340,18 +4708,20 @@
               </a:defRPr>
             </a:pPr>
             <a:r>
+              <a:rPr/>
               <a:t>VLANs with router-on-a-stick</a:t>
             </a:r>
-          </a:p>
-        </p:txBody>
-      </p:sp>
-      <p:sp>
-        <p:nvSpPr>
-          <p:cNvPr id="3" name="TextBox 2"/>
+            <a:endParaRPr/>
+          </a:p>
+        </p:txBody>
+      </p:sp>
+      <p:sp>
+        <p:nvSpPr>
+          <p:cNvPr id="1458240407" name="TextBox 2"/>
           <p:cNvSpPr txBox="1"/>
           <p:nvPr/>
         </p:nvSpPr>
-        <p:spPr>
+        <p:spPr bwMode="auto">
           <a:xfrm>
             <a:off x="548640" y="1234440"/>
             <a:ext cx="6675120" cy="4023360"/>
@@ -4379,8 +4749,10 @@
               </a:defRPr>
             </a:pPr>
             <a:r>
+              <a:rPr/>
               <a:t>•  VLANs split one switch into virtual LANs, e.g. VLAN 10 = A, VLAN 20 = B.</a:t>
             </a:r>
+            <a:endParaRPr/>
           </a:p>
           <a:p>
             <a:pPr>
@@ -4395,8 +4767,10 @@
               </a:defRPr>
             </a:pPr>
             <a:r>
+              <a:rPr/>
               <a:t>•  PC ports = access mode (one VLAN); switch-to-router port = trunk (carries all).</a:t>
             </a:r>
+            <a:endParaRPr/>
           </a:p>
           <a:p>
             <a:pPr>
@@ -4411,8 +4785,10 @@
               </a:defRPr>
             </a:pPr>
             <a:r>
+              <a:rPr/>
               <a:t>•  Router uses subinterfaces (fa0/0.10, .20) with encapsulation dot1q + one IP per VLAN.</a:t>
             </a:r>
+            <a:endParaRPr/>
           </a:p>
           <a:p>
             <a:pPr>
@@ -4427,8 +4803,10 @@
               </a:defRPr>
             </a:pPr>
             <a:r>
+              <a:rPr/>
               <a:t>•  Same-VLAN PCs switch directly; cross-VLAN goes through the router.</a:t>
             </a:r>
+            <a:endParaRPr/>
           </a:p>
           <a:p>
             <a:pPr>
@@ -4443,128 +4821,20 @@
               </a:defRPr>
             </a:pPr>
             <a:r>
+              <a:rPr/>
               <a:t>•  DHCP variant: pools per VLAN + excluded-address for router IPs; PCs set to DHCP.</a:t>
             </a:r>
-          </a:p>
-        </p:txBody>
-      </p:sp>
-      <p:sp>
-        <p:nvSpPr>
-          <p:cNvPr id="4" name="Rectangle 3"/>
-          <p:cNvSpPr/>
-          <p:nvPr/>
-        </p:nvSpPr>
-        <p:spPr>
-          <a:xfrm>
-            <a:off x="7589520" y="1234440"/>
-            <a:ext cx="4023360" cy="1920240"/>
-          </a:xfrm>
-          <a:prstGeom prst="rect">
-            <a:avLst/>
-          </a:prstGeom>
-          <a:solidFill>
-            <a:srgbClr val="F2F2F2"/>
-          </a:solidFill>
-          <a:ln w="19050">
-            <a:solidFill>
-              <a:srgbClr val="999999"/>
-            </a:solidFill>
-          </a:ln>
-        </p:spPr>
-        <p:style>
-          <a:lnRef idx="1">
-            <a:schemeClr val="accent1"/>
-          </a:lnRef>
-          <a:fillRef idx="3">
-            <a:schemeClr val="accent1"/>
-          </a:fillRef>
-          <a:effectRef idx="2">
-            <a:schemeClr val="accent1"/>
-          </a:effectRef>
-          <a:fontRef idx="minor">
-            <a:schemeClr val="lt1"/>
-          </a:fontRef>
-        </p:style>
-        <p:txBody>
-          <a:bodyPr rtlCol="0" anchor="ctr" wrap="square"/>
-          <a:lstStyle/>
-          <a:p>
-            <a:pPr algn="ctr">
-              <a:defRPr sz="1500">
-                <a:solidFill>
-                  <a:srgbClr val="666666"/>
-                </a:solidFill>
-                <a:latin typeface="Calibri"/>
-              </a:defRPr>
-            </a:pPr>
-            <a:r>
-              <a:t>sh vlan brief with trunk/access ports</a:t>
-            </a:r>
-          </a:p>
-        </p:txBody>
-      </p:sp>
-      <p:sp>
-        <p:nvSpPr>
-          <p:cNvPr id="5" name="Rectangle 4"/>
-          <p:cNvSpPr/>
-          <p:nvPr/>
-        </p:nvSpPr>
-        <p:spPr>
-          <a:xfrm>
-            <a:off x="7589520" y="3337560"/>
-            <a:ext cx="4023360" cy="1920240"/>
-          </a:xfrm>
-          <a:prstGeom prst="rect">
-            <a:avLst/>
-          </a:prstGeom>
-          <a:solidFill>
-            <a:srgbClr val="F2F2F2"/>
-          </a:solidFill>
-          <a:ln w="19050">
-            <a:solidFill>
-              <a:srgbClr val="999999"/>
-            </a:solidFill>
-          </a:ln>
-        </p:spPr>
-        <p:style>
-          <a:lnRef idx="1">
-            <a:schemeClr val="accent1"/>
-          </a:lnRef>
-          <a:fillRef idx="3">
-            <a:schemeClr val="accent1"/>
-          </a:fillRef>
-          <a:effectRef idx="2">
-            <a:schemeClr val="accent1"/>
-          </a:effectRef>
-          <a:fontRef idx="minor">
-            <a:schemeClr val="lt1"/>
-          </a:fontRef>
-        </p:style>
-        <p:txBody>
-          <a:bodyPr rtlCol="0" anchor="ctr" wrap="square"/>
-          <a:lstStyle/>
-          <a:p>
-            <a:pPr algn="ctr">
-              <a:defRPr sz="1500">
-                <a:solidFill>
-                  <a:srgbClr val="666666"/>
-                </a:solidFill>
-                <a:latin typeface="Calibri"/>
-              </a:defRPr>
-            </a:pPr>
-            <a:r>
-              <a:t>Subinterface and DHCP pool config</a:t>
-            </a:r>
-          </a:p>
-        </p:txBody>
-      </p:sp>
-      <p:sp>
-        <p:nvSpPr>
-          <p:cNvPr id="6" name="TextBox 5"/>
+            <a:endParaRPr/>
+          </a:p>
+        </p:txBody>
+      </p:sp>
+      <p:sp>
+        <p:nvSpPr>
+          <p:cNvPr id="1764395087" name="TextBox 5"/>
           <p:cNvSpPr txBox="1"/>
           <p:nvPr/>
         </p:nvSpPr>
-        <p:spPr>
+        <p:spPr bwMode="auto">
           <a:xfrm>
             <a:off x="548640" y="6355080"/>
             <a:ext cx="11064240" cy="320040"/>
@@ -4589,36 +4859,75 @@
               </a:defRPr>
             </a:pPr>
             <a:r>
+              <a:rPr/>
               <a:t>CSE 360 - Networking Experiments Overview   |   10/11</a:t>
             </a:r>
-          </a:p>
-        </p:txBody>
-      </p:sp>
+            <a:endParaRPr/>
+          </a:p>
+        </p:txBody>
+      </p:sp>
+      <p:pic>
+        <p:nvPicPr>
+          <p:cNvPr id="624083947" name=""/>
+          <p:cNvPicPr>
+            <a:picLocks noChangeAspect="1"/>
+          </p:cNvPicPr>
+          <p:nvPr/>
+        </p:nvPicPr>
+        <p:blipFill rotWithShape="1">
+          <a:blip r:embed="rId3"/>
+          <a:stretch/>
+        </p:blipFill>
+        <p:spPr bwMode="auto">
+          <a:xfrm flipH="0" flipV="0">
+            <a:off x="7121548" y="1504673"/>
+            <a:ext cx="4958668" cy="4388120"/>
+          </a:xfrm>
+          <a:prstGeom prst="rect">
+            <a:avLst/>
+          </a:prstGeom>
+        </p:spPr>
+      </p:pic>
     </p:spTree>
   </p:cSld>
   <p:clrMapOvr>
     <a:masterClrMapping/>
   </p:clrMapOvr>
+  <mc:AlternateContent xmlns:mc="http://schemas.openxmlformats.org/markup-compatibility/2006">
+    <mc:Choice xmlns:p159="http://schemas.microsoft.com/office/powerpoint/2015/09/main" xmlns:p14="http://schemas.microsoft.com/office/powerpoint/2010/main" Requires="p159">
+      <p:transition p14:dur="500" advClick="1"/>
+    </mc:Choice>
+    <mc:Fallback>
+      <p:transition advClick="1"/>
+    </mc:Fallback>
+  </mc:AlternateContent>
 </p:sld>
 </file>
 
 <file path=ppt/slides/slide11.xml><?xml version="1.0" encoding="utf-8"?>
-<p:sld xmlns:a="http://schemas.openxmlformats.org/drawingml/2006/main" xmlns:p="http://schemas.openxmlformats.org/presentationml/2006/main" xmlns:r="http://schemas.openxmlformats.org/officeDocument/2006/relationships">
-  <p:cSld>
+<p:sld xmlns:a="http://schemas.openxmlformats.org/drawingml/2006/main" xmlns:r="http://schemas.openxmlformats.org/officeDocument/2006/relationships" xmlns:p="http://schemas.openxmlformats.org/presentationml/2006/main" xmlns:m="http://schemas.openxmlformats.org/officeDocument/2006/math" xmlns:w="http://schemas.openxmlformats.org/wordprocessingml/2006/main" xmlns:mc="http://schemas.openxmlformats.org/markup-compatibility/2006" showMasterPhAnim="0" showMasterSp="1" show="1">
+  <p:cSld name="">
     <p:spTree>
       <p:nvGrpSpPr>
         <p:cNvPr id="1" name=""/>
         <p:cNvGrpSpPr/>
         <p:nvPr/>
       </p:nvGrpSpPr>
-      <p:grpSpPr/>
-      <p:sp>
-        <p:nvSpPr>
-          <p:cNvPr id="2" name="TextBox 1"/>
+      <p:grpSpPr bwMode="auto">
+        <a:xfrm>
+          <a:off x="0" y="0"/>
+          <a:ext cx="0" cy="0"/>
+          <a:chOff x="0" y="0"/>
+          <a:chExt cx="0" cy="0"/>
+        </a:xfrm>
+      </p:grpSpPr>
+      <p:sp>
+        <p:nvSpPr>
+          <p:cNvPr id="227567868" name="TextBox 1"/>
           <p:cNvSpPr txBox="1"/>
           <p:nvPr/>
         </p:nvSpPr>
-        <p:spPr>
+        <p:spPr bwMode="auto">
           <a:xfrm>
             <a:off x="548640" y="228600"/>
             <a:ext cx="11064240" cy="777240"/>
@@ -4643,18 +4952,20 @@
               </a:defRPr>
             </a:pPr>
             <a:r>
+              <a:rPr/>
               <a:t>Checks used in every lab</a:t>
             </a:r>
-          </a:p>
-        </p:txBody>
-      </p:sp>
-      <p:sp>
-        <p:nvSpPr>
-          <p:cNvPr id="3" name="TextBox 2"/>
+            <a:endParaRPr/>
+          </a:p>
+        </p:txBody>
+      </p:sp>
+      <p:sp>
+        <p:nvSpPr>
+          <p:cNvPr id="107753018" name="TextBox 2"/>
           <p:cNvSpPr txBox="1"/>
           <p:nvPr/>
         </p:nvSpPr>
-        <p:spPr>
+        <p:spPr bwMode="auto">
           <a:xfrm>
             <a:off x="548640" y="1234440"/>
             <a:ext cx="6675120" cy="4023360"/>
@@ -4682,8 +4993,10 @@
               </a:defRPr>
             </a:pPr>
             <a:r>
+              <a:rPr/>
               <a:t>•  ping &lt;ip/name&gt;: IP first, then name (separates connectivity from DNS).</a:t>
             </a:r>
+            <a:endParaRPr/>
           </a:p>
           <a:p>
             <a:pPr>
@@ -4698,8 +5011,10 @@
               </a:defRPr>
             </a:pPr>
             <a:r>
+              <a:rPr/>
               <a:t>•  tracert: lists each router hop; ipconfig: my own address; arp -a: learned MACs.</a:t>
             </a:r>
+            <a:endParaRPr/>
           </a:p>
           <a:p>
             <a:pPr>
@@ -4714,105 +5029,20 @@
               </a:defRPr>
             </a:pPr>
             <a:r>
+              <a:rPr/>
               <a:t>•  Simulation mode: watch ICMP/ARP hop by hop; Successful = delivered.</a:t>
             </a:r>
-          </a:p>
-          <a:p>
-            <a:pPr>
-              <a:spcAft>
-                <a:spcPts val="800"/>
-              </a:spcAft>
-              <a:defRPr sz="1800">
-                <a:solidFill>
-                  <a:srgbClr val="222222"/>
-                </a:solidFill>
-                <a:latin typeface="Calibri"/>
-              </a:defRPr>
-            </a:pPr>
-            <a:r>
-              <a:t>•  First ping may drop once (ARP / switch learning): wait green, ping again.</a:t>
-            </a:r>
-          </a:p>
-          <a:p>
-            <a:pPr>
-              <a:spcAft>
-                <a:spcPts val="800"/>
-              </a:spcAft>
-              <a:defRPr sz="1800">
-                <a:solidFill>
-                  <a:srgbClr val="222222"/>
-                </a:solidFill>
-                <a:latin typeface="Calibri"/>
-              </a:defRPr>
-            </a:pPr>
-            <a:r>
-              <a:t>•  Red link = cable type, shutdown or port. 404 / no page = HTTP file or URL.</a:t>
-            </a:r>
-          </a:p>
-        </p:txBody>
-      </p:sp>
-      <p:sp>
-        <p:nvSpPr>
-          <p:cNvPr id="4" name="Rectangle 3"/>
-          <p:cNvSpPr/>
-          <p:nvPr/>
-        </p:nvSpPr>
-        <p:spPr>
-          <a:xfrm>
-            <a:off x="7589520" y="1234440"/>
-            <a:ext cx="4023360" cy="4023360"/>
-          </a:xfrm>
-          <a:prstGeom prst="rect">
-            <a:avLst/>
-          </a:prstGeom>
-          <a:solidFill>
-            <a:srgbClr val="F2F2F2"/>
-          </a:solidFill>
-          <a:ln w="19050">
-            <a:solidFill>
-              <a:srgbClr val="999999"/>
-            </a:solidFill>
-          </a:ln>
-        </p:spPr>
-        <p:style>
-          <a:lnRef idx="1">
-            <a:schemeClr val="accent1"/>
-          </a:lnRef>
-          <a:fillRef idx="3">
-            <a:schemeClr val="accent1"/>
-          </a:fillRef>
-          <a:effectRef idx="2">
-            <a:schemeClr val="accent1"/>
-          </a:effectRef>
-          <a:fontRef idx="minor">
-            <a:schemeClr val="lt1"/>
-          </a:fontRef>
-        </p:style>
-        <p:txBody>
-          <a:bodyPr rtlCol="0" anchor="ctr" wrap="square"/>
-          <a:lstStyle/>
-          <a:p>
-            <a:pPr algn="ctr">
-              <a:defRPr sz="1500">
-                <a:solidFill>
-                  <a:srgbClr val="666666"/>
-                </a:solidFill>
-                <a:latin typeface="Calibri"/>
-              </a:defRPr>
-            </a:pPr>
-            <a:r>
-              <a:t>Successful simulation event</a:t>
-            </a:r>
-          </a:p>
-        </p:txBody>
-      </p:sp>
-      <p:sp>
-        <p:nvSpPr>
-          <p:cNvPr id="5" name="TextBox 4"/>
+            <a:endParaRPr/>
+          </a:p>
+        </p:txBody>
+      </p:sp>
+      <p:sp>
+        <p:nvSpPr>
+          <p:cNvPr id="78255115" name="TextBox 4"/>
           <p:cNvSpPr txBox="1"/>
           <p:nvPr/>
         </p:nvSpPr>
-        <p:spPr>
+        <p:spPr bwMode="auto">
           <a:xfrm>
             <a:off x="548640" y="6355080"/>
             <a:ext cx="11064240" cy="320040"/>
@@ -4837,36 +5067,75 @@
               </a:defRPr>
             </a:pPr>
             <a:r>
+              <a:rPr/>
               <a:t>CSE 360 - Networking Experiments Overview   |   11/11</a:t>
             </a:r>
-          </a:p>
-        </p:txBody>
-      </p:sp>
+            <a:endParaRPr/>
+          </a:p>
+        </p:txBody>
+      </p:sp>
+      <p:pic>
+        <p:nvPicPr>
+          <p:cNvPr id="1711548432" name=""/>
+          <p:cNvPicPr>
+            <a:picLocks noChangeAspect="1"/>
+          </p:cNvPicPr>
+          <p:nvPr/>
+        </p:nvPicPr>
+        <p:blipFill rotWithShape="1">
+          <a:blip r:embed="rId3"/>
+          <a:stretch/>
+        </p:blipFill>
+        <p:spPr bwMode="auto">
+          <a:xfrm flipH="0" flipV="0">
+            <a:off x="5128999" y="2998214"/>
+            <a:ext cx="6483880" cy="3516885"/>
+          </a:xfrm>
+          <a:prstGeom prst="rect">
+            <a:avLst/>
+          </a:prstGeom>
+        </p:spPr>
+      </p:pic>
     </p:spTree>
   </p:cSld>
   <p:clrMapOvr>
     <a:masterClrMapping/>
   </p:clrMapOvr>
+  <mc:AlternateContent xmlns:mc="http://schemas.openxmlformats.org/markup-compatibility/2006">
+    <mc:Choice xmlns:p159="http://schemas.microsoft.com/office/powerpoint/2015/09/main" xmlns:p14="http://schemas.microsoft.com/office/powerpoint/2010/main" Requires="p159">
+      <p:transition p14:dur="500" advClick="1"/>
+    </mc:Choice>
+    <mc:Fallback>
+      <p:transition advClick="1"/>
+    </mc:Fallback>
+  </mc:AlternateContent>
 </p:sld>
 </file>
 
 <file path=ppt/slides/slide2.xml><?xml version="1.0" encoding="utf-8"?>
-<p:sld xmlns:a="http://schemas.openxmlformats.org/drawingml/2006/main" xmlns:p="http://schemas.openxmlformats.org/presentationml/2006/main" xmlns:r="http://schemas.openxmlformats.org/officeDocument/2006/relationships">
-  <p:cSld>
+<p:sld xmlns:a="http://schemas.openxmlformats.org/drawingml/2006/main" xmlns:r="http://schemas.openxmlformats.org/officeDocument/2006/relationships" xmlns:p="http://schemas.openxmlformats.org/presentationml/2006/main" xmlns:m="http://schemas.openxmlformats.org/officeDocument/2006/math" xmlns:w="http://schemas.openxmlformats.org/wordprocessingml/2006/main" xmlns:mc="http://schemas.openxmlformats.org/markup-compatibility/2006" showMasterPhAnim="0" showMasterSp="1" show="1">
+  <p:cSld name="">
     <p:spTree>
       <p:nvGrpSpPr>
         <p:cNvPr id="1" name=""/>
         <p:cNvGrpSpPr/>
         <p:nvPr/>
       </p:nvGrpSpPr>
-      <p:grpSpPr/>
-      <p:sp>
-        <p:nvSpPr>
-          <p:cNvPr id="2" name="TextBox 1"/>
+      <p:grpSpPr bwMode="auto">
+        <a:xfrm>
+          <a:off x="0" y="0"/>
+          <a:ext cx="0" cy="0"/>
+          <a:chOff x="0" y="0"/>
+          <a:chExt cx="0" cy="0"/>
+        </a:xfrm>
+      </p:grpSpPr>
+      <p:sp>
+        <p:nvSpPr>
+          <p:cNvPr id="1467613668" name="TextBox 1"/>
           <p:cNvSpPr txBox="1"/>
           <p:nvPr/>
         </p:nvSpPr>
-        <p:spPr>
+        <p:spPr bwMode="auto">
           <a:xfrm>
             <a:off x="548640" y="228600"/>
             <a:ext cx="11064240" cy="777240"/>
@@ -4891,18 +5160,20 @@
               </a:defRPr>
             </a:pPr>
             <a:r>
+              <a:rPr/>
               <a:t>How the labs fit together</a:t>
             </a:r>
-          </a:p>
-        </p:txBody>
-      </p:sp>
-      <p:sp>
-        <p:nvSpPr>
-          <p:cNvPr id="3" name="TextBox 2"/>
+            <a:endParaRPr/>
+          </a:p>
+        </p:txBody>
+      </p:sp>
+      <p:sp>
+        <p:nvSpPr>
+          <p:cNvPr id="1610529869" name="TextBox 2"/>
           <p:cNvSpPr txBox="1"/>
           <p:nvPr/>
         </p:nvSpPr>
-        <p:spPr>
+        <p:spPr bwMode="auto">
           <a:xfrm>
             <a:off x="548640" y="1234440"/>
             <a:ext cx="6675120" cy="4023360"/>
@@ -4930,8 +5201,10 @@
               </a:defRPr>
             </a:pPr>
             <a:r>
+              <a:rPr/>
               <a:t>•  Slides 3-5: local networks, device access, DNS and web (from slide set 2).</a:t>
             </a:r>
+            <a:endParaRPr/>
           </a:p>
           <a:p>
             <a:pPr>
@@ -4946,8 +5219,10 @@
               </a:defRPr>
             </a:pPr>
             <a:r>
+              <a:rPr/>
               <a:t>•  Slides 6-7: static routing with two routers, plus the hub variant (from slide set 4).</a:t>
             </a:r>
+            <a:endParaRPr/>
           </a:p>
           <a:p>
             <a:pPr>
@@ -4962,8 +5237,10 @@
               </a:defRPr>
             </a:pPr>
             <a:r>
+              <a:rPr/>
               <a:t>•  Slide 8: three routers in series (from slide set 5).</a:t>
             </a:r>
+            <a:endParaRPr/>
           </a:p>
           <a:p>
             <a:pPr>
@@ -4978,8 +5255,10 @@
               </a:defRPr>
             </a:pPr>
             <a:r>
+              <a:rPr/>
               <a:t>•  Slide 9: mixed Ethernet and serial network (from slide set 6).</a:t>
             </a:r>
+            <a:endParaRPr/>
           </a:p>
           <a:p>
             <a:pPr>
@@ -4994,8 +5273,10 @@
               </a:defRPr>
             </a:pPr>
             <a:r>
+              <a:rPr/>
               <a:t>•  Slide 10: VLANs with router-on-a-stick, static and DHCP addressing (from slide set 7).</a:t>
             </a:r>
+            <a:endParaRPr/>
           </a:p>
           <a:p>
             <a:pPr>
@@ -5010,18 +5291,20 @@
               </a:defRPr>
             </a:pPr>
             <a:r>
+              <a:rPr/>
               <a:t>•  Slide 11: the check toolkit used in every lab.</a:t>
             </a:r>
-          </a:p>
-        </p:txBody>
-      </p:sp>
-      <p:sp>
-        <p:nvSpPr>
-          <p:cNvPr id="4" name="TextBox 3"/>
+            <a:endParaRPr/>
+          </a:p>
+        </p:txBody>
+      </p:sp>
+      <p:sp>
+        <p:nvSpPr>
+          <p:cNvPr id="787865030" name="TextBox 3"/>
           <p:cNvSpPr txBox="1"/>
           <p:nvPr/>
         </p:nvSpPr>
-        <p:spPr>
+        <p:spPr bwMode="auto">
           <a:xfrm>
             <a:off x="548640" y="6355080"/>
             <a:ext cx="11064240" cy="320040"/>
@@ -5046,8 +5329,10 @@
               </a:defRPr>
             </a:pPr>
             <a:r>
+              <a:rPr/>
               <a:t>CSE 360 - Networking Experiments Overview   |   2/11</a:t>
             </a:r>
+            <a:endParaRPr/>
           </a:p>
         </p:txBody>
       </p:sp>
@@ -5056,26 +5341,41 @@
   <p:clrMapOvr>
     <a:masterClrMapping/>
   </p:clrMapOvr>
+  <mc:AlternateContent xmlns:mc="http://schemas.openxmlformats.org/markup-compatibility/2006">
+    <mc:Choice xmlns:p159="http://schemas.microsoft.com/office/powerpoint/2015/09/main" xmlns:p14="http://schemas.microsoft.com/office/powerpoint/2010/main" Requires="p159">
+      <p:transition p14:dur="500" advClick="1"/>
+    </mc:Choice>
+    <mc:Fallback>
+      <p:transition advClick="1"/>
+    </mc:Fallback>
+  </mc:AlternateContent>
 </p:sld>
 </file>
 
 <file path=ppt/slides/slide3.xml><?xml version="1.0" encoding="utf-8"?>
-<p:sld xmlns:a="http://schemas.openxmlformats.org/drawingml/2006/main" xmlns:p="http://schemas.openxmlformats.org/presentationml/2006/main" xmlns:r="http://schemas.openxmlformats.org/officeDocument/2006/relationships">
-  <p:cSld>
+<p:sld xmlns:a="http://schemas.openxmlformats.org/drawingml/2006/main" xmlns:r="http://schemas.openxmlformats.org/officeDocument/2006/relationships" xmlns:p="http://schemas.openxmlformats.org/presentationml/2006/main" xmlns:m="http://schemas.openxmlformats.org/officeDocument/2006/math" xmlns:w="http://schemas.openxmlformats.org/wordprocessingml/2006/main" xmlns:mc="http://schemas.openxmlformats.org/markup-compatibility/2006" showMasterPhAnim="0" showMasterSp="1" show="1">
+  <p:cSld name="">
     <p:spTree>
       <p:nvGrpSpPr>
         <p:cNvPr id="1" name=""/>
         <p:cNvGrpSpPr/>
         <p:nvPr/>
       </p:nvGrpSpPr>
-      <p:grpSpPr/>
-      <p:sp>
-        <p:nvSpPr>
-          <p:cNvPr id="2" name="TextBox 1"/>
+      <p:grpSpPr bwMode="auto">
+        <a:xfrm>
+          <a:off x="0" y="0"/>
+          <a:ext cx="0" cy="0"/>
+          <a:chOff x="0" y="0"/>
+          <a:chExt cx="0" cy="0"/>
+        </a:xfrm>
+      </p:grpSpPr>
+      <p:sp>
+        <p:nvSpPr>
+          <p:cNvPr id="1650996200" name="TextBox 1"/>
           <p:cNvSpPr txBox="1"/>
           <p:nvPr/>
         </p:nvSpPr>
-        <p:spPr>
+        <p:spPr bwMode="auto">
           <a:xfrm>
             <a:off x="548640" y="228600"/>
             <a:ext cx="11064240" cy="777240"/>
@@ -5100,18 +5400,20 @@
               </a:defRPr>
             </a:pPr>
             <a:r>
+              <a:rPr/>
               <a:t>Same-subnet LANs: hub vs switch vs wireless</a:t>
             </a:r>
-          </a:p>
-        </p:txBody>
-      </p:sp>
-      <p:sp>
-        <p:nvSpPr>
-          <p:cNvPr id="3" name="TextBox 2"/>
+            <a:endParaRPr/>
+          </a:p>
+        </p:txBody>
+      </p:sp>
+      <p:sp>
+        <p:nvSpPr>
+          <p:cNvPr id="1229616925" name="TextBox 2"/>
           <p:cNvSpPr txBox="1"/>
           <p:nvPr/>
         </p:nvSpPr>
-        <p:spPr>
+        <p:spPr bwMode="auto">
           <a:xfrm>
             <a:off x="548640" y="1234440"/>
             <a:ext cx="6675120" cy="4023360"/>
@@ -5139,8 +5441,10 @@
               </a:defRPr>
             </a:pPr>
             <a:r>
+              <a:rPr/>
               <a:t>•  Same mask 255.255.255.0 means same network, e.g. all 192.168.0.x talk with no router.</a:t>
             </a:r>
+            <a:endParaRPr/>
           </a:p>
           <a:p>
             <a:pPr>
@@ -5155,8 +5459,10 @@
               </a:defRPr>
             </a:pPr>
             <a:r>
+              <a:rPr/>
               <a:t>•  Hub repeats everything to all ports; one conversation at a time, collisions possible.</a:t>
             </a:r>
+            <a:endParaRPr/>
           </a:p>
           <a:p>
             <a:pPr>
@@ -5171,8 +5477,10 @@
               </a:defRPr>
             </a:pPr>
             <a:r>
+              <a:rPr/>
               <a:t>•  Switch learns MAC addresses and forwards only to the right port.</a:t>
             </a:r>
+            <a:endParaRPr/>
           </a:p>
           <a:p>
             <a:pPr>
@@ -5187,8 +5495,10 @@
               </a:defRPr>
             </a:pPr>
             <a:r>
+              <a:rPr/>
               <a:t>•  Wireless is the same subnet idea without cables.</a:t>
             </a:r>
+            <a:endParaRPr/>
           </a:p>
           <a:p>
             <a:pPr>
@@ -5203,73 +5513,20 @@
               </a:defRPr>
             </a:pPr>
             <a:r>
+              <a:rPr/>
               <a:t>•  Wait for green link lights (switch ports need ~30-60 s), then test with ping.</a:t>
             </a:r>
-          </a:p>
-        </p:txBody>
-      </p:sp>
-      <p:sp>
-        <p:nvSpPr>
-          <p:cNvPr id="4" name="Rectangle 3"/>
-          <p:cNvSpPr/>
-          <p:nvPr/>
-        </p:nvSpPr>
-        <p:spPr>
-          <a:xfrm>
-            <a:off x="7589520" y="1234440"/>
-            <a:ext cx="4023360" cy="4023360"/>
-          </a:xfrm>
-          <a:prstGeom prst="rect">
-            <a:avLst/>
-          </a:prstGeom>
-          <a:solidFill>
-            <a:srgbClr val="F2F2F2"/>
-          </a:solidFill>
-          <a:ln w="19050">
-            <a:solidFill>
-              <a:srgbClr val="999999"/>
-            </a:solidFill>
-          </a:ln>
-        </p:spPr>
-        <p:style>
-          <a:lnRef idx="1">
-            <a:schemeClr val="accent1"/>
-          </a:lnRef>
-          <a:fillRef idx="3">
-            <a:schemeClr val="accent1"/>
-          </a:fillRef>
-          <a:effectRef idx="2">
-            <a:schemeClr val="accent1"/>
-          </a:effectRef>
-          <a:fontRef idx="minor">
-            <a:schemeClr val="lt1"/>
-          </a:fontRef>
-        </p:style>
-        <p:txBody>
-          <a:bodyPr rtlCol="0" anchor="ctr" wrap="square"/>
-          <a:lstStyle/>
-          <a:p>
-            <a:pPr algn="ctr">
-              <a:defRPr sz="1500">
-                <a:solidFill>
-                  <a:srgbClr val="666666"/>
-                </a:solidFill>
-                <a:latin typeface="Calibri"/>
-              </a:defRPr>
-            </a:pPr>
-            <a:r>
-              <a:t>Hub / switch LAN and ping result</a:t>
-            </a:r>
-          </a:p>
-        </p:txBody>
-      </p:sp>
-      <p:sp>
-        <p:nvSpPr>
-          <p:cNvPr id="5" name="TextBox 4"/>
+            <a:endParaRPr/>
+          </a:p>
+        </p:txBody>
+      </p:sp>
+      <p:sp>
+        <p:nvSpPr>
+          <p:cNvPr id="2024044214" name="TextBox 4"/>
           <p:cNvSpPr txBox="1"/>
           <p:nvPr/>
         </p:nvSpPr>
-        <p:spPr>
+        <p:spPr bwMode="auto">
           <a:xfrm>
             <a:off x="548640" y="6355080"/>
             <a:ext cx="11064240" cy="320040"/>
@@ -5294,36 +5551,75 @@
               </a:defRPr>
             </a:pPr>
             <a:r>
+              <a:rPr/>
               <a:t>CSE 360 - Networking Experiments Overview   |   3/11</a:t>
             </a:r>
-          </a:p>
-        </p:txBody>
-      </p:sp>
+            <a:endParaRPr/>
+          </a:p>
+        </p:txBody>
+      </p:sp>
+      <p:pic>
+        <p:nvPicPr>
+          <p:cNvPr id="1945907096" name=""/>
+          <p:cNvPicPr>
+            <a:picLocks noChangeAspect="1"/>
+          </p:cNvPicPr>
+          <p:nvPr/>
+        </p:nvPicPr>
+        <p:blipFill rotWithShape="1">
+          <a:blip r:embed="rId3"/>
+          <a:stretch/>
+        </p:blipFill>
+        <p:spPr bwMode="auto">
+          <a:xfrm flipH="0" flipV="0">
+            <a:off x="6866991" y="736249"/>
+            <a:ext cx="5296052" cy="4924575"/>
+          </a:xfrm>
+          <a:prstGeom prst="rect">
+            <a:avLst/>
+          </a:prstGeom>
+        </p:spPr>
+      </p:pic>
     </p:spTree>
   </p:cSld>
   <p:clrMapOvr>
     <a:masterClrMapping/>
   </p:clrMapOvr>
+  <mc:AlternateContent xmlns:mc="http://schemas.openxmlformats.org/markup-compatibility/2006">
+    <mc:Choice xmlns:p159="http://schemas.microsoft.com/office/powerpoint/2015/09/main" xmlns:p14="http://schemas.microsoft.com/office/powerpoint/2010/main" Requires="p159">
+      <p:transition p14:dur="500" advClick="1"/>
+    </mc:Choice>
+    <mc:Fallback>
+      <p:transition advClick="1"/>
+    </mc:Fallback>
+  </mc:AlternateContent>
 </p:sld>
 </file>
 
 <file path=ppt/slides/slide4.xml><?xml version="1.0" encoding="utf-8"?>
-<p:sld xmlns:a="http://schemas.openxmlformats.org/drawingml/2006/main" xmlns:p="http://schemas.openxmlformats.org/presentationml/2006/main" xmlns:r="http://schemas.openxmlformats.org/officeDocument/2006/relationships">
-  <p:cSld>
+<p:sld xmlns:a="http://schemas.openxmlformats.org/drawingml/2006/main" xmlns:r="http://schemas.openxmlformats.org/officeDocument/2006/relationships" xmlns:p="http://schemas.openxmlformats.org/presentationml/2006/main" xmlns:m="http://schemas.openxmlformats.org/officeDocument/2006/math" xmlns:w="http://schemas.openxmlformats.org/wordprocessingml/2006/main" xmlns:mc="http://schemas.openxmlformats.org/markup-compatibility/2006" showMasterPhAnim="0" showMasterSp="1" show="1">
+  <p:cSld name="">
     <p:spTree>
       <p:nvGrpSpPr>
         <p:cNvPr id="1" name=""/>
         <p:cNvGrpSpPr/>
         <p:nvPr/>
       </p:nvGrpSpPr>
-      <p:grpSpPr/>
-      <p:sp>
-        <p:nvSpPr>
-          <p:cNvPr id="2" name="TextBox 1"/>
+      <p:grpSpPr bwMode="auto">
+        <a:xfrm>
+          <a:off x="0" y="0"/>
+          <a:ext cx="0" cy="0"/>
+          <a:chOff x="0" y="0"/>
+          <a:chExt cx="0" cy="0"/>
+        </a:xfrm>
+      </p:grpSpPr>
+      <p:sp>
+        <p:nvSpPr>
+          <p:cNvPr id="1568640708" name="TextBox 1"/>
           <p:cNvSpPr txBox="1"/>
           <p:nvPr/>
         </p:nvSpPr>
-        <p:spPr>
+        <p:spPr bwMode="auto">
           <a:xfrm>
             <a:off x="548640" y="228600"/>
             <a:ext cx="11064240" cy="777240"/>
@@ -5348,18 +5644,20 @@
               </a:defRPr>
             </a:pPr>
             <a:r>
+              <a:rPr/>
               <a:t>Talking to devices: console, passwords, Telnet, SSH</a:t>
             </a:r>
-          </a:p>
-        </p:txBody>
-      </p:sp>
-      <p:sp>
-        <p:nvSpPr>
-          <p:cNvPr id="3" name="TextBox 2"/>
+            <a:endParaRPr/>
+          </a:p>
+        </p:txBody>
+      </p:sp>
+      <p:sp>
+        <p:nvSpPr>
+          <p:cNvPr id="396875110" name="TextBox 2"/>
           <p:cNvSpPr txBox="1"/>
           <p:nvPr/>
         </p:nvSpPr>
-        <p:spPr>
+        <p:spPr bwMode="auto">
           <a:xfrm>
             <a:off x="548640" y="1234440"/>
             <a:ext cx="6675120" cy="4023360"/>
@@ -5387,8 +5685,10 @@
               </a:defRPr>
             </a:pPr>
             <a:r>
+              <a:rPr/>
               <a:t>•  Console cable + Terminal gives Switch&gt; prompt directly on the box.</a:t>
             </a:r>
+            <a:endParaRPr/>
           </a:p>
           <a:p>
             <a:pPr>
@@ -5403,8 +5703,10 @@
               </a:defRPr>
             </a:pPr>
             <a:r>
+              <a:rPr/>
               <a:t>•  Modes: user (&gt;) , privileged (#) with enable, config with conf t.</a:t>
             </a:r>
+            <a:endParaRPr/>
           </a:p>
           <a:p>
             <a:pPr>
@@ -5419,8 +5721,10 @@
               </a:defRPr>
             </a:pPr>
             <a:r>
+              <a:rPr/>
               <a:t>•  enable secret = password for &gt; to #; line console 0 + login = console password.</a:t>
             </a:r>
+            <a:endParaRPr/>
           </a:p>
           <a:p>
             <a:pPr>
@@ -5435,8 +5739,10 @@
               </a:defRPr>
             </a:pPr>
             <a:r>
+              <a:rPr/>
               <a:t>•  line vty 0 4 = 5 remote Telnet slots at once; SSH (PuTTY) is the encrypted equivalent.</a:t>
             </a:r>
+            <a:endParaRPr/>
           </a:p>
           <a:p>
             <a:pPr>
@@ -5451,73 +5757,20 @@
               </a:defRPr>
             </a:pPr>
             <a:r>
+              <a:rPr/>
               <a:t>•  copy run startup-config (wr) saves, otherwise a reboot loses the work.</a:t>
             </a:r>
-          </a:p>
-        </p:txBody>
-      </p:sp>
-      <p:sp>
-        <p:nvSpPr>
-          <p:cNvPr id="4" name="Rectangle 3"/>
-          <p:cNvSpPr/>
-          <p:nvPr/>
-        </p:nvSpPr>
-        <p:spPr>
-          <a:xfrm>
-            <a:off x="7589520" y="1234440"/>
-            <a:ext cx="4023360" cy="4023360"/>
-          </a:xfrm>
-          <a:prstGeom prst="rect">
-            <a:avLst/>
-          </a:prstGeom>
-          <a:solidFill>
-            <a:srgbClr val="F2F2F2"/>
-          </a:solidFill>
-          <a:ln w="19050">
-            <a:solidFill>
-              <a:srgbClr val="999999"/>
-            </a:solidFill>
-          </a:ln>
-        </p:spPr>
-        <p:style>
-          <a:lnRef idx="1">
-            <a:schemeClr val="accent1"/>
-          </a:lnRef>
-          <a:fillRef idx="3">
-            <a:schemeClr val="accent1"/>
-          </a:fillRef>
-          <a:effectRef idx="2">
-            <a:schemeClr val="accent1"/>
-          </a:effectRef>
-          <a:fontRef idx="minor">
-            <a:schemeClr val="lt1"/>
-          </a:fontRef>
-        </p:style>
-        <p:txBody>
-          <a:bodyPr rtlCol="0" anchor="ctr" wrap="square"/>
-          <a:lstStyle/>
-          <a:p>
-            <a:pPr algn="ctr">
-              <a:defRPr sz="1500">
-                <a:solidFill>
-                  <a:srgbClr val="666666"/>
-                </a:solidFill>
-                <a:latin typeface="Calibri"/>
-              </a:defRPr>
-            </a:pPr>
-            <a:r>
-              <a:t>Terminal: enable secret and console login</a:t>
-            </a:r>
-          </a:p>
-        </p:txBody>
-      </p:sp>
-      <p:sp>
-        <p:nvSpPr>
-          <p:cNvPr id="5" name="TextBox 4"/>
+            <a:endParaRPr/>
+          </a:p>
+        </p:txBody>
+      </p:sp>
+      <p:sp>
+        <p:nvSpPr>
+          <p:cNvPr id="757932449" name="TextBox 4"/>
           <p:cNvSpPr txBox="1"/>
           <p:nvPr/>
         </p:nvSpPr>
-        <p:spPr>
+        <p:spPr bwMode="auto">
           <a:xfrm>
             <a:off x="548640" y="6355080"/>
             <a:ext cx="11064240" cy="320040"/>
@@ -5542,36 +5795,75 @@
               </a:defRPr>
             </a:pPr>
             <a:r>
+              <a:rPr/>
               <a:t>CSE 360 - Networking Experiments Overview   |   4/11</a:t>
             </a:r>
-          </a:p>
-        </p:txBody>
-      </p:sp>
+            <a:endParaRPr/>
+          </a:p>
+        </p:txBody>
+      </p:sp>
+      <p:pic>
+        <p:nvPicPr>
+          <p:cNvPr id="1131799322" name=""/>
+          <p:cNvPicPr>
+            <a:picLocks noChangeAspect="1"/>
+          </p:cNvPicPr>
+          <p:nvPr/>
+        </p:nvPicPr>
+        <p:blipFill rotWithShape="1">
+          <a:blip r:embed="rId3"/>
+          <a:stretch/>
+        </p:blipFill>
+        <p:spPr bwMode="auto">
+          <a:xfrm flipH="0" flipV="0">
+            <a:off x="7281915" y="1037994"/>
+            <a:ext cx="4798301" cy="4012043"/>
+          </a:xfrm>
+          <a:prstGeom prst="rect">
+            <a:avLst/>
+          </a:prstGeom>
+        </p:spPr>
+      </p:pic>
     </p:spTree>
   </p:cSld>
   <p:clrMapOvr>
     <a:masterClrMapping/>
   </p:clrMapOvr>
+  <mc:AlternateContent xmlns:mc="http://schemas.openxmlformats.org/markup-compatibility/2006">
+    <mc:Choice xmlns:p159="http://schemas.microsoft.com/office/powerpoint/2015/09/main" xmlns:p14="http://schemas.microsoft.com/office/powerpoint/2010/main" Requires="p159">
+      <p:transition p14:dur="500" advClick="1"/>
+    </mc:Choice>
+    <mc:Fallback>
+      <p:transition advClick="1"/>
+    </mc:Fallback>
+  </mc:AlternateContent>
 </p:sld>
 </file>
 
 <file path=ppt/slides/slide5.xml><?xml version="1.0" encoding="utf-8"?>
-<p:sld xmlns:a="http://schemas.openxmlformats.org/drawingml/2006/main" xmlns:p="http://schemas.openxmlformats.org/presentationml/2006/main" xmlns:r="http://schemas.openxmlformats.org/officeDocument/2006/relationships">
-  <p:cSld>
+<p:sld xmlns:a="http://schemas.openxmlformats.org/drawingml/2006/main" xmlns:r="http://schemas.openxmlformats.org/officeDocument/2006/relationships" xmlns:p="http://schemas.openxmlformats.org/presentationml/2006/main" xmlns:m="http://schemas.openxmlformats.org/officeDocument/2006/math" xmlns:w="http://schemas.openxmlformats.org/wordprocessingml/2006/main" xmlns:mc="http://schemas.openxmlformats.org/markup-compatibility/2006" showMasterPhAnim="0" showMasterSp="1" show="1">
+  <p:cSld name="">
     <p:spTree>
       <p:nvGrpSpPr>
         <p:cNvPr id="1" name=""/>
         <p:cNvGrpSpPr/>
         <p:nvPr/>
       </p:nvGrpSpPr>
-      <p:grpSpPr/>
-      <p:sp>
-        <p:nvSpPr>
-          <p:cNvPr id="2" name="TextBox 1"/>
+      <p:grpSpPr bwMode="auto">
+        <a:xfrm>
+          <a:off x="0" y="0"/>
+          <a:ext cx="0" cy="0"/>
+          <a:chOff x="0" y="0"/>
+          <a:chExt cx="0" cy="0"/>
+        </a:xfrm>
+      </p:grpSpPr>
+      <p:sp>
+        <p:nvSpPr>
+          <p:cNvPr id="76733482" name="TextBox 1"/>
           <p:cNvSpPr txBox="1"/>
           <p:nvPr/>
         </p:nvSpPr>
-        <p:spPr>
+        <p:spPr bwMode="auto">
           <a:xfrm>
             <a:off x="548640" y="228600"/>
             <a:ext cx="11064240" cy="777240"/>
@@ -5596,18 +5888,20 @@
               </a:defRPr>
             </a:pPr>
             <a:r>
+              <a:rPr/>
               <a:t>Client, DNS and web: JU / DU networks</a:t>
             </a:r>
-          </a:p>
-        </p:txBody>
-      </p:sp>
-      <p:sp>
-        <p:nvSpPr>
-          <p:cNvPr id="3" name="TextBox 2"/>
+            <a:endParaRPr/>
+          </a:p>
+        </p:txBody>
+      </p:sp>
+      <p:sp>
+        <p:nvSpPr>
+          <p:cNvPr id="925619559" name="TextBox 2"/>
           <p:cNvSpPr txBox="1"/>
           <p:nvPr/>
         </p:nvSpPr>
-        <p:spPr>
+        <p:spPr bwMode="auto">
           <a:xfrm>
             <a:off x="548640" y="1234440"/>
             <a:ext cx="6675120" cy="4023360"/>
@@ -5635,8 +5929,10 @@
               </a:defRPr>
             </a:pPr>
             <a:r>
+              <a:rPr/>
               <a:t>•  PC fields: IP + mask + gateway (local router leg) + DNS server (which server to ask).</a:t>
             </a:r>
+            <a:endParaRPr/>
           </a:p>
           <a:p>
             <a:pPr>
@@ -5651,8 +5947,10 @@
               </a:defRPr>
             </a:pPr>
             <a:r>
+              <a:rPr/>
               <a:t>•  DNS A Record maps a name to an IP, e.g. www.ju.edu to 192.168.1.3. DNS Service must be On.</a:t>
             </a:r>
+            <a:endParaRPr/>
           </a:p>
           <a:p>
             <a:pPr>
@@ -5667,8 +5965,10 @@
               </a:defRPr>
             </a:pPr>
             <a:r>
+              <a:rPr/>
               <a:t>•  HTTP service hosts ju.html / du.html. URL = name + file, e.g. http://www.ju.edu/ju.html.</a:t>
             </a:r>
+            <a:endParaRPr/>
           </a:p>
           <a:p>
             <a:pPr>
@@ -5683,144 +5983,20 @@
               </a:defRPr>
             </a:pPr>
             <a:r>
-              <a:t>•  Browse by IP first (skips DNS). If IP works but name fails, it is a DNS problem.</a:t>
-            </a:r>
-          </a:p>
-          <a:p>
-            <a:pPr>
-              <a:spcAft>
-                <a:spcPts val="800"/>
-              </a:spcAft>
-              <a:defRPr sz="1800">
-                <a:solidFill>
-                  <a:srgbClr val="222222"/>
-                </a:solidFill>
-                <a:latin typeface="Calibri"/>
-              </a:defRPr>
-            </a:pPr>
-            <a:r>
+              <a:rPr/>
               <a:t>•  Router Fa0/0 192.168.1.4 and Fa0/1 192.168.2.4, both Port Status On.</a:t>
             </a:r>
-          </a:p>
-        </p:txBody>
-      </p:sp>
-      <p:sp>
-        <p:nvSpPr>
-          <p:cNvPr id="4" name="Rectangle 3"/>
-          <p:cNvSpPr/>
-          <p:nvPr/>
-        </p:nvSpPr>
-        <p:spPr>
-          <a:xfrm>
-            <a:off x="7589520" y="1234440"/>
-            <a:ext cx="4023360" cy="1920240"/>
-          </a:xfrm>
-          <a:prstGeom prst="rect">
-            <a:avLst/>
-          </a:prstGeom>
-          <a:solidFill>
-            <a:srgbClr val="F2F2F2"/>
-          </a:solidFill>
-          <a:ln w="19050">
-            <a:solidFill>
-              <a:srgbClr val="999999"/>
-            </a:solidFill>
-          </a:ln>
-        </p:spPr>
-        <p:style>
-          <a:lnRef idx="1">
-            <a:schemeClr val="accent1"/>
-          </a:lnRef>
-          <a:fillRef idx="3">
-            <a:schemeClr val="accent1"/>
-          </a:fillRef>
-          <a:effectRef idx="2">
-            <a:schemeClr val="accent1"/>
-          </a:effectRef>
-          <a:fontRef idx="minor">
-            <a:schemeClr val="lt1"/>
-          </a:fontRef>
-        </p:style>
-        <p:txBody>
-          <a:bodyPr rtlCol="0" anchor="ctr" wrap="square"/>
-          <a:lstStyle/>
-          <a:p>
-            <a:pPr algn="ctr">
-              <a:defRPr sz="1500">
-                <a:solidFill>
-                  <a:srgbClr val="666666"/>
-                </a:solidFill>
-                <a:latin typeface="Calibri"/>
-              </a:defRPr>
-            </a:pPr>
-            <a:r>
-              <a:t>Server DNS table with both A records</a:t>
-            </a:r>
-          </a:p>
-        </p:txBody>
-      </p:sp>
-      <p:sp>
-        <p:nvSpPr>
-          <p:cNvPr id="5" name="Rectangle 4"/>
-          <p:cNvSpPr/>
-          <p:nvPr/>
-        </p:nvSpPr>
-        <p:spPr>
-          <a:xfrm>
-            <a:off x="7589520" y="3337560"/>
-            <a:ext cx="4023360" cy="1920240"/>
-          </a:xfrm>
-          <a:prstGeom prst="rect">
-            <a:avLst/>
-          </a:prstGeom>
-          <a:solidFill>
-            <a:srgbClr val="F2F2F2"/>
-          </a:solidFill>
-          <a:ln w="19050">
-            <a:solidFill>
-              <a:srgbClr val="999999"/>
-            </a:solidFill>
-          </a:ln>
-        </p:spPr>
-        <p:style>
-          <a:lnRef idx="1">
-            <a:schemeClr val="accent1"/>
-          </a:lnRef>
-          <a:fillRef idx="3">
-            <a:schemeClr val="accent1"/>
-          </a:fillRef>
-          <a:effectRef idx="2">
-            <a:schemeClr val="accent1"/>
-          </a:effectRef>
-          <a:fontRef idx="minor">
-            <a:schemeClr val="lt1"/>
-          </a:fontRef>
-        </p:style>
-        <p:txBody>
-          <a:bodyPr rtlCol="0" anchor="ctr" wrap="square"/>
-          <a:lstStyle/>
-          <a:p>
-            <a:pPr algn="ctr">
-              <a:defRPr sz="1500">
-                <a:solidFill>
-                  <a:srgbClr val="666666"/>
-                </a:solidFill>
-                <a:latin typeface="Calibri"/>
-              </a:defRPr>
-            </a:pPr>
-            <a:r>
-              <a:t>Browser showing ju.html / du.html</a:t>
-            </a:r>
-          </a:p>
-        </p:txBody>
-      </p:sp>
-      <p:sp>
-        <p:nvSpPr>
-          <p:cNvPr id="6" name="TextBox 5"/>
+            <a:endParaRPr/>
+          </a:p>
+        </p:txBody>
+      </p:sp>
+      <p:sp>
+        <p:nvSpPr>
+          <p:cNvPr id="1342279975" name="TextBox 5"/>
           <p:cNvSpPr txBox="1"/>
           <p:nvPr/>
         </p:nvSpPr>
-        <p:spPr>
+        <p:spPr bwMode="auto">
           <a:xfrm>
             <a:off x="548640" y="6355080"/>
             <a:ext cx="11064240" cy="320040"/>
@@ -5845,36 +6021,75 @@
               </a:defRPr>
             </a:pPr>
             <a:r>
+              <a:rPr/>
               <a:t>CSE 360 - Networking Experiments Overview   |   5/11</a:t>
             </a:r>
-          </a:p>
-        </p:txBody>
-      </p:sp>
+            <a:endParaRPr/>
+          </a:p>
+        </p:txBody>
+      </p:sp>
+      <p:pic>
+        <p:nvPicPr>
+          <p:cNvPr id="2030982370" name=""/>
+          <p:cNvPicPr>
+            <a:picLocks noChangeAspect="1"/>
+          </p:cNvPicPr>
+          <p:nvPr/>
+        </p:nvPicPr>
+        <p:blipFill rotWithShape="1">
+          <a:blip r:embed="rId3"/>
+          <a:stretch/>
+        </p:blipFill>
+        <p:spPr bwMode="auto">
+          <a:xfrm flipH="0" flipV="0">
+            <a:off x="7106755" y="828260"/>
+            <a:ext cx="4973461" cy="4459771"/>
+          </a:xfrm>
+          <a:prstGeom prst="rect">
+            <a:avLst/>
+          </a:prstGeom>
+        </p:spPr>
+      </p:pic>
     </p:spTree>
   </p:cSld>
   <p:clrMapOvr>
     <a:masterClrMapping/>
   </p:clrMapOvr>
+  <mc:AlternateContent xmlns:mc="http://schemas.openxmlformats.org/markup-compatibility/2006">
+    <mc:Choice xmlns:p159="http://schemas.microsoft.com/office/powerpoint/2015/09/main" xmlns:p14="http://schemas.microsoft.com/office/powerpoint/2010/main" Requires="p159">
+      <p:transition p14:dur="500" advClick="1"/>
+    </mc:Choice>
+    <mc:Fallback>
+      <p:transition advClick="1"/>
+    </mc:Fallback>
+  </mc:AlternateContent>
 </p:sld>
 </file>
 
 <file path=ppt/slides/slide6.xml><?xml version="1.0" encoding="utf-8"?>
-<p:sld xmlns:a="http://schemas.openxmlformats.org/drawingml/2006/main" xmlns:p="http://schemas.openxmlformats.org/presentationml/2006/main" xmlns:r="http://schemas.openxmlformats.org/officeDocument/2006/relationships">
-  <p:cSld>
+<p:sld xmlns:a="http://schemas.openxmlformats.org/drawingml/2006/main" xmlns:r="http://schemas.openxmlformats.org/officeDocument/2006/relationships" xmlns:p="http://schemas.openxmlformats.org/presentationml/2006/main" xmlns:m="http://schemas.openxmlformats.org/officeDocument/2006/math" xmlns:w="http://schemas.openxmlformats.org/wordprocessingml/2006/main" xmlns:mc="http://schemas.openxmlformats.org/markup-compatibility/2006" showMasterPhAnim="0" showMasterSp="1" show="1">
+  <p:cSld name="">
     <p:spTree>
       <p:nvGrpSpPr>
         <p:cNvPr id="1" name=""/>
         <p:cNvGrpSpPr/>
         <p:nvPr/>
       </p:nvGrpSpPr>
-      <p:grpSpPr/>
-      <p:sp>
-        <p:nvSpPr>
-          <p:cNvPr id="2" name="TextBox 1"/>
+      <p:grpSpPr bwMode="auto">
+        <a:xfrm>
+          <a:off x="0" y="0"/>
+          <a:ext cx="0" cy="0"/>
+          <a:chOff x="0" y="0"/>
+          <a:chExt cx="0" cy="0"/>
+        </a:xfrm>
+      </p:grpSpPr>
+      <p:sp>
+        <p:nvSpPr>
+          <p:cNvPr id="805243863" name="TextBox 1"/>
           <p:cNvSpPr txBox="1"/>
           <p:nvPr/>
         </p:nvSpPr>
-        <p:spPr>
+        <p:spPr bwMode="auto">
           <a:xfrm>
             <a:off x="548640" y="228600"/>
             <a:ext cx="11064240" cy="777240"/>
@@ -5899,18 +6114,20 @@
               </a:defRPr>
             </a:pPr>
             <a:r>
+              <a:rPr/>
               <a:t>Static routing with two routers</a:t>
             </a:r>
-          </a:p>
-        </p:txBody>
-      </p:sp>
-      <p:sp>
-        <p:nvSpPr>
-          <p:cNvPr id="3" name="TextBox 2"/>
+            <a:endParaRPr/>
+          </a:p>
+        </p:txBody>
+      </p:sp>
+      <p:sp>
+        <p:nvSpPr>
+          <p:cNvPr id="1723235553" name="TextBox 2"/>
           <p:cNvSpPr txBox="1"/>
           <p:nvPr/>
         </p:nvSpPr>
-        <p:spPr>
+        <p:spPr bwMode="auto">
           <a:xfrm>
             <a:off x="548640" y="1234440"/>
             <a:ext cx="6675120" cy="4023360"/>
@@ -5938,8 +6155,10 @@
               </a:defRPr>
             </a:pPr>
             <a:r>
+              <a:rPr/>
               <a:t>•  Three /24 networks: left LAN, middle router-to-router net, right LAN.</a:t>
             </a:r>
+            <a:endParaRPr/>
           </a:p>
           <a:p>
             <a:pPr>
@@ -5954,8 +6173,10 @@
               </a:defRPr>
             </a:pPr>
             <a:r>
+              <a:rPr/>
               <a:t>•  Each interface: ip address + no shutdown (GUI: Port Status On).</a:t>
             </a:r>
+            <a:endParaRPr/>
           </a:p>
           <a:p>
             <a:pPr>
@@ -5970,8 +6191,10 @@
               </a:defRPr>
             </a:pPr>
             <a:r>
+              <a:rPr/>
               <a:t>•  Connected routes (C) appear alone; remote nets need ip route &lt;net&gt; &lt;mask&gt; &lt;next-hop&gt;.</a:t>
             </a:r>
+            <a:endParaRPr/>
           </a:p>
           <a:p>
             <a:pPr>
@@ -5986,8 +6209,10 @@
               </a:defRPr>
             </a:pPr>
             <a:r>
+              <a:rPr/>
               <a:t>•  Next hop must be directly reachable, e.g. 192.168.2.0 via 192.168.3.2.</a:t>
             </a:r>
+            <a:endParaRPr/>
           </a:p>
           <a:p>
             <a:pPr>
@@ -6002,128 +6227,20 @@
               </a:defRPr>
             </a:pPr>
             <a:r>
+              <a:rPr/>
               <a:t>•  Read sh ip route: C = connected, S [1/0] = static. ping !!!!! = 5 replies.</a:t>
             </a:r>
-          </a:p>
-        </p:txBody>
-      </p:sp>
-      <p:sp>
-        <p:nvSpPr>
-          <p:cNvPr id="4" name="Rectangle 3"/>
-          <p:cNvSpPr/>
-          <p:nvPr/>
-        </p:nvSpPr>
-        <p:spPr>
-          <a:xfrm>
-            <a:off x="7589520" y="1234440"/>
-            <a:ext cx="4023360" cy="1920240"/>
-          </a:xfrm>
-          <a:prstGeom prst="rect">
-            <a:avLst/>
-          </a:prstGeom>
-          <a:solidFill>
-            <a:srgbClr val="F2F2F2"/>
-          </a:solidFill>
-          <a:ln w="19050">
-            <a:solidFill>
-              <a:srgbClr val="999999"/>
-            </a:solidFill>
-          </a:ln>
-        </p:spPr>
-        <p:style>
-          <a:lnRef idx="1">
-            <a:schemeClr val="accent1"/>
-          </a:lnRef>
-          <a:fillRef idx="3">
-            <a:schemeClr val="accent1"/>
-          </a:fillRef>
-          <a:effectRef idx="2">
-            <a:schemeClr val="accent1"/>
-          </a:effectRef>
-          <a:fontRef idx="minor">
-            <a:schemeClr val="lt1"/>
-          </a:fontRef>
-        </p:style>
-        <p:txBody>
-          <a:bodyPr rtlCol="0" anchor="ctr" wrap="square"/>
-          <a:lstStyle/>
-          <a:p>
-            <a:pPr algn="ctr">
-              <a:defRPr sz="1500">
-                <a:solidFill>
-                  <a:srgbClr val="666666"/>
-                </a:solidFill>
-                <a:latin typeface="Calibri"/>
-              </a:defRPr>
-            </a:pPr>
-            <a:r>
-              <a:t>Topology with the 3 subnets labelled</a:t>
-            </a:r>
-          </a:p>
-        </p:txBody>
-      </p:sp>
-      <p:sp>
-        <p:nvSpPr>
-          <p:cNvPr id="5" name="Rectangle 4"/>
-          <p:cNvSpPr/>
-          <p:nvPr/>
-        </p:nvSpPr>
-        <p:spPr>
-          <a:xfrm>
-            <a:off x="7589520" y="3337560"/>
-            <a:ext cx="4023360" cy="1920240"/>
-          </a:xfrm>
-          <a:prstGeom prst="rect">
-            <a:avLst/>
-          </a:prstGeom>
-          <a:solidFill>
-            <a:srgbClr val="F2F2F2"/>
-          </a:solidFill>
-          <a:ln w="19050">
-            <a:solidFill>
-              <a:srgbClr val="999999"/>
-            </a:solidFill>
-          </a:ln>
-        </p:spPr>
-        <p:style>
-          <a:lnRef idx="1">
-            <a:schemeClr val="accent1"/>
-          </a:lnRef>
-          <a:fillRef idx="3">
-            <a:schemeClr val="accent1"/>
-          </a:fillRef>
-          <a:effectRef idx="2">
-            <a:schemeClr val="accent1"/>
-          </a:effectRef>
-          <a:fontRef idx="minor">
-            <a:schemeClr val="lt1"/>
-          </a:fontRef>
-        </p:style>
-        <p:txBody>
-          <a:bodyPr rtlCol="0" anchor="ctr" wrap="square"/>
-          <a:lstStyle/>
-          <a:p>
-            <a:pPr algn="ctr">
-              <a:defRPr sz="1500">
-                <a:solidFill>
-                  <a:srgbClr val="666666"/>
-                </a:solidFill>
-                <a:latin typeface="Calibri"/>
-              </a:defRPr>
-            </a:pPr>
-            <a:r>
-              <a:t>sh ip route showing C + S lines</a:t>
-            </a:r>
-          </a:p>
-        </p:txBody>
-      </p:sp>
-      <p:sp>
-        <p:nvSpPr>
-          <p:cNvPr id="6" name="TextBox 5"/>
+            <a:endParaRPr/>
+          </a:p>
+        </p:txBody>
+      </p:sp>
+      <p:sp>
+        <p:nvSpPr>
+          <p:cNvPr id="516297993" name="TextBox 5"/>
           <p:cNvSpPr txBox="1"/>
           <p:nvPr/>
         </p:nvSpPr>
-        <p:spPr>
+        <p:spPr bwMode="auto">
           <a:xfrm>
             <a:off x="548640" y="6355080"/>
             <a:ext cx="11064240" cy="320040"/>
@@ -6148,36 +6265,75 @@
               </a:defRPr>
             </a:pPr>
             <a:r>
+              <a:rPr/>
               <a:t>CSE 360 - Networking Experiments Overview   |   6/11</a:t>
             </a:r>
-          </a:p>
-        </p:txBody>
-      </p:sp>
+            <a:endParaRPr/>
+          </a:p>
+        </p:txBody>
+      </p:sp>
+      <p:pic>
+        <p:nvPicPr>
+          <p:cNvPr id="1013132399" name=""/>
+          <p:cNvPicPr>
+            <a:picLocks noChangeAspect="1"/>
+          </p:cNvPicPr>
+          <p:nvPr/>
+        </p:nvPicPr>
+        <p:blipFill rotWithShape="1">
+          <a:blip r:embed="rId3"/>
+          <a:stretch/>
+        </p:blipFill>
+        <p:spPr bwMode="auto">
+          <a:xfrm flipH="0" flipV="0">
+            <a:off x="6906259" y="368741"/>
+            <a:ext cx="5201565" cy="4725160"/>
+          </a:xfrm>
+          <a:prstGeom prst="rect">
+            <a:avLst/>
+          </a:prstGeom>
+        </p:spPr>
+      </p:pic>
     </p:spTree>
   </p:cSld>
   <p:clrMapOvr>
     <a:masterClrMapping/>
   </p:clrMapOvr>
+  <mc:AlternateContent xmlns:mc="http://schemas.openxmlformats.org/markup-compatibility/2006">
+    <mc:Choice xmlns:p159="http://schemas.microsoft.com/office/powerpoint/2015/09/main" xmlns:p14="http://schemas.microsoft.com/office/powerpoint/2010/main" Requires="p159">
+      <p:transition p14:dur="500" advClick="1"/>
+    </mc:Choice>
+    <mc:Fallback>
+      <p:transition advClick="1"/>
+    </mc:Fallback>
+  </mc:AlternateContent>
 </p:sld>
 </file>
 
 <file path=ppt/slides/slide7.xml><?xml version="1.0" encoding="utf-8"?>
-<p:sld xmlns:a="http://schemas.openxmlformats.org/drawingml/2006/main" xmlns:p="http://schemas.openxmlformats.org/presentationml/2006/main" xmlns:r="http://schemas.openxmlformats.org/officeDocument/2006/relationships">
-  <p:cSld>
+<p:sld xmlns:a="http://schemas.openxmlformats.org/drawingml/2006/main" xmlns:r="http://schemas.openxmlformats.org/officeDocument/2006/relationships" xmlns:p="http://schemas.openxmlformats.org/presentationml/2006/main" xmlns:m="http://schemas.openxmlformats.org/officeDocument/2006/math" xmlns:w="http://schemas.openxmlformats.org/wordprocessingml/2006/main" xmlns:mc="http://schemas.openxmlformats.org/markup-compatibility/2006" showMasterPhAnim="0" showMasterSp="1" show="1">
+  <p:cSld name="">
     <p:spTree>
       <p:nvGrpSpPr>
         <p:cNvPr id="1" name=""/>
         <p:cNvGrpSpPr/>
         <p:nvPr/>
       </p:nvGrpSpPr>
-      <p:grpSpPr/>
-      <p:sp>
-        <p:nvSpPr>
-          <p:cNvPr id="2" name="TextBox 1"/>
+      <p:grpSpPr bwMode="auto">
+        <a:xfrm>
+          <a:off x="0" y="0"/>
+          <a:ext cx="0" cy="0"/>
+          <a:chOff x="0" y="0"/>
+          <a:chExt cx="0" cy="0"/>
+        </a:xfrm>
+      </p:grpSpPr>
+      <p:sp>
+        <p:nvSpPr>
+          <p:cNvPr id="1299773222" name="TextBox 1"/>
           <p:cNvSpPr txBox="1"/>
           <p:nvPr/>
         </p:nvSpPr>
-        <p:spPr>
+        <p:spPr bwMode="auto">
           <a:xfrm>
             <a:off x="548640" y="228600"/>
             <a:ext cx="11064240" cy="777240"/>
@@ -6202,18 +6358,20 @@
               </a:defRPr>
             </a:pPr>
             <a:r>
+              <a:rPr/>
               <a:t>Variant: a host on a hub between routers</a:t>
             </a:r>
-          </a:p>
-        </p:txBody>
-      </p:sp>
-      <p:sp>
-        <p:nvSpPr>
-          <p:cNvPr id="3" name="TextBox 2"/>
+            <a:endParaRPr/>
+          </a:p>
+        </p:txBody>
+      </p:sp>
+      <p:sp>
+        <p:nvSpPr>
+          <p:cNvPr id="1824830027" name="TextBox 2"/>
           <p:cNvSpPr txBox="1"/>
           <p:nvPr/>
         </p:nvSpPr>
-        <p:spPr>
+        <p:spPr bwMode="auto">
           <a:xfrm>
             <a:off x="548640" y="1234440"/>
             <a:ext cx="6675120" cy="4023360"/>
@@ -6241,8 +6399,10 @@
               </a:defRPr>
             </a:pPr>
             <a:r>
+              <a:rPr/>
               <a:t>•  Same routing idea; the new part is the shared middle subnet.</a:t>
             </a:r>
+            <a:endParaRPr/>
           </a:p>
           <a:p>
             <a:pPr>
@@ -6257,8 +6417,10 @@
               </a:defRPr>
             </a:pPr>
             <a:r>
+              <a:rPr/>
               <a:t>•  Hub = one shared medium: Router0 leg + middle PC + Router1 leg all in 192.168.4.0/24.</a:t>
             </a:r>
+            <a:endParaRPr/>
           </a:p>
           <a:p>
             <a:pPr>
@@ -6273,8 +6435,10 @@
               </a:defRPr>
             </a:pPr>
             <a:r>
+              <a:rPr/>
               <a:t>•  Each router still needs one static route to the far end only.</a:t>
             </a:r>
+            <a:endParaRPr/>
           </a:p>
           <a:p>
             <a:pPr>
@@ -6289,8 +6453,10 @@
               </a:defRPr>
             </a:pPr>
             <a:r>
+              <a:rPr/>
               <a:t>•  Middle PC reaches both sides with no extra routes (it is directly connected).</a:t>
             </a:r>
+            <a:endParaRPr/>
           </a:p>
           <a:p>
             <a:pPr>
@@ -6305,73 +6471,20 @@
               </a:defRPr>
             </a:pPr>
             <a:r>
+              <a:rPr/>
               <a:t>•  Same port rule: every used interface Port Status On.</a:t>
             </a:r>
-          </a:p>
-        </p:txBody>
-      </p:sp>
-      <p:sp>
-        <p:nvSpPr>
-          <p:cNvPr id="4" name="Rectangle 3"/>
-          <p:cNvSpPr/>
-          <p:nvPr/>
-        </p:nvSpPr>
-        <p:spPr>
-          <a:xfrm>
-            <a:off x="7589520" y="1234440"/>
-            <a:ext cx="4023360" cy="4023360"/>
-          </a:xfrm>
-          <a:prstGeom prst="rect">
-            <a:avLst/>
-          </a:prstGeom>
-          <a:solidFill>
-            <a:srgbClr val="F2F2F2"/>
-          </a:solidFill>
-          <a:ln w="19050">
-            <a:solidFill>
-              <a:srgbClr val="999999"/>
-            </a:solidFill>
-          </a:ln>
-        </p:spPr>
-        <p:style>
-          <a:lnRef idx="1">
-            <a:schemeClr val="accent1"/>
-          </a:lnRef>
-          <a:fillRef idx="3">
-            <a:schemeClr val="accent1"/>
-          </a:fillRef>
-          <a:effectRef idx="2">
-            <a:schemeClr val="accent1"/>
-          </a:effectRef>
-          <a:fontRef idx="minor">
-            <a:schemeClr val="lt1"/>
-          </a:fontRef>
-        </p:style>
-        <p:txBody>
-          <a:bodyPr rtlCol="0" anchor="ctr" wrap="square"/>
-          <a:lstStyle/>
-          <a:p>
-            <a:pPr algn="ctr">
-              <a:defRPr sz="1500">
-                <a:solidFill>
-                  <a:srgbClr val="666666"/>
-                </a:solidFill>
-                <a:latin typeface="Calibri"/>
-              </a:defRPr>
-            </a:pPr>
-            <a:r>
-              <a:t>Hub topology with middle addresses</a:t>
-            </a:r>
-          </a:p>
-        </p:txBody>
-      </p:sp>
-      <p:sp>
-        <p:nvSpPr>
-          <p:cNvPr id="5" name="TextBox 4"/>
+            <a:endParaRPr/>
+          </a:p>
+        </p:txBody>
+      </p:sp>
+      <p:sp>
+        <p:nvSpPr>
+          <p:cNvPr id="2000885652" name="TextBox 4"/>
           <p:cNvSpPr txBox="1"/>
           <p:nvPr/>
         </p:nvSpPr>
-        <p:spPr>
+        <p:spPr bwMode="auto">
           <a:xfrm>
             <a:off x="548640" y="6355080"/>
             <a:ext cx="11064240" cy="320040"/>
@@ -6396,36 +6509,75 @@
               </a:defRPr>
             </a:pPr>
             <a:r>
+              <a:rPr/>
               <a:t>CSE 360 - Networking Experiments Overview   |   7/11</a:t>
             </a:r>
-          </a:p>
-        </p:txBody>
-      </p:sp>
+            <a:endParaRPr/>
+          </a:p>
+        </p:txBody>
+      </p:sp>
+      <p:pic>
+        <p:nvPicPr>
+          <p:cNvPr id="1901583756" name=""/>
+          <p:cNvPicPr>
+            <a:picLocks noChangeAspect="1"/>
+          </p:cNvPicPr>
+          <p:nvPr/>
+        </p:nvPicPr>
+        <p:blipFill rotWithShape="1">
+          <a:blip r:embed="rId3"/>
+          <a:stretch/>
+        </p:blipFill>
+        <p:spPr bwMode="auto">
+          <a:xfrm flipH="0" flipV="0">
+            <a:off x="5903246" y="2989676"/>
+            <a:ext cx="6149771" cy="3365403"/>
+          </a:xfrm>
+          <a:prstGeom prst="rect">
+            <a:avLst/>
+          </a:prstGeom>
+        </p:spPr>
+      </p:pic>
     </p:spTree>
   </p:cSld>
   <p:clrMapOvr>
     <a:masterClrMapping/>
   </p:clrMapOvr>
+  <mc:AlternateContent xmlns:mc="http://schemas.openxmlformats.org/markup-compatibility/2006">
+    <mc:Choice xmlns:p159="http://schemas.microsoft.com/office/powerpoint/2015/09/main" xmlns:p14="http://schemas.microsoft.com/office/powerpoint/2010/main" Requires="p159">
+      <p:transition p14:dur="500" advClick="1"/>
+    </mc:Choice>
+    <mc:Fallback>
+      <p:transition advClick="1"/>
+    </mc:Fallback>
+  </mc:AlternateContent>
 </p:sld>
 </file>
 
 <file path=ppt/slides/slide8.xml><?xml version="1.0" encoding="utf-8"?>
-<p:sld xmlns:a="http://schemas.openxmlformats.org/drawingml/2006/main" xmlns:p="http://schemas.openxmlformats.org/presentationml/2006/main" xmlns:r="http://schemas.openxmlformats.org/officeDocument/2006/relationships">
-  <p:cSld>
+<p:sld xmlns:a="http://schemas.openxmlformats.org/drawingml/2006/main" xmlns:r="http://schemas.openxmlformats.org/officeDocument/2006/relationships" xmlns:p="http://schemas.openxmlformats.org/presentationml/2006/main" xmlns:m="http://schemas.openxmlformats.org/officeDocument/2006/math" xmlns:w="http://schemas.openxmlformats.org/wordprocessingml/2006/main" xmlns:mc="http://schemas.openxmlformats.org/markup-compatibility/2006" showMasterPhAnim="0" showMasterSp="1" show="1">
+  <p:cSld name="">
     <p:spTree>
       <p:nvGrpSpPr>
         <p:cNvPr id="1" name=""/>
         <p:cNvGrpSpPr/>
         <p:nvPr/>
       </p:nvGrpSpPr>
-      <p:grpSpPr/>
-      <p:sp>
-        <p:nvSpPr>
-          <p:cNvPr id="2" name="TextBox 1"/>
+      <p:grpSpPr bwMode="auto">
+        <a:xfrm>
+          <a:off x="0" y="0"/>
+          <a:ext cx="0" cy="0"/>
+          <a:chOff x="0" y="0"/>
+          <a:chExt cx="0" cy="0"/>
+        </a:xfrm>
+      </p:grpSpPr>
+      <p:sp>
+        <p:nvSpPr>
+          <p:cNvPr id="1271287245" name="TextBox 1"/>
           <p:cNvSpPr txBox="1"/>
           <p:nvPr/>
         </p:nvSpPr>
-        <p:spPr>
+        <p:spPr bwMode="auto">
           <a:xfrm>
             <a:off x="548640" y="228600"/>
             <a:ext cx="11064240" cy="777240"/>
@@ -6450,18 +6602,20 @@
               </a:defRPr>
             </a:pPr>
             <a:r>
+              <a:rPr/>
               <a:t>Three routers in series</a:t>
             </a:r>
-          </a:p>
-        </p:txBody>
-      </p:sp>
-      <p:sp>
-        <p:nvSpPr>
-          <p:cNvPr id="3" name="TextBox 2"/>
+            <a:endParaRPr/>
+          </a:p>
+        </p:txBody>
+      </p:sp>
+      <p:sp>
+        <p:nvSpPr>
+          <p:cNvPr id="511474984" name="TextBox 2"/>
           <p:cNvSpPr txBox="1"/>
           <p:nvPr/>
         </p:nvSpPr>
-        <p:spPr>
+        <p:spPr bwMode="auto">
           <a:xfrm>
             <a:off x="548640" y="1234440"/>
             <a:ext cx="6675120" cy="4023360"/>
@@ -6489,8 +6643,10 @@
               </a:defRPr>
             </a:pPr>
             <a:r>
+              <a:rPr/>
               <a:t>•  Four /24 networks end to end: 192.168.1.0 - .2.0 - .3.0 - .4.0.</a:t>
             </a:r>
+            <a:endParaRPr/>
           </a:p>
           <a:p>
             <a:pPr>
@@ -6505,8 +6661,10 @@
               </a:defRPr>
             </a:pPr>
             <a:r>
+              <a:rPr/>
               <a:t>•  PC0 192.168.1.2 gw .1.1; PC1 192.168.4.2 gw .4.1.</a:t>
             </a:r>
+            <a:endParaRPr/>
           </a:p>
           <a:p>
             <a:pPr>
@@ -6521,8 +6679,10 @@
               </a:defRPr>
             </a:pPr>
             <a:r>
+              <a:rPr/>
               <a:t>•  Each router learns 2 networks alone, so 2 static routes each (6 total).</a:t>
             </a:r>
+            <a:endParaRPr/>
           </a:p>
           <a:p>
             <a:pPr>
@@ -6537,144 +6697,20 @@
               </a:defRPr>
             </a:pPr>
             <a:r>
-              <a:t>•  Router-to-router Ethernet needs crossover (or Automatic); straight-through stays red.</a:t>
-            </a:r>
-          </a:p>
-          <a:p>
-            <a:pPr>
-              <a:spcAft>
-                <a:spcPts val="800"/>
-              </a:spcAft>
-              <a:defRPr sz="1800">
-                <a:solidFill>
-                  <a:srgbClr val="222222"/>
-                </a:solidFill>
-                <a:latin typeface="Calibri"/>
-              </a:defRPr>
-            </a:pPr>
-            <a:r>
+              <a:rPr/>
               <a:t>•  Verify PC0 to PC1 ping across 3 hops + simulation Successful.</a:t>
             </a:r>
-          </a:p>
-        </p:txBody>
-      </p:sp>
-      <p:sp>
-        <p:nvSpPr>
-          <p:cNvPr id="4" name="Rectangle 3"/>
-          <p:cNvSpPr/>
-          <p:nvPr/>
-        </p:nvSpPr>
-        <p:spPr>
-          <a:xfrm>
-            <a:off x="7589520" y="1234440"/>
-            <a:ext cx="4023360" cy="1920240"/>
-          </a:xfrm>
-          <a:prstGeom prst="rect">
-            <a:avLst/>
-          </a:prstGeom>
-          <a:solidFill>
-            <a:srgbClr val="F2F2F2"/>
-          </a:solidFill>
-          <a:ln w="19050">
-            <a:solidFill>
-              <a:srgbClr val="999999"/>
-            </a:solidFill>
-          </a:ln>
-        </p:spPr>
-        <p:style>
-          <a:lnRef idx="1">
-            <a:schemeClr val="accent1"/>
-          </a:lnRef>
-          <a:fillRef idx="3">
-            <a:schemeClr val="accent1"/>
-          </a:fillRef>
-          <a:effectRef idx="2">
-            <a:schemeClr val="accent1"/>
-          </a:effectRef>
-          <a:fontRef idx="minor">
-            <a:schemeClr val="lt1"/>
-          </a:fontRef>
-        </p:style>
-        <p:txBody>
-          <a:bodyPr rtlCol="0" anchor="ctr" wrap="square"/>
-          <a:lstStyle/>
-          <a:p>
-            <a:pPr algn="ctr">
-              <a:defRPr sz="1500">
-                <a:solidFill>
-                  <a:srgbClr val="666666"/>
-                </a:solidFill>
-                <a:latin typeface="Calibri"/>
-              </a:defRPr>
-            </a:pPr>
-            <a:r>
-              <a:t>Full 3-router topology</a:t>
-            </a:r>
-          </a:p>
-        </p:txBody>
-      </p:sp>
-      <p:sp>
-        <p:nvSpPr>
-          <p:cNvPr id="5" name="Rectangle 4"/>
-          <p:cNvSpPr/>
-          <p:nvPr/>
-        </p:nvSpPr>
-        <p:spPr>
-          <a:xfrm>
-            <a:off x="7589520" y="3337560"/>
-            <a:ext cx="4023360" cy="1920240"/>
-          </a:xfrm>
-          <a:prstGeom prst="rect">
-            <a:avLst/>
-          </a:prstGeom>
-          <a:solidFill>
-            <a:srgbClr val="F2F2F2"/>
-          </a:solidFill>
-          <a:ln w="19050">
-            <a:solidFill>
-              <a:srgbClr val="999999"/>
-            </a:solidFill>
-          </a:ln>
-        </p:spPr>
-        <p:style>
-          <a:lnRef idx="1">
-            <a:schemeClr val="accent1"/>
-          </a:lnRef>
-          <a:fillRef idx="3">
-            <a:schemeClr val="accent1"/>
-          </a:fillRef>
-          <a:effectRef idx="2">
-            <a:schemeClr val="accent1"/>
-          </a:effectRef>
-          <a:fontRef idx="minor">
-            <a:schemeClr val="lt1"/>
-          </a:fontRef>
-        </p:style>
-        <p:txBody>
-          <a:bodyPr rtlCol="0" anchor="ctr" wrap="square"/>
-          <a:lstStyle/>
-          <a:p>
-            <a:pPr algn="ctr">
-              <a:defRPr sz="1500">
-                <a:solidFill>
-                  <a:srgbClr val="666666"/>
-                </a:solidFill>
-                <a:latin typeface="Calibri"/>
-              </a:defRPr>
-            </a:pPr>
-            <a:r>
-              <a:t>End-to-end ping PC0 to PC1</a:t>
-            </a:r>
-          </a:p>
-        </p:txBody>
-      </p:sp>
-      <p:sp>
-        <p:nvSpPr>
-          <p:cNvPr id="6" name="TextBox 5"/>
+            <a:endParaRPr/>
+          </a:p>
+        </p:txBody>
+      </p:sp>
+      <p:sp>
+        <p:nvSpPr>
+          <p:cNvPr id="217147674" name="TextBox 5"/>
           <p:cNvSpPr txBox="1"/>
           <p:nvPr/>
         </p:nvSpPr>
-        <p:spPr>
+        <p:spPr bwMode="auto">
           <a:xfrm>
             <a:off x="548640" y="6355080"/>
             <a:ext cx="11064240" cy="320040"/>
@@ -6699,36 +6735,75 @@
               </a:defRPr>
             </a:pPr>
             <a:r>
+              <a:rPr/>
               <a:t>CSE 360 - Networking Experiments Overview   |   8/11</a:t>
             </a:r>
-          </a:p>
-        </p:txBody>
-      </p:sp>
+            <a:endParaRPr/>
+          </a:p>
+        </p:txBody>
+      </p:sp>
+      <p:pic>
+        <p:nvPicPr>
+          <p:cNvPr id="761303288" name=""/>
+          <p:cNvPicPr>
+            <a:picLocks noChangeAspect="1"/>
+          </p:cNvPicPr>
+          <p:nvPr/>
+        </p:nvPicPr>
+        <p:blipFill rotWithShape="1">
+          <a:blip r:embed="rId3"/>
+          <a:stretch/>
+        </p:blipFill>
+        <p:spPr bwMode="auto">
+          <a:xfrm flipH="0" flipV="0">
+            <a:off x="6675496" y="2360543"/>
+            <a:ext cx="4769720" cy="4355722"/>
+          </a:xfrm>
+          <a:prstGeom prst="rect">
+            <a:avLst/>
+          </a:prstGeom>
+        </p:spPr>
+      </p:pic>
     </p:spTree>
   </p:cSld>
   <p:clrMapOvr>
     <a:masterClrMapping/>
   </p:clrMapOvr>
+  <mc:AlternateContent xmlns:mc="http://schemas.openxmlformats.org/markup-compatibility/2006">
+    <mc:Choice xmlns:p159="http://schemas.microsoft.com/office/powerpoint/2015/09/main" xmlns:p14="http://schemas.microsoft.com/office/powerpoint/2010/main" Requires="p159">
+      <p:transition p14:dur="500" advClick="1"/>
+    </mc:Choice>
+    <mc:Fallback>
+      <p:transition advClick="1"/>
+    </mc:Fallback>
+  </mc:AlternateContent>
 </p:sld>
 </file>
 
 <file path=ppt/slides/slide9.xml><?xml version="1.0" encoding="utf-8"?>
-<p:sld xmlns:a="http://schemas.openxmlformats.org/drawingml/2006/main" xmlns:p="http://schemas.openxmlformats.org/presentationml/2006/main" xmlns:r="http://schemas.openxmlformats.org/officeDocument/2006/relationships">
-  <p:cSld>
+<p:sld xmlns:a="http://schemas.openxmlformats.org/drawingml/2006/main" xmlns:r="http://schemas.openxmlformats.org/officeDocument/2006/relationships" xmlns:p="http://schemas.openxmlformats.org/presentationml/2006/main" xmlns:m="http://schemas.openxmlformats.org/officeDocument/2006/math" xmlns:w="http://schemas.openxmlformats.org/wordprocessingml/2006/main" xmlns:mc="http://schemas.openxmlformats.org/markup-compatibility/2006" showMasterPhAnim="0" showMasterSp="1" show="1">
+  <p:cSld name="">
     <p:spTree>
       <p:nvGrpSpPr>
         <p:cNvPr id="1" name=""/>
         <p:cNvGrpSpPr/>
         <p:nvPr/>
       </p:nvGrpSpPr>
-      <p:grpSpPr/>
-      <p:sp>
-        <p:nvSpPr>
-          <p:cNvPr id="2" name="TextBox 1"/>
+      <p:grpSpPr bwMode="auto">
+        <a:xfrm>
+          <a:off x="0" y="0"/>
+          <a:ext cx="0" cy="0"/>
+          <a:chOff x="0" y="0"/>
+          <a:chExt cx="0" cy="0"/>
+        </a:xfrm>
+      </p:grpSpPr>
+      <p:sp>
+        <p:nvSpPr>
+          <p:cNvPr id="2066965321" name="TextBox 1"/>
           <p:cNvSpPr txBox="1"/>
           <p:nvPr/>
         </p:nvSpPr>
-        <p:spPr>
+        <p:spPr bwMode="auto">
           <a:xfrm>
             <a:off x="548640" y="228600"/>
             <a:ext cx="11064240" cy="777240"/>
@@ -6753,18 +6828,20 @@
               </a:defRPr>
             </a:pPr>
             <a:r>
+              <a:rPr/>
               <a:t>Mixed Ethernet + serial network</a:t>
             </a:r>
-          </a:p>
-        </p:txBody>
-      </p:sp>
-      <p:sp>
-        <p:nvSpPr>
-          <p:cNvPr id="3" name="TextBox 2"/>
+            <a:endParaRPr/>
+          </a:p>
+        </p:txBody>
+      </p:sp>
+      <p:sp>
+        <p:nvSpPr>
+          <p:cNvPr id="636148378" name="TextBox 2"/>
           <p:cNvSpPr txBox="1"/>
           <p:nvPr/>
         </p:nvSpPr>
-        <p:spPr>
+        <p:spPr bwMode="auto">
           <a:xfrm>
             <a:off x="548640" y="1234440"/>
             <a:ext cx="6675120" cy="4023360"/>
@@ -6792,8 +6869,10 @@
               </a:defRPr>
             </a:pPr>
             <a:r>
+              <a:rPr/>
               <a:t>•  Same static-routing logic, now with serial links (s2/0, s3/0) plus FastEthernet.</a:t>
             </a:r>
+            <a:endParaRPr/>
           </a:p>
           <a:p>
             <a:pPr>
@@ -6808,176 +6887,20 @@
               </a:defRPr>
             </a:pPr>
             <a:r>
-              <a:t>•  Serial needs a clock rate on the DCE end; Ethernet does not.</a:t>
-            </a:r>
-          </a:p>
-          <a:p>
-            <a:pPr>
-              <a:spcAft>
-                <a:spcPts val="800"/>
-              </a:spcAft>
-              <a:defRPr sz="1800">
-                <a:solidFill>
-                  <a:srgbClr val="222222"/>
-                </a:solidFill>
-                <a:latin typeface="Calibri"/>
-              </a:defRPr>
-            </a:pPr>
-            <a:r>
-              <a:t>•  Router picks the exit interface by longest match in the table; tracert shows each hop.</a:t>
-            </a:r>
-          </a:p>
-          <a:p>
-            <a:pPr>
-              <a:spcAft>
-                <a:spcPts val="800"/>
-              </a:spcAft>
-              <a:defRPr sz="1800">
-                <a:solidFill>
-                  <a:srgbClr val="222222"/>
-                </a:solidFill>
-                <a:latin typeface="Calibri"/>
-              </a:defRPr>
-            </a:pPr>
-            <a:r>
-              <a:t>•  Packet loss here usually means cables, clocks, or a missing reverse route.</a:t>
-            </a:r>
-          </a:p>
-          <a:p>
-            <a:pPr>
-              <a:spcAft>
-                <a:spcPts val="800"/>
-              </a:spcAft>
-              <a:defRPr sz="1800">
-                <a:solidFill>
-                  <a:srgbClr val="222222"/>
-                </a:solidFill>
-                <a:latin typeface="Calibri"/>
-              </a:defRPr>
-            </a:pPr>
-            <a:r>
-              <a:t>•  This lab repeats the routing ideas above on a larger topology.</a:t>
-            </a:r>
-          </a:p>
-        </p:txBody>
-      </p:sp>
-      <p:sp>
-        <p:nvSpPr>
-          <p:cNvPr id="4" name="Rectangle 3"/>
-          <p:cNvSpPr/>
-          <p:nvPr/>
-        </p:nvSpPr>
-        <p:spPr>
-          <a:xfrm>
-            <a:off x="7589520" y="1234440"/>
-            <a:ext cx="4023360" cy="1920240"/>
-          </a:xfrm>
-          <a:prstGeom prst="rect">
-            <a:avLst/>
-          </a:prstGeom>
-          <a:solidFill>
-            <a:srgbClr val="F2F2F2"/>
-          </a:solidFill>
-          <a:ln w="19050">
-            <a:solidFill>
-              <a:srgbClr val="999999"/>
-            </a:solidFill>
-          </a:ln>
-        </p:spPr>
-        <p:style>
-          <a:lnRef idx="1">
-            <a:schemeClr val="accent1"/>
-          </a:lnRef>
-          <a:fillRef idx="3">
-            <a:schemeClr val="accent1"/>
-          </a:fillRef>
-          <a:effectRef idx="2">
-            <a:schemeClr val="accent1"/>
-          </a:effectRef>
-          <a:fontRef idx="minor">
-            <a:schemeClr val="lt1"/>
-          </a:fontRef>
-        </p:style>
-        <p:txBody>
-          <a:bodyPr rtlCol="0" anchor="ctr" wrap="square"/>
-          <a:lstStyle/>
-          <a:p>
-            <a:pPr algn="ctr">
-              <a:defRPr sz="1500">
-                <a:solidFill>
-                  <a:srgbClr val="666666"/>
-                </a:solidFill>
-                <a:latin typeface="Calibri"/>
-              </a:defRPr>
-            </a:pPr>
-            <a:r>
-              <a:t>Topology with serial links labelled</a:t>
-            </a:r>
-          </a:p>
-        </p:txBody>
-      </p:sp>
-      <p:sp>
-        <p:nvSpPr>
-          <p:cNvPr id="5" name="Rectangle 4"/>
-          <p:cNvSpPr/>
-          <p:nvPr/>
-        </p:nvSpPr>
-        <p:spPr>
-          <a:xfrm>
-            <a:off x="7589520" y="3337560"/>
-            <a:ext cx="4023360" cy="1920240"/>
-          </a:xfrm>
-          <a:prstGeom prst="rect">
-            <a:avLst/>
-          </a:prstGeom>
-          <a:solidFill>
-            <a:srgbClr val="F2F2F2"/>
-          </a:solidFill>
-          <a:ln w="19050">
-            <a:solidFill>
-              <a:srgbClr val="999999"/>
-            </a:solidFill>
-          </a:ln>
-        </p:spPr>
-        <p:style>
-          <a:lnRef idx="1">
-            <a:schemeClr val="accent1"/>
-          </a:lnRef>
-          <a:fillRef idx="3">
-            <a:schemeClr val="accent1"/>
-          </a:fillRef>
-          <a:effectRef idx="2">
-            <a:schemeClr val="accent1"/>
-          </a:effectRef>
-          <a:fontRef idx="minor">
-            <a:schemeClr val="lt1"/>
-          </a:fontRef>
-        </p:style>
-        <p:txBody>
-          <a:bodyPr rtlCol="0" anchor="ctr" wrap="square"/>
-          <a:lstStyle/>
-          <a:p>
-            <a:pPr algn="ctr">
-              <a:defRPr sz="1500">
-                <a:solidFill>
-                  <a:srgbClr val="666666"/>
-                </a:solidFill>
-                <a:latin typeface="Calibri"/>
-              </a:defRPr>
-            </a:pPr>
-            <a:r>
-              <a:t>tracert across the network</a:t>
-            </a:r>
-          </a:p>
-        </p:txBody>
-      </p:sp>
-      <p:sp>
-        <p:nvSpPr>
-          <p:cNvPr id="6" name="TextBox 5"/>
+              <a:rPr/>
+              <a:t>•  tracert shows each hop.</a:t>
+            </a:r>
+            <a:endParaRPr/>
+          </a:p>
+        </p:txBody>
+      </p:sp>
+      <p:sp>
+        <p:nvSpPr>
+          <p:cNvPr id="719444564" name="TextBox 5"/>
           <p:cNvSpPr txBox="1"/>
           <p:nvPr/>
         </p:nvSpPr>
-        <p:spPr>
+        <p:spPr bwMode="auto">
           <a:xfrm>
             <a:off x="548640" y="6355080"/>
             <a:ext cx="11064240" cy="320040"/>
@@ -7002,21 +6925,53 @@
               </a:defRPr>
             </a:pPr>
             <a:r>
+              <a:rPr/>
               <a:t>CSE 360 - Networking Experiments Overview   |   9/11</a:t>
             </a:r>
-          </a:p>
-        </p:txBody>
-      </p:sp>
+            <a:endParaRPr/>
+          </a:p>
+        </p:txBody>
+      </p:sp>
+      <p:pic>
+        <p:nvPicPr>
+          <p:cNvPr id="1409072808" name=""/>
+          <p:cNvPicPr>
+            <a:picLocks noChangeAspect="1"/>
+          </p:cNvPicPr>
+          <p:nvPr/>
+        </p:nvPicPr>
+        <p:blipFill rotWithShape="1">
+          <a:blip r:embed="rId3"/>
+          <a:stretch/>
+        </p:blipFill>
+        <p:spPr bwMode="auto">
+          <a:xfrm flipH="0" flipV="0">
+            <a:off x="4403365" y="1682492"/>
+            <a:ext cx="6834786" cy="4992627"/>
+          </a:xfrm>
+          <a:prstGeom prst="rect">
+            <a:avLst/>
+          </a:prstGeom>
+        </p:spPr>
+      </p:pic>
     </p:spTree>
   </p:cSld>
   <p:clrMapOvr>
     <a:masterClrMapping/>
   </p:clrMapOvr>
+  <mc:AlternateContent xmlns:mc="http://schemas.openxmlformats.org/markup-compatibility/2006">
+    <mc:Choice xmlns:p159="http://schemas.microsoft.com/office/powerpoint/2015/09/main" xmlns:p14="http://schemas.microsoft.com/office/powerpoint/2010/main" Requires="p159">
+      <p:transition p14:dur="500" advClick="1"/>
+    </mc:Choice>
+    <mc:Fallback>
+      <p:transition advClick="1"/>
+    </mc:Fallback>
+  </mc:AlternateContent>
 </p:sld>
 </file>
 
 <file path=ppt/theme/theme1.xml><?xml version="1.0" encoding="utf-8"?>
-<a:theme xmlns:a="http://schemas.openxmlformats.org/drawingml/2006/main" name="Office Theme">
+<a:theme xmlns:a="http://schemas.openxmlformats.org/drawingml/2006/main" xmlns:r="http://schemas.openxmlformats.org/officeDocument/2006/relationships" xmlns:p="http://schemas.openxmlformats.org/presentationml/2006/main" name="Office Theme">
   <a:themeElements>
     <a:clrScheme name="Office">
       <a:dk1>
@@ -7059,73 +7014,13 @@
     <a:fontScheme name="Office">
       <a:majorFont>
         <a:latin typeface="Calibri"/>
-        <a:ea typeface=""/>
-        <a:cs typeface=""/>
-        <a:font script="Jpan" typeface="ＭＳ Ｐゴシック"/>
-        <a:font script="Hang" typeface="맑은 고딕"/>
-        <a:font script="Hans" typeface="宋体"/>
-        <a:font script="Hant" typeface="新細明體"/>
-        <a:font script="Arab" typeface="Times New Roman"/>
-        <a:font script="Hebr" typeface="Times New Roman"/>
-        <a:font script="Thai" typeface="Angsana New"/>
-        <a:font script="Ethi" typeface="Nyala"/>
-        <a:font script="Beng" typeface="Vrinda"/>
-        <a:font script="Gujr" typeface="Shruti"/>
-        <a:font script="Khmr" typeface="MoolBoran"/>
-        <a:font script="Knda" typeface="Tunga"/>
-        <a:font script="Guru" typeface="Raavi"/>
-        <a:font script="Cans" typeface="Euphemia"/>
-        <a:font script="Cher" typeface="Plantagenet Cherokee"/>
-        <a:font script="Yiii" typeface="Microsoft Yi Baiti"/>
-        <a:font script="Tibt" typeface="Microsoft Himalaya"/>
-        <a:font script="Thaa" typeface="MV Boli"/>
-        <a:font script="Deva" typeface="Mangal"/>
-        <a:font script="Telu" typeface="Gautami"/>
-        <a:font script="Taml" typeface="Latha"/>
-        <a:font script="Syrc" typeface="Estrangelo Edessa"/>
-        <a:font script="Orya" typeface="Kalinga"/>
-        <a:font script="Mlym" typeface="Kartika"/>
-        <a:font script="Laoo" typeface="DokChampa"/>
-        <a:font script="Sinh" typeface="Iskoola Pota"/>
-        <a:font script="Mong" typeface="Mongolian Baiti"/>
-        <a:font script="Viet" typeface="Times New Roman"/>
-        <a:font script="Uigh" typeface="Microsoft Uighur"/>
-        <a:font script="Geor" typeface="Sylfaen"/>
+        <a:ea typeface="Arial"/>
+        <a:cs typeface="Arial"/>
       </a:majorFont>
       <a:minorFont>
         <a:latin typeface="Calibri"/>
-        <a:ea typeface=""/>
-        <a:cs typeface=""/>
-        <a:font script="Jpan" typeface="ＭＳ Ｐゴシック"/>
-        <a:font script="Hang" typeface="맑은 고딕"/>
-        <a:font script="Hans" typeface="宋体"/>
-        <a:font script="Hant" typeface="新細明體"/>
-        <a:font script="Arab" typeface="Arial"/>
-        <a:font script="Hebr" typeface="Arial"/>
-        <a:font script="Thai" typeface="Cordia New"/>
-        <a:font script="Ethi" typeface="Nyala"/>
-        <a:font script="Beng" typeface="Vrinda"/>
-        <a:font script="Gujr" typeface="Shruti"/>
-        <a:font script="Khmr" typeface="DaunPenh"/>
-        <a:font script="Knda" typeface="Tunga"/>
-        <a:font script="Guru" typeface="Raavi"/>
-        <a:font script="Cans" typeface="Euphemia"/>
-        <a:font script="Cher" typeface="Plantagenet Cherokee"/>
-        <a:font script="Yiii" typeface="Microsoft Yi Baiti"/>
-        <a:font script="Tibt" typeface="Microsoft Himalaya"/>
-        <a:font script="Thaa" typeface="MV Boli"/>
-        <a:font script="Deva" typeface="Mangal"/>
-        <a:font script="Telu" typeface="Gautami"/>
-        <a:font script="Taml" typeface="Latha"/>
-        <a:font script="Syrc" typeface="Estrangelo Edessa"/>
-        <a:font script="Orya" typeface="Kalinga"/>
-        <a:font script="Mlym" typeface="Kartika"/>
-        <a:font script="Laoo" typeface="DokChampa"/>
-        <a:font script="Sinh" typeface="Iskoola Pota"/>
-        <a:font script="Mong" typeface="Mongolian Baiti"/>
-        <a:font script="Viet" typeface="Arial"/>
-        <a:font script="Uigh" typeface="Microsoft Uighur"/>
-        <a:font script="Geor" typeface="Sylfaen"/>
+        <a:ea typeface="Arial"/>
+        <a:cs typeface="Arial"/>
       </a:minorFont>
     </a:fontScheme>
     <a:fmtScheme name="Office">
@@ -7133,7 +7028,7 @@
         <a:solidFill>
           <a:schemeClr val="phClr"/>
         </a:solidFill>
-        <a:gradFill rotWithShape="1">
+        <a:gradFill>
           <a:gsLst>
             <a:gs pos="0">
               <a:schemeClr val="phClr">
@@ -7156,7 +7051,7 @@
           </a:gsLst>
           <a:lin ang="16200000" scaled="1"/>
         </a:gradFill>
-        <a:gradFill rotWithShape="1">
+        <a:gradFill>
           <a:gsLst>
             <a:gs pos="0">
               <a:schemeClr val="phClr">
@@ -7243,7 +7138,7 @@
         <a:solidFill>
           <a:schemeClr val="phClr"/>
         </a:solidFill>
-        <a:gradFill rotWithShape="1">
+        <a:gradFill>
           <a:gsLst>
             <a:gs pos="0">
               <a:schemeClr val="phClr">
@@ -7265,11 +7160,9 @@
               </a:schemeClr>
             </a:gs>
           </a:gsLst>
-          <a:path path="circle">
-            <a:fillToRect l="50000" t="-80000" r="50000" b="180000"/>
-          </a:path>
+          <a:path path="circle"/>
         </a:gradFill>
-        <a:gradFill rotWithShape="1">
+        <a:gradFill>
           <a:gsLst>
             <a:gs pos="0">
               <a:schemeClr val="phClr">
@@ -7284,16 +7177,14 @@
               </a:schemeClr>
             </a:gs>
           </a:gsLst>
-          <a:path path="circle">
-            <a:fillToRect l="50000" t="50000" r="50000" b="50000"/>
-          </a:path>
+          <a:path path="circle"/>
         </a:gradFill>
       </a:bgFillStyleLst>
     </a:fmtScheme>
   </a:themeElements>
   <a:objectDefaults>
     <a:spDef>
-      <a:spPr/>
+      <a:spPr bwMode="auto"/>
       <a:bodyPr/>
       <a:lstStyle/>
       <a:style>
@@ -7312,7 +7203,7 @@
       </a:style>
     </a:spDef>
     <a:lnDef>
-      <a:spPr/>
+      <a:spPr bwMode="auto"/>
       <a:bodyPr/>
       <a:lstStyle/>
       <a:style>
@@ -7331,12 +7222,11 @@
       </a:style>
     </a:lnDef>
   </a:objectDefaults>
-  <a:extraClrSchemeLst/>
 </a:theme>
 </file>
 
 <file path=ppt/theme/theme2.xml><?xml version="1.0" encoding="utf-8"?>
-<a:theme xmlns:a="http://schemas.openxmlformats.org/drawingml/2006/main" name="Office Theme">
+<a:theme xmlns:a="http://schemas.openxmlformats.org/drawingml/2006/main" xmlns:r="http://schemas.openxmlformats.org/officeDocument/2006/relationships" xmlns:p="http://schemas.openxmlformats.org/presentationml/2006/main" name="Office Theme">
   <a:themeElements>
     <a:clrScheme name="Office">
       <a:dk1>
@@ -7376,76 +7266,16 @@
         <a:srgbClr val="800080"/>
       </a:folHlink>
     </a:clrScheme>
-    <a:fontScheme name="Office">
+    <a:fontScheme name="">
       <a:majorFont>
         <a:latin typeface="Calibri"/>
-        <a:ea typeface=""/>
-        <a:cs typeface=""/>
-        <a:font script="Jpan" typeface="ＭＳ Ｐゴシック"/>
-        <a:font script="Hang" typeface="맑은 고딕"/>
-        <a:font script="Hans" typeface="宋体"/>
-        <a:font script="Hant" typeface="新細明體"/>
-        <a:font script="Arab" typeface="Times New Roman"/>
-        <a:font script="Hebr" typeface="Times New Roman"/>
-        <a:font script="Thai" typeface="Angsana New"/>
-        <a:font script="Ethi" typeface="Nyala"/>
-        <a:font script="Beng" typeface="Vrinda"/>
-        <a:font script="Gujr" typeface="Shruti"/>
-        <a:font script="Khmr" typeface="MoolBoran"/>
-        <a:font script="Knda" typeface="Tunga"/>
-        <a:font script="Guru" typeface="Raavi"/>
-        <a:font script="Cans" typeface="Euphemia"/>
-        <a:font script="Cher" typeface="Plantagenet Cherokee"/>
-        <a:font script="Yiii" typeface="Microsoft Yi Baiti"/>
-        <a:font script="Tibt" typeface="Microsoft Himalaya"/>
-        <a:font script="Thaa" typeface="MV Boli"/>
-        <a:font script="Deva" typeface="Mangal"/>
-        <a:font script="Telu" typeface="Gautami"/>
-        <a:font script="Taml" typeface="Latha"/>
-        <a:font script="Syrc" typeface="Estrangelo Edessa"/>
-        <a:font script="Orya" typeface="Kalinga"/>
-        <a:font script="Mlym" typeface="Kartika"/>
-        <a:font script="Laoo" typeface="DokChampa"/>
-        <a:font script="Sinh" typeface="Iskoola Pota"/>
-        <a:font script="Mong" typeface="Mongolian Baiti"/>
-        <a:font script="Viet" typeface="Times New Roman"/>
-        <a:font script="Uigh" typeface="Microsoft Uighur"/>
-        <a:font script="Geor" typeface="Sylfaen"/>
+        <a:ea typeface="Arial"/>
+        <a:cs typeface="Arial"/>
       </a:majorFont>
       <a:minorFont>
         <a:latin typeface="Calibri"/>
-        <a:ea typeface=""/>
-        <a:cs typeface=""/>
-        <a:font script="Jpan" typeface="ＭＳ Ｐゴシック"/>
-        <a:font script="Hang" typeface="맑은 고딕"/>
-        <a:font script="Hans" typeface="宋体"/>
-        <a:font script="Hant" typeface="新細明體"/>
-        <a:font script="Arab" typeface="Arial"/>
-        <a:font script="Hebr" typeface="Arial"/>
-        <a:font script="Thai" typeface="Cordia New"/>
-        <a:font script="Ethi" typeface="Nyala"/>
-        <a:font script="Beng" typeface="Vrinda"/>
-        <a:font script="Gujr" typeface="Shruti"/>
-        <a:font script="Khmr" typeface="DaunPenh"/>
-        <a:font script="Knda" typeface="Tunga"/>
-        <a:font script="Guru" typeface="Raavi"/>
-        <a:font script="Cans" typeface="Euphemia"/>
-        <a:font script="Cher" typeface="Plantagenet Cherokee"/>
-        <a:font script="Yiii" typeface="Microsoft Yi Baiti"/>
-        <a:font script="Tibt" typeface="Microsoft Himalaya"/>
-        <a:font script="Thaa" typeface="MV Boli"/>
-        <a:font script="Deva" typeface="Mangal"/>
-        <a:font script="Telu" typeface="Gautami"/>
-        <a:font script="Taml" typeface="Latha"/>
-        <a:font script="Syrc" typeface="Estrangelo Edessa"/>
-        <a:font script="Orya" typeface="Kalinga"/>
-        <a:font script="Mlym" typeface="Kartika"/>
-        <a:font script="Laoo" typeface="DokChampa"/>
-        <a:font script="Sinh" typeface="Iskoola Pota"/>
-        <a:font script="Mong" typeface="Mongolian Baiti"/>
-        <a:font script="Viet" typeface="Arial"/>
-        <a:font script="Uigh" typeface="Microsoft Uighur"/>
-        <a:font script="Geor" typeface="Sylfaen"/>
+        <a:ea typeface="Arial"/>
+        <a:cs typeface="Arial"/>
       </a:minorFont>
     </a:fontScheme>
     <a:fmtScheme name="Office">
@@ -7453,7 +7283,7 @@
         <a:solidFill>
           <a:schemeClr val="phClr"/>
         </a:solidFill>
-        <a:gradFill rotWithShape="1">
+        <a:gradFill>
           <a:gsLst>
             <a:gs pos="0">
               <a:schemeClr val="phClr">
@@ -7476,7 +7306,7 @@
           </a:gsLst>
           <a:lin ang="16200000" scaled="1"/>
         </a:gradFill>
-        <a:gradFill rotWithShape="1">
+        <a:gradFill>
           <a:gsLst>
             <a:gs pos="0">
               <a:schemeClr val="phClr">
@@ -7563,7 +7393,7 @@
         <a:solidFill>
           <a:schemeClr val="phClr"/>
         </a:solidFill>
-        <a:gradFill rotWithShape="1">
+        <a:gradFill>
           <a:gsLst>
             <a:gs pos="0">
               <a:schemeClr val="phClr">
@@ -7585,11 +7415,9 @@
               </a:schemeClr>
             </a:gs>
           </a:gsLst>
-          <a:path path="circle">
-            <a:fillToRect l="50000" t="-80000" r="50000" b="180000"/>
-          </a:path>
+          <a:path path="circle"/>
         </a:gradFill>
-        <a:gradFill rotWithShape="1">
+        <a:gradFill>
           <a:gsLst>
             <a:gs pos="0">
               <a:schemeClr val="phClr">
@@ -7604,16 +7432,14 @@
               </a:schemeClr>
             </a:gs>
           </a:gsLst>
-          <a:path path="circle">
-            <a:fillToRect l="50000" t="50000" r="50000" b="50000"/>
-          </a:path>
+          <a:path path="circle"/>
         </a:gradFill>
       </a:bgFillStyleLst>
     </a:fmtScheme>
   </a:themeElements>
   <a:objectDefaults>
     <a:spDef>
-      <a:spPr/>
+      <a:spPr bwMode="auto"/>
       <a:bodyPr/>
       <a:lstStyle/>
       <a:style>
@@ -7632,7 +7458,7 @@
       </a:style>
     </a:spDef>
     <a:lnDef>
-      <a:spPr/>
+      <a:spPr bwMode="auto"/>
       <a:bodyPr/>
       <a:lstStyle/>
       <a:style>
@@ -7651,6 +7477,5 @@
       </a:style>
     </a:lnDef>
   </a:objectDefaults>
-  <a:extraClrSchemeLst/>
 </a:theme>
 </file>